--- a/Apollo_Windows_3Month_Marketing_Roadmap.pptx
+++ b/Apollo_Windows_3Month_Marketing_Roadmap.pptx
@@ -20,6 +20,7 @@
     <p:sldId id="268" r:id="rId22"/>
     <p:sldId id="269" r:id="rId23"/>
     <p:sldId id="270" r:id="rId24"/>
+    <p:sldId id="271" r:id="rId25"/>
   </p:sldIdLst>
   <p:sldSz cx="12192000" cy="6858000"/>
   <p:notesSz cx="6858000" cy="12192000"/>
@@ -80,18 +81,18 @@
       <p:grpSpPr/>
       <p:sp>
         <p:nvSpPr>
-          <p:cNvPr id="2" name="top_bar"/>
+          <p:cNvPr id="2" name="top"/>
           <p:cNvSpPr/>
           <p:nvPr/>
         </p:nvSpPr>
         <p:spPr>
           <a:xfrm>
             <a:off x="0" y="0"/>
-            <a:ext cx="12192000" cy="137160"/>
+            <a:ext cx="12192000" cy="109728"/>
           </a:xfrm>
           <a:prstGeom prst="rect"/>
           <a:solidFill>
-            <a:srgbClr val="E74C3C"/>
+            <a:srgbClr val="C41E3A"/>
           </a:solidFill>
           <a:ln>
             <a:noFill/>
@@ -100,14 +101,14 @@
       </p:sp>
       <p:sp>
         <p:nvSpPr>
-          <p:cNvPr id="3" name="title"/>
+          <p:cNvPr id="3" name="t"/>
           <p:cNvSpPr txBox="1"/>
           <p:nvPr/>
         </p:nvSpPr>
         <p:spPr>
           <a:xfrm>
-            <a:off x="1371600" y="1645920"/>
-            <a:ext cx="6400800" cy="1371600"/>
+            <a:off x="1097280" y="1463040"/>
+            <a:ext cx="6858000" cy="1645920"/>
           </a:xfrm>
           <a:prstGeom prst="rect"/>
           <a:noFill/>
@@ -122,7 +123,7 @@
               </a:spcBef>
             </a:pPr>
             <a:r>
-              <a:rPr lang="en-US" sz="3200" b="1" dirty="0">
+              <a:rPr lang="en-US" sz="3400" b="1" dirty="0">
                 <a:solidFill>
                   <a:srgbClr val="FFFFFF"/>
                 </a:solidFill>
@@ -138,9 +139,9 @@
               </a:spcBef>
             </a:pPr>
             <a:r>
-              <a:rPr lang="en-US" sz="3200" b="1" dirty="0">
-                <a:solidFill>
-                  <a:srgbClr val="E74C3C"/>
+              <a:rPr lang="en-US" sz="3400" b="1" dirty="0">
+                <a:solidFill>
+                  <a:srgbClr val="C41E3A"/>
                 </a:solidFill>
                 <a:latin typeface="Segoe UI"/>
               </a:rPr>
@@ -151,13 +152,13 @@
       </p:sp>
       <p:sp>
         <p:nvSpPr>
-          <p:cNvPr id="4" name="subtitle"/>
+          <p:cNvPr id="4" name="sub"/>
           <p:cNvSpPr txBox="1"/>
           <p:nvPr/>
         </p:nvSpPr>
         <p:spPr>
           <a:xfrm>
-            <a:off x="1371600" y="3474720"/>
+            <a:off x="1097280" y="3474720"/>
             <a:ext cx="6400800" cy="1097280"/>
           </a:xfrm>
           <a:prstGeom prst="rect"/>
@@ -189,7 +190,7 @@
               </a:spcBef>
             </a:pPr>
             <a:r>
-              <a:rPr lang="en-US" sz="1400" b="0" dirty="0">
+              <a:rPr lang="en-US" sz="1300" b="0" dirty="0">
                 <a:solidFill>
                   <a:srgbClr val="7F8C8D"/>
                 </a:solidFill>
@@ -202,14 +203,14 @@
       </p:sp>
       <p:sp>
         <p:nvSpPr>
-          <p:cNvPr id="5" name="info_box"/>
+          <p:cNvPr id="5" name="box"/>
           <p:cNvSpPr/>
           <p:nvPr/>
         </p:nvSpPr>
         <p:spPr>
           <a:xfrm>
-            <a:off x="7772400" y="1828800"/>
-            <a:ext cx="2926080" cy="3200400"/>
+            <a:off x="8046720" y="1645920"/>
+            <a:ext cx="2743200" cy="3474720"/>
           </a:xfrm>
           <a:prstGeom prst="roundRect"/>
           <a:solidFill>
@@ -220,14 +221,14 @@
           </a:ln>
         </p:spPr>
         <p:txBody>
-          <a:bodyPr wrap="square" anchor="ctr"/>
+          <a:bodyPr wrap="square" anchor="ctr" lIns="91440" rIns="91440" tIns="45720" bIns="45720"/>
           <a:lstStyle/>
           <a:p>
-            <a:pPr algn="ctr"/>
+            <a:pPr algn="l"/>
             <a:r>
               <a:rPr lang="en-US" sz="1100" b="1">
                 <a:solidFill>
-                  <a:srgbClr val="E74C3C"/>
+                  <a:srgbClr val="C41E3A"/>
                 </a:solidFill>
                 <a:latin typeface="Segoe UI"/>
               </a:rPr>
@@ -235,19 +236,19 @@
             </a:r>
           </a:p>
           <a:p>
-            <a:pPr algn="ctr"/>
-            <a:r>
-              <a:rPr lang="en-US" sz="600" b="0">
-                <a:solidFill>
-                  <a:srgbClr val="FFFFFF"/>
-                </a:solidFill>
-                <a:latin typeface="Segoe UI"/>
-              </a:rPr>
-              <a:t/>
-            </a:r>
-          </a:p>
-          <a:p>
-            <a:pPr algn="ctr"/>
+            <a:pPr algn="l"/>
+            <a:r>
+              <a:rPr lang="en-US" sz="500" b="0">
+                <a:solidFill>
+                  <a:srgbClr val="FFFFFF"/>
+                </a:solidFill>
+                <a:latin typeface="Segoe UI"/>
+              </a:rPr>
+              <a:t/>
+            </a:r>
+          </a:p>
+          <a:p>
+            <a:pPr algn="l"/>
             <a:r>
               <a:rPr lang="en-US" sz="1000" b="0">
                 <a:solidFill>
@@ -259,7 +260,7 @@
             </a:r>
           </a:p>
           <a:p>
-            <a:pPr algn="ctr"/>
+            <a:pPr algn="l"/>
             <a:r>
               <a:rPr lang="en-US" sz="1000" b="0">
                 <a:solidFill>
@@ -271,7 +272,7 @@
             </a:r>
           </a:p>
           <a:p>
-            <a:pPr algn="ctr"/>
+            <a:pPr algn="l"/>
             <a:r>
               <a:rPr lang="en-US" sz="1000" b="0">
                 <a:solidFill>
@@ -283,7 +284,7 @@
             </a:r>
           </a:p>
           <a:p>
-            <a:pPr algn="ctr"/>
+            <a:pPr algn="l"/>
             <a:r>
               <a:rPr lang="en-US" sz="1000" b="0">
                 <a:solidFill>
@@ -295,7 +296,7 @@
             </a:r>
           </a:p>
           <a:p>
-            <a:pPr algn="ctr"/>
+            <a:pPr algn="l"/>
             <a:r>
               <a:rPr lang="en-US" sz="1000" b="0">
                 <a:solidFill>
@@ -307,33 +308,33 @@
             </a:r>
           </a:p>
           <a:p>
-            <a:pPr algn="ctr"/>
-            <a:r>
-              <a:rPr lang="en-US" sz="1000" b="0">
-                <a:solidFill>
-                  <a:srgbClr val="FFFFFF"/>
-                </a:solidFill>
-                <a:latin typeface="Segoe UI"/>
-              </a:rPr>
-              <a:t>Pricing Proposal</a:t>
+            <a:pPr algn="l"/>
+            <a:r>
+              <a:rPr lang="en-US" sz="1000" b="0">
+                <a:solidFill>
+                  <a:srgbClr val="FFFFFF"/>
+                </a:solidFill>
+                <a:latin typeface="Segoe UI"/>
+              </a:rPr>
+              <a:t>Service Proposal</a:t>
             </a:r>
           </a:p>
         </p:txBody>
       </p:sp>
       <p:sp>
         <p:nvSpPr>
-          <p:cNvPr id="6" name="bottom_bar"/>
+          <p:cNvPr id="6" name="bot"/>
           <p:cNvSpPr/>
           <p:nvPr/>
         </p:nvSpPr>
         <p:spPr>
           <a:xfrm>
-            <a:off x="0" y="6583680"/>
-            <a:ext cx="12192000" cy="274320"/>
+            <a:off x="0" y="6675120"/>
+            <a:ext cx="12192000" cy="182880"/>
           </a:xfrm>
           <a:prstGeom prst="rect"/>
           <a:solidFill>
-            <a:srgbClr val="E74C3C"/>
+            <a:srgbClr val="C41E3A"/>
           </a:solidFill>
           <a:ln>
             <a:noFill/>
@@ -365,14 +366,14 @@
       <p:grpSpPr/>
       <p:sp>
         <p:nvSpPr>
-          <p:cNvPr id="2" name="header_bg"/>
+          <p:cNvPr id="2" name="h"/>
           <p:cNvSpPr/>
           <p:nvPr/>
         </p:nvSpPr>
         <p:spPr>
           <a:xfrm>
             <a:off x="0" y="0"/>
-            <a:ext cx="12192000" cy="1097280"/>
+            <a:ext cx="12192000" cy="1005840"/>
           </a:xfrm>
           <a:prstGeom prst="rect"/>
           <a:solidFill>
@@ -385,13 +386,13 @@
       </p:sp>
       <p:sp>
         <p:nvSpPr>
-          <p:cNvPr id="3" name="header"/>
+          <p:cNvPr id="3" name="ht"/>
           <p:cNvSpPr txBox="1"/>
           <p:nvPr/>
         </p:nvSpPr>
         <p:spPr>
           <a:xfrm>
-            <a:off x="457200" y="182880"/>
+            <a:off x="457200" y="137160"/>
             <a:ext cx="9144000" cy="822960"/>
           </a:xfrm>
           <a:prstGeom prst="rect"/>
@@ -407,7 +408,7 @@
               </a:spcBef>
             </a:pPr>
             <a:r>
-              <a:rPr lang="en-US" sz="2000" b="1" dirty="0">
+              <a:rPr lang="en-US" sz="1900" b="1" dirty="0">
                 <a:solidFill>
                   <a:srgbClr val="FFFFFF"/>
                 </a:solidFill>
@@ -420,14 +421,14 @@
       </p:sp>
       <p:sp>
         <p:nvSpPr>
-          <p:cNvPr id="4" name="focus"/>
+          <p:cNvPr id="4" name="f"/>
           <p:cNvSpPr txBox="1"/>
           <p:nvPr/>
         </p:nvSpPr>
         <p:spPr>
           <a:xfrm>
-            <a:off x="457200" y="1188720"/>
-            <a:ext cx="10058400" cy="457200"/>
+            <a:off x="457200" y="1051560"/>
+            <a:ext cx="10058400" cy="365760"/>
           </a:xfrm>
           <a:prstGeom prst="rect"/>
           <a:noFill/>
@@ -442,13 +443,13 @@
               </a:spcBef>
             </a:pPr>
             <a:r>
-              <a:rPr lang="en-US" sz="1200" b="1" dirty="0">
-                <a:solidFill>
-                  <a:srgbClr val="E74C3C"/>
-                </a:solidFill>
-                <a:latin typeface="Segoe UI"/>
-              </a:rPr>
-              <a:t>THEME: Convert Followers to Leads | 4-5 posts/week + Stories daily</a:t>
+              <a:rPr lang="en-US" sz="1150" b="1" dirty="0">
+                <a:solidFill>
+                  <a:srgbClr val="C41E3A"/>
+                </a:solidFill>
+                <a:latin typeface="Segoe UI"/>
+              </a:rPr>
+              <a:t>THEME: Convert Followers to Leads | 4-5 posts/week + daily Stories</a:t>
             </a:r>
           </a:p>
         </p:txBody>
@@ -461,22 +462,22 @@
         </p:nvSpPr>
         <p:spPr>
           <a:xfrm>
-            <a:off x="457200" y="1737360"/>
-            <a:ext cx="5029200" cy="2286000"/>
+            <a:off x="365760" y="1554480"/>
+            <a:ext cx="5120640" cy="2194560"/>
           </a:xfrm>
           <a:prstGeom prst="roundRect"/>
           <a:solidFill>
-            <a:srgbClr val="F0F4F8"/>
+            <a:srgbClr val="F4F6F8"/>
           </a:solidFill>
           <a:ln>
             <a:noFill/>
           </a:ln>
         </p:spPr>
         <p:txBody>
-          <a:bodyPr wrap="square" anchor="ctr"/>
+          <a:bodyPr wrap="square" anchor="ctr" lIns="91440" rIns="91440" tIns="45720" bIns="45720"/>
           <a:lstStyle/>
           <a:p>
-            <a:pPr algn="ctr"/>
+            <a:pPr algn="l"/>
             <a:r>
               <a:rPr lang="en-US" sz="1100" b="1">
                 <a:solidFill>
@@ -488,9 +489,9 @@
             </a:r>
           </a:p>
           <a:p>
-            <a:pPr algn="ctr"/>
-            <a:r>
-              <a:rPr lang="en-US" sz="200" b="0">
+            <a:pPr algn="l"/>
+            <a:r>
+              <a:rPr lang="en-US" sz="150" b="0">
                 <a:solidFill>
                   <a:srgbClr val="333333"/>
                 </a:solidFill>
@@ -500,7 +501,7 @@
             </a:r>
           </a:p>
           <a:p>
-            <a:pPr algn="ctr"/>
+            <a:pPr algn="l"/>
             <a:r>
               <a:rPr lang="en-US" sz="950" b="0">
                 <a:solidFill>
@@ -512,7 +513,7 @@
             </a:r>
           </a:p>
           <a:p>
-            <a:pPr algn="ctr"/>
+            <a:pPr algn="l"/>
             <a:r>
               <a:rPr lang="en-US" sz="950" b="0">
                 <a:solidFill>
@@ -524,7 +525,7 @@
             </a:r>
           </a:p>
           <a:p>
-            <a:pPr algn="ctr"/>
+            <a:pPr algn="l"/>
             <a:r>
               <a:rPr lang="en-US" sz="950" b="0">
                 <a:solidFill>
@@ -536,7 +537,7 @@
             </a:r>
           </a:p>
           <a:p>
-            <a:pPr algn="ctr"/>
+            <a:pPr algn="l"/>
             <a:r>
               <a:rPr lang="en-US" sz="950" b="0">
                 <a:solidFill>
@@ -544,11 +545,11 @@
                 </a:solidFill>
                 <a:latin typeface="Segoe UI"/>
               </a:rPr>
-              <a:t>Fri: Side-by-side comparison (us vs generic)</a:t>
-            </a:r>
-          </a:p>
-          <a:p>
-            <a:pPr algn="ctr"/>
+              <a:t>Fri: Side-by-side comparison post</a:t>
+            </a:r>
+          </a:p>
+          <a:p>
+            <a:pPr algn="l"/>
             <a:r>
               <a:rPr lang="en-US" sz="950" b="0">
                 <a:solidFill>
@@ -560,9 +561,9 @@
             </a:r>
           </a:p>
           <a:p>
-            <a:pPr algn="ctr"/>
-            <a:r>
-              <a:rPr lang="en-US" sz="200" b="0">
+            <a:pPr algn="l"/>
+            <a:r>
+              <a:rPr lang="en-US" sz="150" b="0">
                 <a:solidFill>
                   <a:srgbClr val="333333"/>
                 </a:solidFill>
@@ -572,15 +573,15 @@
             </a:r>
           </a:p>
           <a:p>
-            <a:pPr algn="ctr"/>
+            <a:pPr algn="l"/>
             <a:r>
               <a:rPr lang="en-US" sz="950" b="0">
                 <a:solidFill>
-                  <a:srgbClr val="3498DB"/>
-                </a:solidFill>
-                <a:latin typeface="Segoe UI"/>
-              </a:rPr>
-              <a:t>Blog: 'How to Choose the Right Windows for Your Home'</a:t>
+                  <a:srgbClr val="2980B9"/>
+                </a:solidFill>
+                <a:latin typeface="Segoe UI"/>
+              </a:rPr>
+              <a:t>Blog: 'How to Choose the Right Windows'</a:t>
             </a:r>
           </a:p>
         </p:txBody>
@@ -593,22 +594,22 @@
         </p:nvSpPr>
         <p:spPr>
           <a:xfrm>
-            <a:off x="457200" y="4206240"/>
-            <a:ext cx="5029200" cy="2286000"/>
+            <a:off x="365760" y="3931920"/>
+            <a:ext cx="5120640" cy="2194560"/>
           </a:xfrm>
           <a:prstGeom prst="roundRect"/>
           <a:solidFill>
-            <a:srgbClr val="F0F4F8"/>
+            <a:srgbClr val="F4F6F8"/>
           </a:solidFill>
           <a:ln>
             <a:noFill/>
           </a:ln>
         </p:spPr>
         <p:txBody>
-          <a:bodyPr wrap="square" anchor="ctr"/>
+          <a:bodyPr wrap="square" anchor="ctr" lIns="91440" rIns="91440" tIns="45720" bIns="45720"/>
           <a:lstStyle/>
           <a:p>
-            <a:pPr algn="ctr"/>
+            <a:pPr algn="l"/>
             <a:r>
               <a:rPr lang="en-US" sz="1100" b="1">
                 <a:solidFill>
@@ -620,9 +621,9 @@
             </a:r>
           </a:p>
           <a:p>
-            <a:pPr algn="ctr"/>
-            <a:r>
-              <a:rPr lang="en-US" sz="200" b="0">
+            <a:pPr algn="l"/>
+            <a:r>
+              <a:rPr lang="en-US" sz="150" b="0">
                 <a:solidFill>
                   <a:srgbClr val="333333"/>
                 </a:solidFill>
@@ -632,7 +633,7 @@
             </a:r>
           </a:p>
           <a:p>
-            <a:pPr algn="ctr"/>
+            <a:pPr algn="l"/>
             <a:r>
               <a:rPr lang="en-US" sz="950" b="0">
                 <a:solidFill>
@@ -644,7 +645,7 @@
             </a:r>
           </a:p>
           <a:p>
-            <a:pPr algn="ctr"/>
+            <a:pPr algn="l"/>
             <a:r>
               <a:rPr lang="en-US" sz="950" b="0">
                 <a:solidFill>
@@ -656,7 +657,7 @@
             </a:r>
           </a:p>
           <a:p>
-            <a:pPr algn="ctr"/>
+            <a:pPr algn="l"/>
             <a:r>
               <a:rPr lang="en-US" sz="950" b="0">
                 <a:solidFill>
@@ -668,7 +669,7 @@
             </a:r>
           </a:p>
           <a:p>
-            <a:pPr algn="ctr"/>
+            <a:pPr algn="l"/>
             <a:r>
               <a:rPr lang="en-US" sz="950" b="0">
                 <a:solidFill>
@@ -676,11 +677,11 @@
                 </a:solidFill>
                 <a:latin typeface="Segoe UI"/>
               </a:rPr>
-              <a:t>Fri: End-of-quarter results/celebration</a:t>
-            </a:r>
-          </a:p>
-          <a:p>
-            <a:pPr algn="ctr"/>
+              <a:t>Fri: End-of-quarter celebration</a:t>
+            </a:r>
+          </a:p>
+          <a:p>
+            <a:pPr algn="l"/>
             <a:r>
               <a:rPr lang="en-US" sz="950" b="0">
                 <a:solidFill>
@@ -692,9 +693,9 @@
             </a:r>
           </a:p>
           <a:p>
-            <a:pPr algn="ctr"/>
-            <a:r>
-              <a:rPr lang="en-US" sz="200" b="0">
+            <a:pPr algn="l"/>
+            <a:r>
+              <a:rPr lang="en-US" sz="150" b="0">
                 <a:solidFill>
                   <a:srgbClr val="333333"/>
                 </a:solidFill>
@@ -704,43 +705,43 @@
             </a:r>
           </a:p>
           <a:p>
-            <a:pPr algn="ctr"/>
+            <a:pPr algn="l"/>
             <a:r>
               <a:rPr lang="en-US" sz="950" b="0">
                 <a:solidFill>
-                  <a:srgbClr val="3498DB"/>
-                </a:solidFill>
-                <a:latin typeface="Segoe UI"/>
-              </a:rPr>
-              <a:t>Blog: 'Window ROI: What Calgary Homeowners Should Know'</a:t>
+                  <a:srgbClr val="2980B9"/>
+                </a:solidFill>
+                <a:latin typeface="Segoe UI"/>
+              </a:rPr>
+              <a:t>Blog: 'Window ROI for Calgary Homeowners'</a:t>
             </a:r>
           </a:p>
         </p:txBody>
       </p:sp>
       <p:sp>
         <p:nvSpPr>
-          <p:cNvPr id="7" name="conversion"/>
+          <p:cNvPr id="7" name="conv"/>
           <p:cNvSpPr/>
           <p:nvPr/>
         </p:nvSpPr>
         <p:spPr>
           <a:xfrm>
-            <a:off x="5760720" y="1737360"/>
-            <a:ext cx="4846320" cy="4754880"/>
+            <a:off x="5669280" y="1554480"/>
+            <a:ext cx="4937760" cy="4572000"/>
           </a:xfrm>
           <a:prstGeom prst="roundRect"/>
           <a:solidFill>
-            <a:srgbClr val="E74C3C"/>
+            <a:srgbClr val="C41E3A"/>
           </a:solidFill>
           <a:ln>
             <a:noFill/>
           </a:ln>
         </p:spPr>
         <p:txBody>
-          <a:bodyPr wrap="square" anchor="ctr"/>
+          <a:bodyPr wrap="square" anchor="ctr" lIns="91440" rIns="91440" tIns="45720" bIns="45720"/>
           <a:lstStyle/>
           <a:p>
-            <a:pPr algn="ctr"/>
+            <a:pPr algn="l"/>
             <a:r>
               <a:rPr lang="en-US" sz="1200" b="1">
                 <a:solidFill>
@@ -752,19 +753,19 @@
             </a:r>
           </a:p>
           <a:p>
-            <a:pPr algn="ctr"/>
-            <a:r>
-              <a:rPr lang="en-US" sz="300" b="0">
-                <a:solidFill>
-                  <a:srgbClr val="FFFFFF"/>
-                </a:solidFill>
-                <a:latin typeface="Segoe UI"/>
-              </a:rPr>
-              <a:t/>
-            </a:r>
-          </a:p>
-          <a:p>
-            <a:pPr algn="ctr"/>
+            <a:pPr algn="l"/>
+            <a:r>
+              <a:rPr lang="en-US" sz="250" b="0">
+                <a:solidFill>
+                  <a:srgbClr val="FFFFFF"/>
+                </a:solidFill>
+                <a:latin typeface="Segoe UI"/>
+              </a:rPr>
+              <a:t/>
+            </a:r>
+          </a:p>
+          <a:p>
+            <a:pPr algn="l"/>
             <a:r>
               <a:rPr lang="en-US" sz="1050" b="1">
                 <a:solidFill>
@@ -776,7 +777,7 @@
             </a:r>
           </a:p>
           <a:p>
-            <a:pPr algn="ctr"/>
+            <a:pPr algn="l"/>
             <a:r>
               <a:rPr lang="en-US" sz="950" b="0">
                 <a:solidFill>
@@ -788,7 +789,7 @@
             </a:r>
           </a:p>
           <a:p>
-            <a:pPr algn="ctr"/>
+            <a:pPr algn="l"/>
             <a:r>
               <a:rPr lang="en-US" sz="950" b="0">
                 <a:solidFill>
@@ -800,7 +801,7 @@
             </a:r>
           </a:p>
           <a:p>
-            <a:pPr algn="ctr"/>
+            <a:pPr algn="l"/>
             <a:r>
               <a:rPr lang="en-US" sz="950" b="0">
                 <a:solidFill>
@@ -812,19 +813,19 @@
             </a:r>
           </a:p>
           <a:p>
-            <a:pPr algn="ctr"/>
-            <a:r>
-              <a:rPr lang="en-US" sz="200" b="0">
-                <a:solidFill>
-                  <a:srgbClr val="FFFFFF"/>
-                </a:solidFill>
-                <a:latin typeface="Segoe UI"/>
-              </a:rPr>
-              <a:t/>
-            </a:r>
-          </a:p>
-          <a:p>
-            <a:pPr algn="ctr"/>
+            <a:pPr algn="l"/>
+            <a:r>
+              <a:rPr lang="en-US" sz="150" b="0">
+                <a:solidFill>
+                  <a:srgbClr val="FFFFFF"/>
+                </a:solidFill>
+                <a:latin typeface="Segoe UI"/>
+              </a:rPr>
+              <a:t/>
+            </a:r>
+          </a:p>
+          <a:p>
+            <a:pPr algn="l"/>
             <a:r>
               <a:rPr lang="en-US" sz="1050" b="1">
                 <a:solidFill>
@@ -836,7 +837,7 @@
             </a:r>
           </a:p>
           <a:p>
-            <a:pPr algn="ctr"/>
+            <a:pPr algn="l"/>
             <a:r>
               <a:rPr lang="en-US" sz="950" b="0">
                 <a:solidFill>
@@ -848,7 +849,7 @@
             </a:r>
           </a:p>
           <a:p>
-            <a:pPr algn="ctr"/>
+            <a:pPr algn="l"/>
             <a:r>
               <a:rPr lang="en-US" sz="950" b="0">
                 <a:solidFill>
@@ -860,7 +861,7 @@
             </a:r>
           </a:p>
           <a:p>
-            <a:pPr algn="ctr"/>
+            <a:pPr algn="l"/>
             <a:r>
               <a:rPr lang="en-US" sz="950" b="0">
                 <a:solidFill>
@@ -872,19 +873,19 @@
             </a:r>
           </a:p>
           <a:p>
-            <a:pPr algn="ctr"/>
-            <a:r>
-              <a:rPr lang="en-US" sz="200" b="0">
-                <a:solidFill>
-                  <a:srgbClr val="FFFFFF"/>
-                </a:solidFill>
-                <a:latin typeface="Segoe UI"/>
-              </a:rPr>
-              <a:t/>
-            </a:r>
-          </a:p>
-          <a:p>
-            <a:pPr algn="ctr"/>
+            <a:pPr algn="l"/>
+            <a:r>
+              <a:rPr lang="en-US" sz="150" b="0">
+                <a:solidFill>
+                  <a:srgbClr val="FFFFFF"/>
+                </a:solidFill>
+                <a:latin typeface="Segoe UI"/>
+              </a:rPr>
+              <a:t/>
+            </a:r>
+          </a:p>
+          <a:p>
+            <a:pPr algn="l"/>
             <a:r>
               <a:rPr lang="en-US" sz="1050" b="1">
                 <a:solidFill>
@@ -896,7 +897,7 @@
             </a:r>
           </a:p>
           <a:p>
-            <a:pPr algn="ctr"/>
+            <a:pPr algn="l"/>
             <a:r>
               <a:rPr lang="en-US" sz="950" b="0">
                 <a:solidFill>
@@ -908,7 +909,7 @@
             </a:r>
           </a:p>
           <a:p>
-            <a:pPr algn="ctr"/>
+            <a:pPr algn="l"/>
             <a:r>
               <a:rPr lang="en-US" sz="950" b="0">
                 <a:solidFill>
@@ -946,14 +947,14 @@
       <p:grpSpPr/>
       <p:sp>
         <p:nvSpPr>
-          <p:cNvPr id="2" name="header_bg"/>
+          <p:cNvPr id="2" name="h"/>
           <p:cNvSpPr/>
           <p:nvPr/>
         </p:nvSpPr>
         <p:spPr>
           <a:xfrm>
             <a:off x="0" y="0"/>
-            <a:ext cx="12192000" cy="1097280"/>
+            <a:ext cx="12192000" cy="1005840"/>
           </a:xfrm>
           <a:prstGeom prst="rect"/>
           <a:solidFill>
@@ -966,13 +967,13 @@
       </p:sp>
       <p:sp>
         <p:nvSpPr>
-          <p:cNvPr id="3" name="header"/>
+          <p:cNvPr id="3" name="ht"/>
           <p:cNvSpPr txBox="1"/>
           <p:nvPr/>
         </p:nvSpPr>
         <p:spPr>
           <a:xfrm>
-            <a:off x="457200" y="182880"/>
+            <a:off x="457200" y="137160"/>
             <a:ext cx="9144000" cy="822960"/>
           </a:xfrm>
           <a:prstGeom prst="rect"/>
@@ -988,41 +989,41 @@
               </a:spcBef>
             </a:pPr>
             <a:r>
-              <a:rPr lang="en-US" sz="2000" b="1" dirty="0">
-                <a:solidFill>
-                  <a:srgbClr val="FFFFFF"/>
-                </a:solidFill>
-                <a:latin typeface="Segoe UI"/>
-              </a:rPr>
-              <a:t>07 | ADS STRATEGY - ENGAGEMENT &amp; FOLLOWER GROWTH</a:t>
+              <a:rPr lang="en-US" sz="1900" b="1" dirty="0">
+                <a:solidFill>
+                  <a:srgbClr val="FFFFFF"/>
+                </a:solidFill>
+                <a:latin typeface="Segoe UI"/>
+              </a:rPr>
+              <a:t>07 | ADS STRATEGY - $300 USD/MONTH BREAKDOWN</a:t>
             </a:r>
           </a:p>
         </p:txBody>
       </p:sp>
       <p:sp>
         <p:nvSpPr>
-          <p:cNvPr id="4" name="engagement"/>
+          <p:cNvPr id="4" name="pv"/>
           <p:cNvSpPr/>
           <p:nvPr/>
         </p:nvSpPr>
         <p:spPr>
           <a:xfrm>
-            <a:off x="457200" y="1371600"/>
-            <a:ext cx="5029200" cy="2743200"/>
+            <a:off x="365760" y="1280160"/>
+            <a:ext cx="5120640" cy="2926080"/>
           </a:xfrm>
           <a:prstGeom prst="roundRect"/>
           <a:solidFill>
-            <a:srgbClr val="3498DB"/>
+            <a:srgbClr val="2980B9"/>
           </a:solidFill>
           <a:ln>
             <a:noFill/>
           </a:ln>
         </p:spPr>
         <p:txBody>
-          <a:bodyPr wrap="square" anchor="ctr"/>
+          <a:bodyPr wrap="square" anchor="ctr" lIns="91440" rIns="91440" tIns="45720" bIns="45720"/>
           <a:lstStyle/>
           <a:p>
-            <a:pPr algn="ctr"/>
+            <a:pPr algn="l"/>
             <a:r>
               <a:rPr lang="en-US" sz="1200" b="1">
                 <a:solidFill>
@@ -1030,11 +1031,11 @@
                 </a:solidFill>
                 <a:latin typeface="Segoe UI"/>
               </a:rPr>
-              <a:t>ENGAGEMENT ADS</a:t>
-            </a:r>
-          </a:p>
-          <a:p>
-            <a:pPr algn="ctr"/>
+              <a:t>PROFILE VISITING ADS - $200/month</a:t>
+            </a:r>
+          </a:p>
+          <a:p>
+            <a:pPr algn="l"/>
             <a:r>
               <a:rPr lang="en-US" sz="200" b="0">
                 <a:solidFill>
@@ -1046,47 +1047,71 @@
             </a:r>
           </a:p>
           <a:p>
-            <a:pPr algn="ctr"/>
-            <a:r>
-              <a:rPr lang="en-US" sz="1000" b="0">
-                <a:solidFill>
-                  <a:srgbClr val="FFFFFF"/>
-                </a:solidFill>
-                <a:latin typeface="Segoe UI"/>
-              </a:rPr>
-              <a:t>Objective: Post Engagement</a:t>
-            </a:r>
-          </a:p>
-          <a:p>
-            <a:pPr algn="ctr"/>
-            <a:r>
-              <a:rPr lang="en-US" sz="1000" b="0">
-                <a:solidFill>
-                  <a:srgbClr val="FFFFFF"/>
-                </a:solidFill>
-                <a:latin typeface="Segoe UI"/>
-              </a:rPr>
-              <a:t>Budget: $300-500/month</a:t>
-            </a:r>
-          </a:p>
-          <a:p>
-            <a:pPr algn="ctr"/>
-            <a:r>
-              <a:rPr lang="en-US" sz="1000" b="0">
-                <a:solidFill>
-                  <a:srgbClr val="FFFFFF"/>
-                </a:solidFill>
-                <a:latin typeface="Segoe UI"/>
-              </a:rPr>
-              <a:t>Audience: Calgary homeowners 30-65</a:t>
-            </a:r>
-          </a:p>
-          <a:p>
-            <a:pPr algn="ctr"/>
-            <a:r>
-              <a:rPr lang="en-US" sz="1000" b="0">
-                <a:solidFill>
-                  <a:srgbClr val="FFFFFF"/>
+            <a:pPr algn="l"/>
+            <a:r>
+              <a:rPr lang="en-US" sz="1000" b="0">
+                <a:solidFill>
+                  <a:srgbClr val="FFFFFF"/>
+                </a:solidFill>
+                <a:latin typeface="Segoe UI"/>
+              </a:rPr>
+              <a:t>Objective: Profile Visits / Audience Building</a:t>
+            </a:r>
+          </a:p>
+          <a:p>
+            <a:pPr algn="l"/>
+            <a:r>
+              <a:rPr lang="en-US" sz="1000" b="0">
+                <a:solidFill>
+                  <a:srgbClr val="FFFFFF"/>
+                </a:solidFill>
+                <a:latin typeface="Segoe UI"/>
+              </a:rPr>
+              <a:t>Goal: Build relevant local audience base</a:t>
+            </a:r>
+          </a:p>
+          <a:p>
+            <a:pPr algn="l"/>
+            <a:r>
+              <a:rPr lang="en-US" sz="150" b="0">
+                <a:solidFill>
+                  <a:srgbClr val="FFFFFF"/>
+                </a:solidFill>
+                <a:latin typeface="Segoe UI"/>
+              </a:rPr>
+              <a:t/>
+            </a:r>
+          </a:p>
+          <a:p>
+            <a:pPr algn="l"/>
+            <a:r>
+              <a:rPr lang="en-US" sz="1000" b="1">
+                <a:solidFill>
+                  <a:srgbClr val="FFFFFF"/>
+                </a:solidFill>
+                <a:latin typeface="Segoe UI"/>
+              </a:rPr>
+              <a:t>Targeting:</a:t>
+            </a:r>
+          </a:p>
+          <a:p>
+            <a:pPr algn="l"/>
+            <a:r>
+              <a:rPr lang="en-US" sz="950" b="0">
+                <a:solidFill>
+                  <a:srgbClr val="D6EAF8"/>
+                </a:solidFill>
+                <a:latin typeface="Segoe UI"/>
+              </a:rPr>
+              <a:t>Calgary homeowners, age 30-65</a:t>
+            </a:r>
+          </a:p>
+          <a:p>
+            <a:pPr algn="l"/>
+            <a:r>
+              <a:rPr lang="en-US" sz="950" b="0">
+                <a:solidFill>
+                  <a:srgbClr val="D6EAF8"/>
                 </a:solidFill>
                 <a:latin typeface="Segoe UI"/>
               </a:rPr>
@@ -1094,19 +1119,43 @@
             </a:r>
           </a:p>
           <a:p>
-            <a:pPr algn="ctr"/>
-            <a:r>
-              <a:rPr lang="en-US" sz="200" b="0">
-                <a:solidFill>
-                  <a:srgbClr val="FFFFFF"/>
-                </a:solidFill>
-                <a:latin typeface="Segoe UI"/>
-              </a:rPr>
-              <a:t/>
-            </a:r>
-          </a:p>
-          <a:p>
-            <a:pPr algn="ctr"/>
+            <a:pPr algn="l"/>
+            <a:r>
+              <a:rPr lang="en-US" sz="950" b="0">
+                <a:solidFill>
+                  <a:srgbClr val="D6EAF8"/>
+                </a:solidFill>
+                <a:latin typeface="Segoe UI"/>
+              </a:rPr>
+              <a:t>Radius: Calgary + 50km surrounding</a:t>
+            </a:r>
+          </a:p>
+          <a:p>
+            <a:pPr algn="l"/>
+            <a:r>
+              <a:rPr lang="en-US" sz="950" b="0">
+                <a:solidFill>
+                  <a:srgbClr val="D6EAF8"/>
+                </a:solidFill>
+                <a:latin typeface="Segoe UI"/>
+              </a:rPr>
+              <a:t>Lookalike: Similar to existing customers</a:t>
+            </a:r>
+          </a:p>
+          <a:p>
+            <a:pPr algn="l"/>
+            <a:r>
+              <a:rPr lang="en-US" sz="150" b="0">
+                <a:solidFill>
+                  <a:srgbClr val="FFFFFF"/>
+                </a:solidFill>
+                <a:latin typeface="Segoe UI"/>
+              </a:rPr>
+              <a:t/>
+            </a:r>
+          </a:p>
+          <a:p>
+            <a:pPr algn="l"/>
             <a:r>
               <a:rPr lang="en-US" sz="1000" b="1">
                 <a:solidFill>
@@ -1114,71 +1163,35 @@
                 </a:solidFill>
                 <a:latin typeface="Segoe UI"/>
               </a:rPr>
-              <a:t>Best Performing Ad Types:</a:t>
-            </a:r>
-          </a:p>
-          <a:p>
-            <a:pPr algn="ctr"/>
-            <a:r>
-              <a:rPr lang="en-US" sz="950" b="0">
-                <a:solidFill>
-                  <a:srgbClr val="D6EAF8"/>
-                </a:solidFill>
-                <a:latin typeface="Segoe UI"/>
-              </a:rPr>
-              <a:t>Before/After carousels</a:t>
-            </a:r>
-          </a:p>
-          <a:p>
-            <a:pPr algn="ctr"/>
-            <a:r>
-              <a:rPr lang="en-US" sz="950" b="0">
-                <a:solidFill>
-                  <a:srgbClr val="D6EAF8"/>
-                </a:solidFill>
-                <a:latin typeface="Segoe UI"/>
-              </a:rPr>
-              <a:t>Video testimonials (15-30 sec)</a:t>
-            </a:r>
-          </a:p>
-          <a:p>
-            <a:pPr algn="ctr"/>
-            <a:r>
-              <a:rPr lang="en-US" sz="950" b="0">
-                <a:solidFill>
-                  <a:srgbClr val="D6EAF8"/>
-                </a:solidFill>
-                <a:latin typeface="Segoe UI"/>
-              </a:rPr>
-              <a:t>Seasonal tips with CTA</a:t>
+              <a:t>Realistic Goal: +150-250 new followers/month</a:t>
             </a:r>
           </a:p>
         </p:txBody>
       </p:sp>
       <p:sp>
         <p:nvSpPr>
-          <p:cNvPr id="5" name="followers"/>
+          <p:cNvPr id="5" name="pe"/>
           <p:cNvSpPr/>
           <p:nvPr/>
         </p:nvSpPr>
         <p:spPr>
           <a:xfrm>
-            <a:off x="457200" y="4297680"/>
-            <a:ext cx="5029200" cy="2286000"/>
+            <a:off x="365760" y="4389120"/>
+            <a:ext cx="5120640" cy="2103120"/>
           </a:xfrm>
           <a:prstGeom prst="roundRect"/>
           <a:solidFill>
-            <a:srgbClr val="2ECC71"/>
+            <a:srgbClr val="1D6B3F"/>
           </a:solidFill>
           <a:ln>
             <a:noFill/>
           </a:ln>
         </p:spPr>
         <p:txBody>
-          <a:bodyPr wrap="square" anchor="ctr"/>
+          <a:bodyPr wrap="square" anchor="ctr" lIns="91440" rIns="91440" tIns="45720" bIns="45720"/>
           <a:lstStyle/>
           <a:p>
-            <a:pPr algn="ctr"/>
+            <a:pPr algn="l"/>
             <a:r>
               <a:rPr lang="en-US" sz="1200" b="1">
                 <a:solidFill>
@@ -1186,11 +1199,11 @@
                 </a:solidFill>
                 <a:latin typeface="Segoe UI"/>
               </a:rPr>
-              <a:t>FOLLOWER GROWTH ADS</a:t>
-            </a:r>
-          </a:p>
-          <a:p>
-            <a:pPr algn="ctr"/>
+              <a:t>POST ENGAGEMENT ADS - $100/month</a:t>
+            </a:r>
+          </a:p>
+          <a:p>
+            <a:pPr algn="l"/>
             <a:r>
               <a:rPr lang="en-US" sz="200" b="0">
                 <a:solidFill>
@@ -1202,67 +1215,43 @@
             </a:r>
           </a:p>
           <a:p>
-            <a:pPr algn="ctr"/>
-            <a:r>
-              <a:rPr lang="en-US" sz="1000" b="0">
-                <a:solidFill>
-                  <a:srgbClr val="FFFFFF"/>
-                </a:solidFill>
-                <a:latin typeface="Segoe UI"/>
-              </a:rPr>
-              <a:t>Objective: Page Likes / Profile Visits</a:t>
-            </a:r>
-          </a:p>
-          <a:p>
-            <a:pPr algn="ctr"/>
-            <a:r>
-              <a:rPr lang="en-US" sz="1000" b="0">
-                <a:solidFill>
-                  <a:srgbClr val="FFFFFF"/>
-                </a:solidFill>
-                <a:latin typeface="Segoe UI"/>
-              </a:rPr>
-              <a:t>Budget: $200-300/month</a:t>
-            </a:r>
-          </a:p>
-          <a:p>
-            <a:pPr algn="ctr"/>
-            <a:r>
-              <a:rPr lang="en-US" sz="1000" b="0">
-                <a:solidFill>
-                  <a:srgbClr val="FFFFFF"/>
-                </a:solidFill>
-                <a:latin typeface="Segoe UI"/>
-              </a:rPr>
-              <a:t>Targeting: Lookalike of current customers</a:t>
-            </a:r>
-          </a:p>
-          <a:p>
-            <a:pPr algn="ctr"/>
-            <a:r>
-              <a:rPr lang="en-US" sz="1000" b="0">
-                <a:solidFill>
-                  <a:srgbClr val="FFFFFF"/>
-                </a:solidFill>
-                <a:latin typeface="Segoe UI"/>
-              </a:rPr>
-              <a:t>Calgary + surrounding 50km radius</a:t>
-            </a:r>
-          </a:p>
-          <a:p>
-            <a:pPr algn="ctr"/>
-            <a:r>
-              <a:rPr lang="en-US" sz="200" b="0">
-                <a:solidFill>
-                  <a:srgbClr val="FFFFFF"/>
-                </a:solidFill>
-                <a:latin typeface="Segoe UI"/>
-              </a:rPr>
-              <a:t/>
-            </a:r>
-          </a:p>
-          <a:p>
-            <a:pPr algn="ctr"/>
+            <a:pPr algn="l"/>
+            <a:r>
+              <a:rPr lang="en-US" sz="1000" b="0">
+                <a:solidFill>
+                  <a:srgbClr val="FFFFFF"/>
+                </a:solidFill>
+                <a:latin typeface="Segoe UI"/>
+              </a:rPr>
+              <a:t>Objective: Post Engagement</a:t>
+            </a:r>
+          </a:p>
+          <a:p>
+            <a:pPr algn="l"/>
+            <a:r>
+              <a:rPr lang="en-US" sz="1000" b="0">
+                <a:solidFill>
+                  <a:srgbClr val="FFFFFF"/>
+                </a:solidFill>
+                <a:latin typeface="Segoe UI"/>
+              </a:rPr>
+              <a:t>Goal: Let relevant audience connect with content</a:t>
+            </a:r>
+          </a:p>
+          <a:p>
+            <a:pPr algn="l"/>
+            <a:r>
+              <a:rPr lang="en-US" sz="150" b="0">
+                <a:solidFill>
+                  <a:srgbClr val="FFFFFF"/>
+                </a:solidFill>
+                <a:latin typeface="Segoe UI"/>
+              </a:rPr>
+              <a:t/>
+            </a:r>
+          </a:p>
+          <a:p>
+            <a:pPr algn="l"/>
             <a:r>
               <a:rPr lang="en-US" sz="1000" b="1">
                 <a:solidFill>
@@ -1270,35 +1259,59 @@
                 </a:solidFill>
                 <a:latin typeface="Segoe UI"/>
               </a:rPr>
-              <a:t>Realistic Goal: +150-300 followers/month</a:t>
+              <a:t>Best Content to Boost:</a:t>
+            </a:r>
+          </a:p>
+          <a:p>
+            <a:pPr algn="l"/>
+            <a:r>
+              <a:rPr lang="en-US" sz="950" b="0">
+                <a:solidFill>
+                  <a:srgbClr val="D5F5E3"/>
+                </a:solidFill>
+                <a:latin typeface="Segoe UI"/>
+              </a:rPr>
+              <a:t>Before/After carousels, Reels, Testimonials</a:t>
+            </a:r>
+          </a:p>
+          <a:p>
+            <a:pPr algn="l"/>
+            <a:r>
+              <a:rPr lang="en-US" sz="950" b="0">
+                <a:solidFill>
+                  <a:srgbClr val="D5F5E3"/>
+                </a:solidFill>
+                <a:latin typeface="Segoe UI"/>
+              </a:rPr>
+              <a:t>Boost top 1-2 performing posts weekly</a:t>
             </a:r>
           </a:p>
         </p:txBody>
       </p:sp>
       <p:sp>
         <p:nvSpPr>
-          <p:cNvPr id="6" name="ad_cal"/>
+          <p:cNvPr id="6" name="cal"/>
           <p:cNvSpPr/>
           <p:nvPr/>
         </p:nvSpPr>
         <p:spPr>
           <a:xfrm>
-            <a:off x="5760720" y="1371600"/>
-            <a:ext cx="4846320" cy="5212080"/>
+            <a:off x="5669280" y="1280160"/>
+            <a:ext cx="4937760" cy="5212080"/>
           </a:xfrm>
           <a:prstGeom prst="roundRect"/>
           <a:solidFill>
-            <a:srgbClr val="F0F4F8"/>
+            <a:srgbClr val="F4F6F8"/>
           </a:solidFill>
           <a:ln>
             <a:noFill/>
           </a:ln>
         </p:spPr>
         <p:txBody>
-          <a:bodyPr wrap="square" anchor="ctr"/>
+          <a:bodyPr wrap="square" anchor="ctr" lIns="91440" rIns="91440" tIns="45720" bIns="45720"/>
           <a:lstStyle/>
           <a:p>
-            <a:pPr algn="ctr"/>
+            <a:pPr algn="l"/>
             <a:r>
               <a:rPr lang="en-US" sz="1200" b="1">
                 <a:solidFill>
@@ -1310,9 +1323,9 @@
             </a:r>
           </a:p>
           <a:p>
-            <a:pPr algn="ctr"/>
-            <a:r>
-              <a:rPr lang="en-US" sz="300" b="0">
+            <a:pPr algn="l"/>
+            <a:r>
+              <a:rPr lang="en-US" sz="250" b="0">
                 <a:solidFill>
                   <a:srgbClr val="333333"/>
                 </a:solidFill>
@@ -1322,19 +1335,19 @@
             </a:r>
           </a:p>
           <a:p>
-            <a:pPr algn="ctr"/>
+            <a:pPr algn="l"/>
             <a:r>
               <a:rPr lang="en-US" sz="1050" b="1">
                 <a:solidFill>
-                  <a:srgbClr val="E74C3C"/>
-                </a:solidFill>
-                <a:latin typeface="Segoe UI"/>
-              </a:rPr>
-              <a:t>MONTH 1:</a:t>
-            </a:r>
-          </a:p>
-          <a:p>
-            <a:pPr algn="ctr"/>
+                  <a:srgbClr val="C41E3A"/>
+                </a:solidFill>
+                <a:latin typeface="Segoe UI"/>
+              </a:rPr>
+              <a:t>MONTH 1 ($300):</a:t>
+            </a:r>
+          </a:p>
+          <a:p>
+            <a:pPr algn="l"/>
             <a:r>
               <a:rPr lang="en-US" sz="950" b="0">
                 <a:solidFill>
@@ -1342,11 +1355,11 @@
                 </a:solidFill>
                 <a:latin typeface="Segoe UI"/>
               </a:rPr>
-              <a:t>Brand awareness + page likes</a:t>
-            </a:r>
-          </a:p>
-          <a:p>
-            <a:pPr algn="ctr"/>
+              <a:t>$200 - Profile visits (audience building)</a:t>
+            </a:r>
+          </a:p>
+          <a:p>
+            <a:pPr algn="l"/>
             <a:r>
               <a:rPr lang="en-US" sz="950" b="0">
                 <a:solidFill>
@@ -1354,11 +1367,11 @@
                 </a:solidFill>
                 <a:latin typeface="Segoe UI"/>
               </a:rPr>
-              <a:t>Boost top 2 posts weekly</a:t>
-            </a:r>
-          </a:p>
-          <a:p>
-            <a:pPr algn="ctr"/>
+              <a:t>$100 - Boost brand story posts</a:t>
+            </a:r>
+          </a:p>
+          <a:p>
+            <a:pPr algn="l"/>
             <a:r>
               <a:rPr lang="en-US" sz="950" b="0">
                 <a:solidFill>
@@ -1366,11 +1379,11 @@
                 </a:solidFill>
                 <a:latin typeface="Segoe UI"/>
               </a:rPr>
-              <a:t>Budget: $400</a:t>
-            </a:r>
-          </a:p>
-          <a:p>
-            <a:pPr algn="ctr"/>
+              <a:t>Focus: Awareness + first followers</a:t>
+            </a:r>
+          </a:p>
+          <a:p>
+            <a:pPr algn="l"/>
             <a:r>
               <a:rPr lang="en-US" sz="200" b="0">
                 <a:solidFill>
@@ -1382,19 +1395,19 @@
             </a:r>
           </a:p>
           <a:p>
-            <a:pPr algn="ctr"/>
+            <a:pPr algn="l"/>
             <a:r>
               <a:rPr lang="en-US" sz="1050" b="1">
                 <a:solidFill>
-                  <a:srgbClr val="F39C12"/>
-                </a:solidFill>
-                <a:latin typeface="Segoe UI"/>
-              </a:rPr>
-              <a:t>MONTH 2:</a:t>
-            </a:r>
-          </a:p>
-          <a:p>
-            <a:pPr algn="ctr"/>
+                  <a:srgbClr val="D4740E"/>
+                </a:solidFill>
+                <a:latin typeface="Segoe UI"/>
+              </a:rPr>
+              <a:t>MONTH 2 ($300):</a:t>
+            </a:r>
+          </a:p>
+          <a:p>
+            <a:pPr algn="l"/>
             <a:r>
               <a:rPr lang="en-US" sz="950" b="0">
                 <a:solidFill>
@@ -1402,11 +1415,11 @@
                 </a:solidFill>
                 <a:latin typeface="Segoe UI"/>
               </a:rPr>
-              <a:t>Engagement + video views</a:t>
-            </a:r>
-          </a:p>
-          <a:p>
-            <a:pPr algn="ctr"/>
+              <a:t>$200 - Profile visits (refine targeting)</a:t>
+            </a:r>
+          </a:p>
+          <a:p>
+            <a:pPr algn="l"/>
             <a:r>
               <a:rPr lang="en-US" sz="950" b="0">
                 <a:solidFill>
@@ -1414,11 +1427,11 @@
                 </a:solidFill>
                 <a:latin typeface="Segoe UI"/>
               </a:rPr>
-              <a:t>Boost Reels + testimonials</a:t>
-            </a:r>
-          </a:p>
-          <a:p>
-            <a:pPr algn="ctr"/>
+              <a:t>$100 - Boost Reels + testimonials</a:t>
+            </a:r>
+          </a:p>
+          <a:p>
+            <a:pPr algn="l"/>
             <a:r>
               <a:rPr lang="en-US" sz="950" b="0">
                 <a:solidFill>
@@ -1426,11 +1439,11 @@
                 </a:solidFill>
                 <a:latin typeface="Segoe UI"/>
               </a:rPr>
-              <a:t>Budget: $500</a:t>
-            </a:r>
-          </a:p>
-          <a:p>
-            <a:pPr algn="ctr"/>
+              <a:t>Focus: Engagement + video views</a:t>
+            </a:r>
+          </a:p>
+          <a:p>
+            <a:pPr algn="l"/>
             <a:r>
               <a:rPr lang="en-US" sz="200" b="0">
                 <a:solidFill>
@@ -1442,19 +1455,19 @@
             </a:r>
           </a:p>
           <a:p>
-            <a:pPr algn="ctr"/>
+            <a:pPr algn="l"/>
             <a:r>
               <a:rPr lang="en-US" sz="1050" b="1">
                 <a:solidFill>
-                  <a:srgbClr val="2ECC71"/>
-                </a:solidFill>
-                <a:latin typeface="Segoe UI"/>
-              </a:rPr>
-              <a:t>MONTH 3:</a:t>
-            </a:r>
-          </a:p>
-          <a:p>
-            <a:pPr algn="ctr"/>
+                  <a:srgbClr val="1D6B3F"/>
+                </a:solidFill>
+                <a:latin typeface="Segoe UI"/>
+              </a:rPr>
+              <a:t>MONTH 3 ($300):</a:t>
+            </a:r>
+          </a:p>
+          <a:p>
+            <a:pPr algn="l"/>
             <a:r>
               <a:rPr lang="en-US" sz="950" b="0">
                 <a:solidFill>
@@ -1462,11 +1475,11 @@
                 </a:solidFill>
                 <a:latin typeface="Segoe UI"/>
               </a:rPr>
-              <a:t>Leads + retargeting warm audience</a:t>
-            </a:r>
-          </a:p>
-          <a:p>
-            <a:pPr algn="ctr"/>
+              <a:t>$200 - Profile visits (lookalike audience)</a:t>
+            </a:r>
+          </a:p>
+          <a:p>
+            <a:pPr algn="l"/>
             <a:r>
               <a:rPr lang="en-US" sz="950" b="0">
                 <a:solidFill>
@@ -1474,11 +1487,11 @@
                 </a:solidFill>
                 <a:latin typeface="Segoe UI"/>
               </a:rPr>
-              <a:t>Carousel ads + offer promos</a:t>
-            </a:r>
-          </a:p>
-          <a:p>
-            <a:pPr algn="ctr"/>
+              <a:t>$100 - Boost offer/CTA posts</a:t>
+            </a:r>
+          </a:p>
+          <a:p>
+            <a:pPr algn="l"/>
             <a:r>
               <a:rPr lang="en-US" sz="950" b="0">
                 <a:solidFill>
@@ -1486,13 +1499,13 @@
                 </a:solidFill>
                 <a:latin typeface="Segoe UI"/>
               </a:rPr>
-              <a:t>Budget: $600</a:t>
-            </a:r>
-          </a:p>
-          <a:p>
-            <a:pPr algn="ctr"/>
-            <a:r>
-              <a:rPr lang="en-US" sz="300" b="0">
+              <a:t>Focus: Warm audience + conversions</a:t>
+            </a:r>
+          </a:p>
+          <a:p>
+            <a:pPr algn="l"/>
+            <a:r>
+              <a:rPr lang="en-US" sz="250" b="0">
                 <a:solidFill>
                   <a:srgbClr val="333333"/>
                 </a:solidFill>
@@ -1502,7 +1515,7 @@
             </a:r>
           </a:p>
           <a:p>
-            <a:pPr algn="ctr"/>
+            <a:pPr algn="l"/>
             <a:r>
               <a:rPr lang="en-US" sz="1100" b="1">
                 <a:solidFill>
@@ -1510,7 +1523,7 @@
                 </a:solidFill>
                 <a:latin typeface="Segoe UI"/>
               </a:rPr>
-              <a:t>TOTAL 3-MONTH AD SPEND: $1,500</a:t>
+              <a:t>TOTAL 3-MONTH AD SPEND: $900 USD</a:t>
             </a:r>
           </a:p>
         </p:txBody>
@@ -1540,14 +1553,14 @@
       <p:grpSpPr/>
       <p:sp>
         <p:nvSpPr>
-          <p:cNvPr id="2" name="header_bg"/>
+          <p:cNvPr id="2" name="h"/>
           <p:cNvSpPr/>
           <p:nvPr/>
         </p:nvSpPr>
         <p:spPr>
           <a:xfrm>
             <a:off x="0" y="0"/>
-            <a:ext cx="12192000" cy="1097280"/>
+            <a:ext cx="12192000" cy="1005840"/>
           </a:xfrm>
           <a:prstGeom prst="rect"/>
           <a:solidFill>
@@ -1560,13 +1573,13 @@
       </p:sp>
       <p:sp>
         <p:nvSpPr>
-          <p:cNvPr id="3" name="header"/>
+          <p:cNvPr id="3" name="ht"/>
           <p:cNvSpPr txBox="1"/>
           <p:nvPr/>
         </p:nvSpPr>
         <p:spPr>
           <a:xfrm>
-            <a:off x="457200" y="182880"/>
+            <a:off x="457200" y="137160"/>
             <a:ext cx="9144000" cy="822960"/>
           </a:xfrm>
           <a:prstGeom prst="rect"/>
@@ -1582,7 +1595,7 @@
               </a:spcBef>
             </a:pPr>
             <a:r>
-              <a:rPr lang="en-US" sz="2000" b="1" dirty="0">
+              <a:rPr lang="en-US" sz="1900" b="1" dirty="0">
                 <a:solidFill>
                   <a:srgbClr val="FFFFFF"/>
                 </a:solidFill>
@@ -1601,22 +1614,22 @@
         </p:nvSpPr>
         <p:spPr>
           <a:xfrm>
-            <a:off x="274320" y="1371600"/>
+            <a:off x="274320" y="1280160"/>
             <a:ext cx="3383280" cy="5212080"/>
           </a:xfrm>
           <a:prstGeom prst="roundRect"/>
           <a:solidFill>
-            <a:srgbClr val="E74C3C"/>
+            <a:srgbClr val="C41E3A"/>
           </a:solidFill>
           <a:ln>
             <a:noFill/>
           </a:ln>
         </p:spPr>
         <p:txBody>
-          <a:bodyPr wrap="square" anchor="ctr"/>
+          <a:bodyPr wrap="square" anchor="ctr" lIns="91440" rIns="91440" tIns="45720" bIns="45720"/>
           <a:lstStyle/>
           <a:p>
-            <a:pPr algn="ctr"/>
+            <a:pPr algn="l"/>
             <a:r>
               <a:rPr lang="en-US" sz="1400" b="1">
                 <a:solidFill>
@@ -1628,7 +1641,7 @@
             </a:r>
           </a:p>
           <a:p>
-            <a:pPr algn="ctr"/>
+            <a:pPr algn="l"/>
             <a:r>
               <a:rPr lang="en-US" sz="1100" b="0">
                 <a:solidFill>
@@ -1640,19 +1653,19 @@
             </a:r>
           </a:p>
           <a:p>
-            <a:pPr algn="ctr"/>
-            <a:r>
-              <a:rPr lang="en-US" sz="200" b="0">
-                <a:solidFill>
-                  <a:srgbClr val="FFFFFF"/>
-                </a:solidFill>
-                <a:latin typeface="Segoe UI"/>
-              </a:rPr>
-              <a:t/>
-            </a:r>
-          </a:p>
-          <a:p>
-            <a:pPr algn="ctr"/>
+            <a:pPr algn="l"/>
+            <a:r>
+              <a:rPr lang="en-US" sz="150" b="0">
+                <a:solidFill>
+                  <a:srgbClr val="FFFFFF"/>
+                </a:solidFill>
+                <a:latin typeface="Segoe UI"/>
+              </a:rPr>
+              <a:t/>
+            </a:r>
+          </a:p>
+          <a:p>
+            <a:pPr algn="l"/>
             <a:r>
               <a:rPr lang="en-US" sz="1000" b="1">
                 <a:solidFill>
@@ -1660,11 +1673,11 @@
                 </a:solidFill>
                 <a:latin typeface="Segoe UI"/>
               </a:rPr>
-              <a:t>Website Fixes:</a:t>
-            </a:r>
-          </a:p>
-          <a:p>
-            <a:pPr algn="ctr"/>
+              <a:t>Website:</a:t>
+            </a:r>
+          </a:p>
+          <a:p>
+            <a:pPr algn="l"/>
             <a:r>
               <a:rPr lang="en-US" sz="900" b="0">
                 <a:solidFill>
@@ -1676,7 +1689,7 @@
             </a:r>
           </a:p>
           <a:p>
-            <a:pPr algn="ctr"/>
+            <a:pPr algn="l"/>
             <a:r>
               <a:rPr lang="en-US" sz="900" b="0">
                 <a:solidFill>
@@ -1688,7 +1701,7 @@
             </a:r>
           </a:p>
           <a:p>
-            <a:pPr algn="ctr"/>
+            <a:pPr algn="l"/>
             <a:r>
               <a:rPr lang="en-US" sz="900" b="0">
                 <a:solidFill>
@@ -1700,19 +1713,19 @@
             </a:r>
           </a:p>
           <a:p>
-            <a:pPr algn="ctr"/>
-            <a:r>
-              <a:rPr lang="en-US" sz="150" b="0">
-                <a:solidFill>
-                  <a:srgbClr val="FFFFFF"/>
-                </a:solidFill>
-                <a:latin typeface="Segoe UI"/>
-              </a:rPr>
-              <a:t/>
-            </a:r>
-          </a:p>
-          <a:p>
-            <a:pPr algn="ctr"/>
+            <a:pPr algn="l"/>
+            <a:r>
+              <a:rPr lang="en-US" sz="100" b="0">
+                <a:solidFill>
+                  <a:srgbClr val="FFFFFF"/>
+                </a:solidFill>
+                <a:latin typeface="Segoe UI"/>
+              </a:rPr>
+              <a:t/>
+            </a:r>
+          </a:p>
+          <a:p>
+            <a:pPr algn="l"/>
             <a:r>
               <a:rPr lang="en-US" sz="1000" b="1">
                 <a:solidFill>
@@ -1720,11 +1733,11 @@
                 </a:solidFill>
                 <a:latin typeface="Segoe UI"/>
               </a:rPr>
-              <a:t>Social Media:</a:t>
-            </a:r>
-          </a:p>
-          <a:p>
-            <a:pPr algn="ctr"/>
+              <a:t>Social:</a:t>
+            </a:r>
+          </a:p>
+          <a:p>
+            <a:pPr algn="l"/>
             <a:r>
               <a:rPr lang="en-US" sz="900" b="0">
                 <a:solidFill>
@@ -1736,7 +1749,7 @@
             </a:r>
           </a:p>
           <a:p>
-            <a:pPr algn="ctr"/>
+            <a:pPr algn="l"/>
             <a:r>
               <a:rPr lang="en-US" sz="900" b="0">
                 <a:solidFill>
@@ -1748,7 +1761,7 @@
             </a:r>
           </a:p>
           <a:p>
-            <a:pPr algn="ctr"/>
+            <a:pPr algn="l"/>
             <a:r>
               <a:rPr lang="en-US" sz="900" b="0">
                 <a:solidFill>
@@ -1760,19 +1773,19 @@
             </a:r>
           </a:p>
           <a:p>
-            <a:pPr algn="ctr"/>
-            <a:r>
-              <a:rPr lang="en-US" sz="150" b="0">
-                <a:solidFill>
-                  <a:srgbClr val="FFFFFF"/>
-                </a:solidFill>
-                <a:latin typeface="Segoe UI"/>
-              </a:rPr>
-              <a:t/>
-            </a:r>
-          </a:p>
-          <a:p>
-            <a:pPr algn="ctr"/>
+            <a:pPr algn="l"/>
+            <a:r>
+              <a:rPr lang="en-US" sz="100" b="0">
+                <a:solidFill>
+                  <a:srgbClr val="FFFFFF"/>
+                </a:solidFill>
+                <a:latin typeface="Segoe UI"/>
+              </a:rPr>
+              <a:t/>
+            </a:r>
+          </a:p>
+          <a:p>
+            <a:pPr algn="l"/>
             <a:r>
               <a:rPr lang="en-US" sz="1000" b="1">
                 <a:solidFill>
@@ -1784,7 +1797,7 @@
             </a:r>
           </a:p>
           <a:p>
-            <a:pPr algn="ctr"/>
+            <a:pPr algn="l"/>
             <a:r>
               <a:rPr lang="en-US" sz="900" b="0">
                 <a:solidFill>
@@ -1796,7 +1809,7 @@
             </a:r>
           </a:p>
           <a:p>
-            <a:pPr algn="ctr"/>
+            <a:pPr algn="l"/>
             <a:r>
               <a:rPr lang="en-US" sz="900" b="0">
                 <a:solidFill>
@@ -1808,7 +1821,7 @@
             </a:r>
           </a:p>
           <a:p>
-            <a:pPr algn="ctr"/>
+            <a:pPr algn="l"/>
             <a:r>
               <a:rPr lang="en-US" sz="900" b="0">
                 <a:solidFill>
@@ -1829,22 +1842,22 @@
         </p:nvSpPr>
         <p:spPr>
           <a:xfrm>
-            <a:off x="3794760" y="1371600"/>
+            <a:off x="3794760" y="1280160"/>
             <a:ext cx="3383280" cy="5212080"/>
           </a:xfrm>
           <a:prstGeom prst="roundRect"/>
           <a:solidFill>
-            <a:srgbClr val="F39C12"/>
+            <a:srgbClr val="D4740E"/>
           </a:solidFill>
           <a:ln>
             <a:noFill/>
           </a:ln>
         </p:spPr>
         <p:txBody>
-          <a:bodyPr wrap="square" anchor="ctr"/>
+          <a:bodyPr wrap="square" anchor="ctr" lIns="91440" rIns="91440" tIns="45720" bIns="45720"/>
           <a:lstStyle/>
           <a:p>
-            <a:pPr algn="ctr"/>
+            <a:pPr algn="l"/>
             <a:r>
               <a:rPr lang="en-US" sz="1400" b="1">
                 <a:solidFill>
@@ -1856,7 +1869,7 @@
             </a:r>
           </a:p>
           <a:p>
-            <a:pPr algn="ctr"/>
+            <a:pPr algn="l"/>
             <a:r>
               <a:rPr lang="en-US" sz="1100" b="0">
                 <a:solidFill>
@@ -1868,19 +1881,19 @@
             </a:r>
           </a:p>
           <a:p>
-            <a:pPr algn="ctr"/>
-            <a:r>
-              <a:rPr lang="en-US" sz="200" b="0">
-                <a:solidFill>
-                  <a:srgbClr val="FFFFFF"/>
-                </a:solidFill>
-                <a:latin typeface="Segoe UI"/>
-              </a:rPr>
-              <a:t/>
-            </a:r>
-          </a:p>
-          <a:p>
-            <a:pPr algn="ctr"/>
+            <a:pPr algn="l"/>
+            <a:r>
+              <a:rPr lang="en-US" sz="150" b="0">
+                <a:solidFill>
+                  <a:srgbClr val="FFFFFF"/>
+                </a:solidFill>
+                <a:latin typeface="Segoe UI"/>
+              </a:rPr>
+              <a:t/>
+            </a:r>
+          </a:p>
+          <a:p>
+            <a:pPr algn="l"/>
             <a:r>
               <a:rPr lang="en-US" sz="1000" b="1">
                 <a:solidFill>
@@ -1892,7 +1905,7 @@
             </a:r>
           </a:p>
           <a:p>
-            <a:pPr algn="ctr"/>
+            <a:pPr algn="l"/>
             <a:r>
               <a:rPr lang="en-US" sz="900" b="0">
                 <a:solidFill>
@@ -1904,7 +1917,7 @@
             </a:r>
           </a:p>
           <a:p>
-            <a:pPr algn="ctr"/>
+            <a:pPr algn="l"/>
             <a:r>
               <a:rPr lang="en-US" sz="900" b="0">
                 <a:solidFill>
@@ -1916,7 +1929,7 @@
             </a:r>
           </a:p>
           <a:p>
-            <a:pPr algn="ctr"/>
+            <a:pPr algn="l"/>
             <a:r>
               <a:rPr lang="en-US" sz="900" b="0">
                 <a:solidFill>
@@ -1928,19 +1941,19 @@
             </a:r>
           </a:p>
           <a:p>
-            <a:pPr algn="ctr"/>
-            <a:r>
-              <a:rPr lang="en-US" sz="150" b="0">
-                <a:solidFill>
-                  <a:srgbClr val="FFFFFF"/>
-                </a:solidFill>
-                <a:latin typeface="Segoe UI"/>
-              </a:rPr>
-              <a:t/>
-            </a:r>
-          </a:p>
-          <a:p>
-            <a:pPr algn="ctr"/>
+            <a:pPr algn="l"/>
+            <a:r>
+              <a:rPr lang="en-US" sz="100" b="0">
+                <a:solidFill>
+                  <a:srgbClr val="FFFFFF"/>
+                </a:solidFill>
+                <a:latin typeface="Segoe UI"/>
+              </a:rPr>
+              <a:t/>
+            </a:r>
+          </a:p>
+          <a:p>
+            <a:pPr algn="l"/>
             <a:r>
               <a:rPr lang="en-US" sz="1000" b="1">
                 <a:solidFill>
@@ -1948,11 +1961,11 @@
                 </a:solidFill>
                 <a:latin typeface="Segoe UI"/>
               </a:rPr>
-              <a:t>Social Media:</a:t>
-            </a:r>
-          </a:p>
-          <a:p>
-            <a:pPr algn="ctr"/>
+              <a:t>Social:</a:t>
+            </a:r>
+          </a:p>
+          <a:p>
+            <a:pPr algn="l"/>
             <a:r>
               <a:rPr lang="en-US" sz="900" b="0">
                 <a:solidFill>
@@ -1964,7 +1977,7 @@
             </a:r>
           </a:p>
           <a:p>
-            <a:pPr algn="ctr"/>
+            <a:pPr algn="l"/>
             <a:r>
               <a:rPr lang="en-US" sz="900" b="0">
                 <a:solidFill>
@@ -1976,7 +1989,7 @@
             </a:r>
           </a:p>
           <a:p>
-            <a:pPr algn="ctr"/>
+            <a:pPr algn="l"/>
             <a:r>
               <a:rPr lang="en-US" sz="900" b="0">
                 <a:solidFill>
@@ -1988,19 +2001,19 @@
             </a:r>
           </a:p>
           <a:p>
-            <a:pPr algn="ctr"/>
-            <a:r>
-              <a:rPr lang="en-US" sz="150" b="0">
-                <a:solidFill>
-                  <a:srgbClr val="FFFFFF"/>
-                </a:solidFill>
-                <a:latin typeface="Segoe UI"/>
-              </a:rPr>
-              <a:t/>
-            </a:r>
-          </a:p>
-          <a:p>
-            <a:pPr algn="ctr"/>
+            <a:pPr algn="l"/>
+            <a:r>
+              <a:rPr lang="en-US" sz="100" b="0">
+                <a:solidFill>
+                  <a:srgbClr val="FFFFFF"/>
+                </a:solidFill>
+                <a:latin typeface="Segoe UI"/>
+              </a:rPr>
+              <a:t/>
+            </a:r>
+          </a:p>
+          <a:p>
+            <a:pPr algn="l"/>
             <a:r>
               <a:rPr lang="en-US" sz="1000" b="1">
                 <a:solidFill>
@@ -2012,7 +2025,7 @@
             </a:r>
           </a:p>
           <a:p>
-            <a:pPr algn="ctr"/>
+            <a:pPr algn="l"/>
             <a:r>
               <a:rPr lang="en-US" sz="900" b="0">
                 <a:solidFill>
@@ -2020,11 +2033,11 @@
                 </a:solidFill>
                 <a:latin typeface="Segoe UI"/>
               </a:rPr>
-              <a:t>Engagement ads live</a:t>
-            </a:r>
-          </a:p>
-          <a:p>
-            <a:pPr algn="ctr"/>
+              <a:t>$200 profile visits</a:t>
+            </a:r>
+          </a:p>
+          <a:p>
+            <a:pPr algn="l"/>
             <a:r>
               <a:rPr lang="en-US" sz="900" b="0">
                 <a:solidFill>
@@ -2032,11 +2045,11 @@
                 </a:solidFill>
                 <a:latin typeface="Segoe UI"/>
               </a:rPr>
-              <a:t>Video view campaigns</a:t>
-            </a:r>
-          </a:p>
-          <a:p>
-            <a:pPr algn="ctr"/>
+              <a:t>$100 post engagement</a:t>
+            </a:r>
+          </a:p>
+          <a:p>
+            <a:pPr algn="l"/>
             <a:r>
               <a:rPr lang="en-US" sz="900" b="0">
                 <a:solidFill>
@@ -2057,22 +2070,22 @@
         </p:nvSpPr>
         <p:spPr>
           <a:xfrm>
-            <a:off x="7315200" y="1371600"/>
+            <a:off x="7315200" y="1280160"/>
             <a:ext cx="3383280" cy="5212080"/>
           </a:xfrm>
           <a:prstGeom prst="roundRect"/>
           <a:solidFill>
-            <a:srgbClr val="2ECC71"/>
+            <a:srgbClr val="1D6B3F"/>
           </a:solidFill>
           <a:ln>
             <a:noFill/>
           </a:ln>
         </p:spPr>
         <p:txBody>
-          <a:bodyPr wrap="square" anchor="ctr"/>
+          <a:bodyPr wrap="square" anchor="ctr" lIns="91440" rIns="91440" tIns="45720" bIns="45720"/>
           <a:lstStyle/>
           <a:p>
-            <a:pPr algn="ctr"/>
+            <a:pPr algn="l"/>
             <a:r>
               <a:rPr lang="en-US" sz="1400" b="1">
                 <a:solidFill>
@@ -2084,7 +2097,7 @@
             </a:r>
           </a:p>
           <a:p>
-            <a:pPr algn="ctr"/>
+            <a:pPr algn="l"/>
             <a:r>
               <a:rPr lang="en-US" sz="1100" b="0">
                 <a:solidFill>
@@ -2096,19 +2109,19 @@
             </a:r>
           </a:p>
           <a:p>
-            <a:pPr algn="ctr"/>
-            <a:r>
-              <a:rPr lang="en-US" sz="200" b="0">
-                <a:solidFill>
-                  <a:srgbClr val="FFFFFF"/>
-                </a:solidFill>
-                <a:latin typeface="Segoe UI"/>
-              </a:rPr>
-              <a:t/>
-            </a:r>
-          </a:p>
-          <a:p>
-            <a:pPr algn="ctr"/>
+            <a:pPr algn="l"/>
+            <a:r>
+              <a:rPr lang="en-US" sz="150" b="0">
+                <a:solidFill>
+                  <a:srgbClr val="FFFFFF"/>
+                </a:solidFill>
+                <a:latin typeface="Segoe UI"/>
+              </a:rPr>
+              <a:t/>
+            </a:r>
+          </a:p>
+          <a:p>
+            <a:pPr algn="l"/>
             <a:r>
               <a:rPr lang="en-US" sz="1000" b="1">
                 <a:solidFill>
@@ -2120,7 +2133,7 @@
             </a:r>
           </a:p>
           <a:p>
-            <a:pPr algn="ctr"/>
+            <a:pPr algn="l"/>
             <a:r>
               <a:rPr lang="en-US" sz="900" b="0">
                 <a:solidFill>
@@ -2132,7 +2145,7 @@
             </a:r>
           </a:p>
           <a:p>
-            <a:pPr algn="ctr"/>
+            <a:pPr algn="l"/>
             <a:r>
               <a:rPr lang="en-US" sz="900" b="0">
                 <a:solidFill>
@@ -2144,7 +2157,7 @@
             </a:r>
           </a:p>
           <a:p>
-            <a:pPr algn="ctr"/>
+            <a:pPr algn="l"/>
             <a:r>
               <a:rPr lang="en-US" sz="900" b="0">
                 <a:solidFill>
@@ -2156,19 +2169,19 @@
             </a:r>
           </a:p>
           <a:p>
-            <a:pPr algn="ctr"/>
-            <a:r>
-              <a:rPr lang="en-US" sz="150" b="0">
-                <a:solidFill>
-                  <a:srgbClr val="FFFFFF"/>
-                </a:solidFill>
-                <a:latin typeface="Segoe UI"/>
-              </a:rPr>
-              <a:t/>
-            </a:r>
-          </a:p>
-          <a:p>
-            <a:pPr algn="ctr"/>
+            <a:pPr algn="l"/>
+            <a:r>
+              <a:rPr lang="en-US" sz="100" b="0">
+                <a:solidFill>
+                  <a:srgbClr val="FFFFFF"/>
+                </a:solidFill>
+                <a:latin typeface="Segoe UI"/>
+              </a:rPr>
+              <a:t/>
+            </a:r>
+          </a:p>
+          <a:p>
+            <a:pPr algn="l"/>
             <a:r>
               <a:rPr lang="en-US" sz="1000" b="1">
                 <a:solidFill>
@@ -2176,11 +2189,11 @@
                 </a:solidFill>
                 <a:latin typeface="Segoe UI"/>
               </a:rPr>
-              <a:t>Social Media:</a:t>
-            </a:r>
-          </a:p>
-          <a:p>
-            <a:pPr algn="ctr"/>
+              <a:t>Social:</a:t>
+            </a:r>
+          </a:p>
+          <a:p>
+            <a:pPr algn="l"/>
             <a:r>
               <a:rPr lang="en-US" sz="900" b="0">
                 <a:solidFill>
@@ -2192,7 +2205,7 @@
             </a:r>
           </a:p>
           <a:p>
-            <a:pPr algn="ctr"/>
+            <a:pPr algn="l"/>
             <a:r>
               <a:rPr lang="en-US" sz="900" b="0">
                 <a:solidFill>
@@ -2204,7 +2217,7 @@
             </a:r>
           </a:p>
           <a:p>
-            <a:pPr algn="ctr"/>
+            <a:pPr algn="l"/>
             <a:r>
               <a:rPr lang="en-US" sz="900" b="0">
                 <a:solidFill>
@@ -2216,19 +2229,19 @@
             </a:r>
           </a:p>
           <a:p>
-            <a:pPr algn="ctr"/>
-            <a:r>
-              <a:rPr lang="en-US" sz="150" b="0">
-                <a:solidFill>
-                  <a:srgbClr val="FFFFFF"/>
-                </a:solidFill>
-                <a:latin typeface="Segoe UI"/>
-              </a:rPr>
-              <a:t/>
-            </a:r>
-          </a:p>
-          <a:p>
-            <a:pPr algn="ctr"/>
+            <a:pPr algn="l"/>
+            <a:r>
+              <a:rPr lang="en-US" sz="100" b="0">
+                <a:solidFill>
+                  <a:srgbClr val="FFFFFF"/>
+                </a:solidFill>
+                <a:latin typeface="Segoe UI"/>
+              </a:rPr>
+              <a:t/>
+            </a:r>
+          </a:p>
+          <a:p>
+            <a:pPr algn="l"/>
             <a:r>
               <a:rPr lang="en-US" sz="1000" b="1">
                 <a:solidFill>
@@ -2240,7 +2253,7 @@
             </a:r>
           </a:p>
           <a:p>
-            <a:pPr algn="ctr"/>
+            <a:pPr algn="l"/>
             <a:r>
               <a:rPr lang="en-US" sz="900" b="0">
                 <a:solidFill>
@@ -2248,11 +2261,11 @@
                 </a:solidFill>
                 <a:latin typeface="Segoe UI"/>
               </a:rPr>
-              <a:t>Retargeting active</a:t>
-            </a:r>
-          </a:p>
-          <a:p>
-            <a:pPr algn="ctr"/>
+              <a:t>$200 lookalike targeting</a:t>
+            </a:r>
+          </a:p>
+          <a:p>
+            <a:pPr algn="l"/>
             <a:r>
               <a:rPr lang="en-US" sz="900" b="0">
                 <a:solidFill>
@@ -2260,11 +2273,11 @@
                 </a:solidFill>
                 <a:latin typeface="Segoe UI"/>
               </a:rPr>
-              <a:t>Lead gen campaigns</a:t>
-            </a:r>
-          </a:p>
-          <a:p>
-            <a:pPr algn="ctr"/>
+              <a:t>$100 boost offer posts</a:t>
+            </a:r>
+          </a:p>
+          <a:p>
+            <a:pPr algn="l"/>
             <a:r>
               <a:rPr lang="en-US" sz="900" b="0">
                 <a:solidFill>
@@ -2272,7 +2285,7 @@
                 </a:solidFill>
                 <a:latin typeface="Segoe UI"/>
               </a:rPr>
-              <a:t>Offer promotions</a:t>
+              <a:t>Retargeting warm audience</a:t>
             </a:r>
           </a:p>
         </p:txBody>
@@ -2302,14 +2315,14 @@
       <p:grpSpPr/>
       <p:sp>
         <p:nvSpPr>
-          <p:cNvPr id="2" name="header_bg"/>
+          <p:cNvPr id="2" name="h"/>
           <p:cNvSpPr/>
           <p:nvPr/>
         </p:nvSpPr>
         <p:spPr>
           <a:xfrm>
             <a:off x="0" y="0"/>
-            <a:ext cx="12192000" cy="1097280"/>
+            <a:ext cx="12192000" cy="1005840"/>
           </a:xfrm>
           <a:prstGeom prst="rect"/>
           <a:solidFill>
@@ -2322,13 +2335,13 @@
       </p:sp>
       <p:sp>
         <p:nvSpPr>
-          <p:cNvPr id="3" name="header"/>
+          <p:cNvPr id="3" name="ht"/>
           <p:cNvSpPr txBox="1"/>
           <p:nvPr/>
         </p:nvSpPr>
         <p:spPr>
           <a:xfrm>
-            <a:off x="457200" y="182880"/>
+            <a:off x="457200" y="137160"/>
             <a:ext cx="9144000" cy="822960"/>
           </a:xfrm>
           <a:prstGeom prst="rect"/>
@@ -2344,7 +2357,7 @@
               </a:spcBef>
             </a:pPr>
             <a:r>
-              <a:rPr lang="en-US" sz="2000" b="1" dirty="0">
+              <a:rPr lang="en-US" sz="1900" b="1" dirty="0">
                 <a:solidFill>
                   <a:srgbClr val="FFFFFF"/>
                 </a:solidFill>
@@ -2357,13 +2370,13 @@
       </p:sp>
       <p:sp>
         <p:nvSpPr>
-          <p:cNvPr id="4" name="note"/>
+          <p:cNvPr id="4" name="n"/>
           <p:cNvSpPr txBox="1"/>
           <p:nvPr/>
         </p:nvSpPr>
         <p:spPr>
           <a:xfrm>
-            <a:off x="457200" y="1188720"/>
+            <a:off x="457200" y="1051560"/>
             <a:ext cx="10058400" cy="365760"/>
           </a:xfrm>
           <a:prstGeom prst="rect"/>
@@ -2385,35 +2398,35 @@
                 </a:solidFill>
                 <a:latin typeface="Segoe UI"/>
               </a:rPr>
-              <a:t>No fake promises. These are achievable targets based on industry benchmarks for local service businesses.</a:t>
+              <a:t>No fake promises. Achievable targets based on industry benchmarks for local service businesses.</a:t>
             </a:r>
           </a:p>
         </p:txBody>
       </p:sp>
       <p:sp>
         <p:nvSpPr>
-          <p:cNvPr id="5" name="social_kpi"/>
+          <p:cNvPr id="5" name="sk"/>
           <p:cNvSpPr/>
           <p:nvPr/>
         </p:nvSpPr>
         <p:spPr>
           <a:xfrm>
-            <a:off x="457200" y="1737360"/>
-            <a:ext cx="3200400" cy="4754880"/>
+            <a:off x="365760" y="1554480"/>
+            <a:ext cx="3291840" cy="4846320"/>
           </a:xfrm>
           <a:prstGeom prst="roundRect"/>
           <a:solidFill>
-            <a:srgbClr val="3498DB"/>
+            <a:srgbClr val="2980B9"/>
           </a:solidFill>
           <a:ln>
             <a:noFill/>
           </a:ln>
         </p:spPr>
         <p:txBody>
-          <a:bodyPr wrap="square" anchor="ctr"/>
+          <a:bodyPr wrap="square" anchor="ctr" lIns="91440" rIns="91440" tIns="45720" bIns="45720"/>
           <a:lstStyle/>
           <a:p>
-            <a:pPr algn="ctr"/>
+            <a:pPr algn="l"/>
             <a:r>
               <a:rPr lang="en-US" sz="1200" b="1">
                 <a:solidFill>
@@ -2425,19 +2438,19 @@
             </a:r>
           </a:p>
           <a:p>
-            <a:pPr algn="ctr"/>
-            <a:r>
-              <a:rPr lang="en-US" sz="300" b="0">
-                <a:solidFill>
-                  <a:srgbClr val="FFFFFF"/>
-                </a:solidFill>
-                <a:latin typeface="Segoe UI"/>
-              </a:rPr>
-              <a:t/>
-            </a:r>
-          </a:p>
-          <a:p>
-            <a:pPr algn="ctr"/>
+            <a:pPr algn="l"/>
+            <a:r>
+              <a:rPr lang="en-US" sz="250" b="0">
+                <a:solidFill>
+                  <a:srgbClr val="FFFFFF"/>
+                </a:solidFill>
+                <a:latin typeface="Segoe UI"/>
+              </a:rPr>
+              <a:t/>
+            </a:r>
+          </a:p>
+          <a:p>
+            <a:pPr algn="l"/>
             <a:r>
               <a:rPr lang="en-US" sz="1000" b="1">
                 <a:solidFill>
@@ -2449,7 +2462,7 @@
             </a:r>
           </a:p>
           <a:p>
-            <a:pPr algn="ctr"/>
+            <a:pPr algn="l"/>
             <a:r>
               <a:rPr lang="en-US" sz="1000" b="0">
                 <a:solidFill>
@@ -2461,19 +2474,19 @@
             </a:r>
           </a:p>
           <a:p>
-            <a:pPr algn="ctr"/>
-            <a:r>
-              <a:rPr lang="en-US" sz="200" b="0">
-                <a:solidFill>
-                  <a:srgbClr val="FFFFFF"/>
-                </a:solidFill>
-                <a:latin typeface="Segoe UI"/>
-              </a:rPr>
-              <a:t/>
-            </a:r>
-          </a:p>
-          <a:p>
-            <a:pPr algn="ctr"/>
+            <a:pPr algn="l"/>
+            <a:r>
+              <a:rPr lang="en-US" sz="150" b="0">
+                <a:solidFill>
+                  <a:srgbClr val="FFFFFF"/>
+                </a:solidFill>
+                <a:latin typeface="Segoe UI"/>
+              </a:rPr>
+              <a:t/>
+            </a:r>
+          </a:p>
+          <a:p>
+            <a:pPr algn="l"/>
             <a:r>
               <a:rPr lang="en-US" sz="1000" b="1">
                 <a:solidFill>
@@ -2485,7 +2498,7 @@
             </a:r>
           </a:p>
           <a:p>
-            <a:pPr algn="ctr"/>
+            <a:pPr algn="l"/>
             <a:r>
               <a:rPr lang="en-US" sz="1000" b="0">
                 <a:solidFill>
@@ -2493,23 +2506,35 @@
                 </a:solidFill>
                 <a:latin typeface="Segoe UI"/>
               </a:rPr>
-              <a:t>Target 3-5% (industry avg 1-2%)</a:t>
-            </a:r>
-          </a:p>
-          <a:p>
-            <a:pPr algn="ctr"/>
-            <a:r>
-              <a:rPr lang="en-US" sz="200" b="0">
-                <a:solidFill>
-                  <a:srgbClr val="FFFFFF"/>
-                </a:solidFill>
-                <a:latin typeface="Segoe UI"/>
-              </a:rPr>
-              <a:t/>
-            </a:r>
-          </a:p>
-          <a:p>
-            <a:pPr algn="ctr"/>
+              <a:t>Target 3-5%</a:t>
+            </a:r>
+          </a:p>
+          <a:p>
+            <a:pPr algn="l"/>
+            <a:r>
+              <a:rPr lang="en-US" sz="900" b="0">
+                <a:solidFill>
+                  <a:srgbClr val="D6EAF8"/>
+                </a:solidFill>
+                <a:latin typeface="Segoe UI"/>
+              </a:rPr>
+              <a:t>(industry avg 1-2%)</a:t>
+            </a:r>
+          </a:p>
+          <a:p>
+            <a:pPr algn="l"/>
+            <a:r>
+              <a:rPr lang="en-US" sz="150" b="0">
+                <a:solidFill>
+                  <a:srgbClr val="FFFFFF"/>
+                </a:solidFill>
+                <a:latin typeface="Segoe UI"/>
+              </a:rPr>
+              <a:t/>
+            </a:r>
+          </a:p>
+          <a:p>
+            <a:pPr algn="l"/>
             <a:r>
               <a:rPr lang="en-US" sz="1000" b="1">
                 <a:solidFill>
@@ -2521,7 +2546,7 @@
             </a:r>
           </a:p>
           <a:p>
-            <a:pPr algn="ctr"/>
+            <a:pPr algn="l"/>
             <a:r>
               <a:rPr lang="en-US" sz="1000" b="0">
                 <a:solidFill>
@@ -2529,23 +2554,23 @@
                 </a:solidFill>
                 <a:latin typeface="Segoe UI"/>
               </a:rPr>
-              <a:t>+200-400 in 3 months</a:t>
-            </a:r>
-          </a:p>
-          <a:p>
-            <a:pPr algn="ctr"/>
-            <a:r>
-              <a:rPr lang="en-US" sz="200" b="0">
-                <a:solidFill>
-                  <a:srgbClr val="FFFFFF"/>
-                </a:solidFill>
-                <a:latin typeface="Segoe UI"/>
-              </a:rPr>
-              <a:t/>
-            </a:r>
-          </a:p>
-          <a:p>
-            <a:pPr algn="ctr"/>
+              <a:t>+200-350 in 3 months</a:t>
+            </a:r>
+          </a:p>
+          <a:p>
+            <a:pPr algn="l"/>
+            <a:r>
+              <a:rPr lang="en-US" sz="150" b="0">
+                <a:solidFill>
+                  <a:srgbClr val="FFFFFF"/>
+                </a:solidFill>
+                <a:latin typeface="Segoe UI"/>
+              </a:rPr>
+              <a:t/>
+            </a:r>
+          </a:p>
+          <a:p>
+            <a:pPr algn="l"/>
             <a:r>
               <a:rPr lang="en-US" sz="1000" b="1">
                 <a:solidFill>
@@ -2557,7 +2582,7 @@
             </a:r>
           </a:p>
           <a:p>
-            <a:pPr algn="ctr"/>
+            <a:pPr algn="l"/>
             <a:r>
               <a:rPr lang="en-US" sz="1000" b="0">
                 <a:solidFill>
@@ -2569,19 +2594,19 @@
             </a:r>
           </a:p>
           <a:p>
-            <a:pPr algn="ctr"/>
-            <a:r>
-              <a:rPr lang="en-US" sz="200" b="0">
-                <a:solidFill>
-                  <a:srgbClr val="FFFFFF"/>
-                </a:solidFill>
-                <a:latin typeface="Segoe UI"/>
-              </a:rPr>
-              <a:t/>
-            </a:r>
-          </a:p>
-          <a:p>
-            <a:pPr algn="ctr"/>
+            <a:pPr algn="l"/>
+            <a:r>
+              <a:rPr lang="en-US" sz="150" b="0">
+                <a:solidFill>
+                  <a:srgbClr val="FFFFFF"/>
+                </a:solidFill>
+                <a:latin typeface="Segoe UI"/>
+              </a:rPr>
+              <a:t/>
+            </a:r>
+          </a:p>
+          <a:p>
+            <a:pPr algn="l"/>
             <a:r>
               <a:rPr lang="en-US" sz="1000" b="1">
                 <a:solidFill>
@@ -2593,7 +2618,7 @@
             </a:r>
           </a:p>
           <a:p>
-            <a:pPr algn="ctr"/>
+            <a:pPr algn="l"/>
             <a:r>
               <a:rPr lang="en-US" sz="1000" b="0">
                 <a:solidFill>
@@ -2608,28 +2633,28 @@
       </p:sp>
       <p:sp>
         <p:nvSpPr>
-          <p:cNvPr id="6" name="web_kpi"/>
+          <p:cNvPr id="6" name="wk"/>
           <p:cNvSpPr/>
           <p:nvPr/>
         </p:nvSpPr>
         <p:spPr>
           <a:xfrm>
-            <a:off x="3840480" y="1737360"/>
-            <a:ext cx="3200400" cy="4754880"/>
+            <a:off x="3794760" y="1554480"/>
+            <a:ext cx="3291840" cy="4846320"/>
           </a:xfrm>
           <a:prstGeom prst="roundRect"/>
           <a:solidFill>
-            <a:srgbClr val="2ECC71"/>
+            <a:srgbClr val="1D6B3F"/>
           </a:solidFill>
           <a:ln>
             <a:noFill/>
           </a:ln>
         </p:spPr>
         <p:txBody>
-          <a:bodyPr wrap="square" anchor="ctr"/>
+          <a:bodyPr wrap="square" anchor="ctr" lIns="91440" rIns="91440" tIns="45720" bIns="45720"/>
           <a:lstStyle/>
           <a:p>
-            <a:pPr algn="ctr"/>
+            <a:pPr algn="l"/>
             <a:r>
               <a:rPr lang="en-US" sz="1200" b="1">
                 <a:solidFill>
@@ -2641,19 +2666,19 @@
             </a:r>
           </a:p>
           <a:p>
-            <a:pPr algn="ctr"/>
-            <a:r>
-              <a:rPr lang="en-US" sz="300" b="0">
-                <a:solidFill>
-                  <a:srgbClr val="FFFFFF"/>
-                </a:solidFill>
-                <a:latin typeface="Segoe UI"/>
-              </a:rPr>
-              <a:t/>
-            </a:r>
-          </a:p>
-          <a:p>
-            <a:pPr algn="ctr"/>
+            <a:pPr algn="l"/>
+            <a:r>
+              <a:rPr lang="en-US" sz="250" b="0">
+                <a:solidFill>
+                  <a:srgbClr val="FFFFFF"/>
+                </a:solidFill>
+                <a:latin typeface="Segoe UI"/>
+              </a:rPr>
+              <a:t/>
+            </a:r>
+          </a:p>
+          <a:p>
+            <a:pPr algn="l"/>
             <a:r>
               <a:rPr lang="en-US" sz="1000" b="1">
                 <a:solidFill>
@@ -2665,7 +2690,7 @@
             </a:r>
           </a:p>
           <a:p>
-            <a:pPr algn="ctr"/>
+            <a:pPr algn="l"/>
             <a:r>
               <a:rPr lang="en-US" sz="1000" b="0">
                 <a:solidFill>
@@ -2677,19 +2702,19 @@
             </a:r>
           </a:p>
           <a:p>
-            <a:pPr algn="ctr"/>
-            <a:r>
-              <a:rPr lang="en-US" sz="200" b="0">
-                <a:solidFill>
-                  <a:srgbClr val="FFFFFF"/>
-                </a:solidFill>
-                <a:latin typeface="Segoe UI"/>
-              </a:rPr>
-              <a:t/>
-            </a:r>
-          </a:p>
-          <a:p>
-            <a:pPr algn="ctr"/>
+            <a:pPr algn="l"/>
+            <a:r>
+              <a:rPr lang="en-US" sz="150" b="0">
+                <a:solidFill>
+                  <a:srgbClr val="FFFFFF"/>
+                </a:solidFill>
+                <a:latin typeface="Segoe UI"/>
+              </a:rPr>
+              <a:t/>
+            </a:r>
+          </a:p>
+          <a:p>
+            <a:pPr algn="l"/>
             <a:r>
               <a:rPr lang="en-US" sz="1000" b="1">
                 <a:solidFill>
@@ -2701,7 +2726,7 @@
             </a:r>
           </a:p>
           <a:p>
-            <a:pPr algn="ctr"/>
+            <a:pPr algn="l"/>
             <a:r>
               <a:rPr lang="en-US" sz="1000" b="0">
                 <a:solidFill>
@@ -2713,19 +2738,19 @@
             </a:r>
           </a:p>
           <a:p>
-            <a:pPr algn="ctr"/>
-            <a:r>
-              <a:rPr lang="en-US" sz="200" b="0">
-                <a:solidFill>
-                  <a:srgbClr val="FFFFFF"/>
-                </a:solidFill>
-                <a:latin typeface="Segoe UI"/>
-              </a:rPr>
-              <a:t/>
-            </a:r>
-          </a:p>
-          <a:p>
-            <a:pPr algn="ctr"/>
+            <a:pPr algn="l"/>
+            <a:r>
+              <a:rPr lang="en-US" sz="150" b="0">
+                <a:solidFill>
+                  <a:srgbClr val="FFFFFF"/>
+                </a:solidFill>
+                <a:latin typeface="Segoe UI"/>
+              </a:rPr>
+              <a:t/>
+            </a:r>
+          </a:p>
+          <a:p>
+            <a:pPr algn="l"/>
             <a:r>
               <a:rPr lang="en-US" sz="1000" b="1">
                 <a:solidFill>
@@ -2737,7 +2762,7 @@
             </a:r>
           </a:p>
           <a:p>
-            <a:pPr algn="ctr"/>
+            <a:pPr algn="l"/>
             <a:r>
               <a:rPr lang="en-US" sz="1000" b="0">
                 <a:solidFill>
@@ -2749,19 +2774,19 @@
             </a:r>
           </a:p>
           <a:p>
-            <a:pPr algn="ctr"/>
-            <a:r>
-              <a:rPr lang="en-US" sz="200" b="0">
-                <a:solidFill>
-                  <a:srgbClr val="FFFFFF"/>
-                </a:solidFill>
-                <a:latin typeface="Segoe UI"/>
-              </a:rPr>
-              <a:t/>
-            </a:r>
-          </a:p>
-          <a:p>
-            <a:pPr algn="ctr"/>
+            <a:pPr algn="l"/>
+            <a:r>
+              <a:rPr lang="en-US" sz="150" b="0">
+                <a:solidFill>
+                  <a:srgbClr val="FFFFFF"/>
+                </a:solidFill>
+                <a:latin typeface="Segoe UI"/>
+              </a:rPr>
+              <a:t/>
+            </a:r>
+          </a:p>
+          <a:p>
+            <a:pPr algn="l"/>
             <a:r>
               <a:rPr lang="en-US" sz="1000" b="1">
                 <a:solidFill>
@@ -2773,7 +2798,7 @@
             </a:r>
           </a:p>
           <a:p>
-            <a:pPr algn="ctr"/>
+            <a:pPr algn="l"/>
             <a:r>
               <a:rPr lang="en-US" sz="1000" b="0">
                 <a:solidFill>
@@ -2785,19 +2810,19 @@
             </a:r>
           </a:p>
           <a:p>
-            <a:pPr algn="ctr"/>
-            <a:r>
-              <a:rPr lang="en-US" sz="200" b="0">
-                <a:solidFill>
-                  <a:srgbClr val="FFFFFF"/>
-                </a:solidFill>
-                <a:latin typeface="Segoe UI"/>
-              </a:rPr>
-              <a:t/>
-            </a:r>
-          </a:p>
-          <a:p>
-            <a:pPr algn="ctr"/>
+            <a:pPr algn="l"/>
+            <a:r>
+              <a:rPr lang="en-US" sz="150" b="0">
+                <a:solidFill>
+                  <a:srgbClr val="FFFFFF"/>
+                </a:solidFill>
+                <a:latin typeface="Segoe UI"/>
+              </a:rPr>
+              <a:t/>
+            </a:r>
+          </a:p>
+          <a:p>
+            <a:pPr algn="l"/>
             <a:r>
               <a:rPr lang="en-US" sz="1000" b="1">
                 <a:solidFill>
@@ -2809,7 +2834,7 @@
             </a:r>
           </a:p>
           <a:p>
-            <a:pPr algn="ctr"/>
+            <a:pPr algn="l"/>
             <a:r>
               <a:rPr lang="en-US" sz="1000" b="0">
                 <a:solidFill>
@@ -2824,28 +2849,28 @@
       </p:sp>
       <p:sp>
         <p:nvSpPr>
-          <p:cNvPr id="7" name="biz_kpi"/>
+          <p:cNvPr id="7" name="bk"/>
           <p:cNvSpPr/>
           <p:nvPr/>
         </p:nvSpPr>
         <p:spPr>
           <a:xfrm>
-            <a:off x="7223760" y="1737360"/>
-            <a:ext cx="3383280" cy="4754880"/>
+            <a:off x="7223760" y="1554480"/>
+            <a:ext cx="3383280" cy="4846320"/>
           </a:xfrm>
           <a:prstGeom prst="roundRect"/>
           <a:solidFill>
-            <a:srgbClr val="F39C12"/>
+            <a:srgbClr val="D4740E"/>
           </a:solidFill>
           <a:ln>
             <a:noFill/>
           </a:ln>
         </p:spPr>
         <p:txBody>
-          <a:bodyPr wrap="square" anchor="ctr"/>
+          <a:bodyPr wrap="square" anchor="ctr" lIns="91440" rIns="91440" tIns="45720" bIns="45720"/>
           <a:lstStyle/>
           <a:p>
-            <a:pPr algn="ctr"/>
+            <a:pPr algn="l"/>
             <a:r>
               <a:rPr lang="en-US" sz="1200" b="1">
                 <a:solidFill>
@@ -2857,19 +2882,19 @@
             </a:r>
           </a:p>
           <a:p>
-            <a:pPr algn="ctr"/>
-            <a:r>
-              <a:rPr lang="en-US" sz="300" b="0">
-                <a:solidFill>
-                  <a:srgbClr val="FFFFFF"/>
-                </a:solidFill>
-                <a:latin typeface="Segoe UI"/>
-              </a:rPr>
-              <a:t/>
-            </a:r>
-          </a:p>
-          <a:p>
-            <a:pPr algn="ctr"/>
+            <a:pPr algn="l"/>
+            <a:r>
+              <a:rPr lang="en-US" sz="250" b="0">
+                <a:solidFill>
+                  <a:srgbClr val="FFFFFF"/>
+                </a:solidFill>
+                <a:latin typeface="Segoe UI"/>
+              </a:rPr>
+              <a:t/>
+            </a:r>
+          </a:p>
+          <a:p>
+            <a:pPr algn="l"/>
             <a:r>
               <a:rPr lang="en-US" sz="1000" b="1">
                 <a:solidFill>
@@ -2881,7 +2906,7 @@
             </a:r>
           </a:p>
           <a:p>
-            <a:pPr algn="ctr"/>
+            <a:pPr algn="l"/>
             <a:r>
               <a:rPr lang="en-US" sz="1000" b="0">
                 <a:solidFill>
@@ -2893,19 +2918,19 @@
             </a:r>
           </a:p>
           <a:p>
-            <a:pPr algn="ctr"/>
-            <a:r>
-              <a:rPr lang="en-US" sz="200" b="0">
-                <a:solidFill>
-                  <a:srgbClr val="FFFFFF"/>
-                </a:solidFill>
-                <a:latin typeface="Segoe UI"/>
-              </a:rPr>
-              <a:t/>
-            </a:r>
-          </a:p>
-          <a:p>
-            <a:pPr algn="ctr"/>
+            <a:pPr algn="l"/>
+            <a:r>
+              <a:rPr lang="en-US" sz="150" b="0">
+                <a:solidFill>
+                  <a:srgbClr val="FFFFFF"/>
+                </a:solidFill>
+                <a:latin typeface="Segoe UI"/>
+              </a:rPr>
+              <a:t/>
+            </a:r>
+          </a:p>
+          <a:p>
+            <a:pPr algn="l"/>
             <a:r>
               <a:rPr lang="en-US" sz="1000" b="1">
                 <a:solidFill>
@@ -2917,7 +2942,7 @@
             </a:r>
           </a:p>
           <a:p>
-            <a:pPr algn="ctr"/>
+            <a:pPr algn="l"/>
             <a:r>
               <a:rPr lang="en-US" sz="1000" b="0">
                 <a:solidFill>
@@ -2925,23 +2950,23 @@
                 </a:solidFill>
                 <a:latin typeface="Segoe UI"/>
               </a:rPr>
-              <a:t>Measurable via reach &amp; mentions</a:t>
-            </a:r>
-          </a:p>
-          <a:p>
-            <a:pPr algn="ctr"/>
-            <a:r>
-              <a:rPr lang="en-US" sz="200" b="0">
-                <a:solidFill>
-                  <a:srgbClr val="FFFFFF"/>
-                </a:solidFill>
-                <a:latin typeface="Segoe UI"/>
-              </a:rPr>
-              <a:t/>
-            </a:r>
-          </a:p>
-          <a:p>
-            <a:pPr algn="ctr"/>
+              <a:t>Measurable via reach</a:t>
+            </a:r>
+          </a:p>
+          <a:p>
+            <a:pPr algn="l"/>
+            <a:r>
+              <a:rPr lang="en-US" sz="150" b="0">
+                <a:solidFill>
+                  <a:srgbClr val="FFFFFF"/>
+                </a:solidFill>
+                <a:latin typeface="Segoe UI"/>
+              </a:rPr>
+              <a:t/>
+            </a:r>
+          </a:p>
+          <a:p>
+            <a:pPr algn="l"/>
             <a:r>
               <a:rPr lang="en-US" sz="1000" b="1">
                 <a:solidFill>
@@ -2949,11 +2974,11 @@
                 </a:solidFill>
                 <a:latin typeface="Segoe UI"/>
               </a:rPr>
-              <a:t>Cost Per Lead:</a:t>
-            </a:r>
-          </a:p>
-          <a:p>
-            <a:pPr algn="ctr"/>
+              <a:t>Cost Per Follower:</a:t>
+            </a:r>
+          </a:p>
+          <a:p>
+            <a:pPr algn="l"/>
             <a:r>
               <a:rPr lang="en-US" sz="1000" b="0">
                 <a:solidFill>
@@ -2961,23 +2986,23 @@
                 </a:solidFill>
                 <a:latin typeface="Segoe UI"/>
               </a:rPr>
-              <a:t>Target: $15-30 per lead</a:t>
-            </a:r>
-          </a:p>
-          <a:p>
-            <a:pPr algn="ctr"/>
-            <a:r>
-              <a:rPr lang="en-US" sz="200" b="0">
-                <a:solidFill>
-                  <a:srgbClr val="FFFFFF"/>
-                </a:solidFill>
-                <a:latin typeface="Segoe UI"/>
-              </a:rPr>
-              <a:t/>
-            </a:r>
-          </a:p>
-          <a:p>
-            <a:pPr algn="ctr"/>
+              <a:t>$0.80-$1.30 (with $200 budget)</a:t>
+            </a:r>
+          </a:p>
+          <a:p>
+            <a:pPr algn="l"/>
+            <a:r>
+              <a:rPr lang="en-US" sz="150" b="0">
+                <a:solidFill>
+                  <a:srgbClr val="FFFFFF"/>
+                </a:solidFill>
+                <a:latin typeface="Segoe UI"/>
+              </a:rPr>
+              <a:t/>
+            </a:r>
+          </a:p>
+          <a:p>
+            <a:pPr algn="l"/>
             <a:r>
               <a:rPr lang="en-US" sz="1000" b="1">
                 <a:solidFill>
@@ -2985,11 +3010,47 @@
                 </a:solidFill>
                 <a:latin typeface="Segoe UI"/>
               </a:rPr>
+              <a:t>Cost Per Engagement:</a:t>
+            </a:r>
+          </a:p>
+          <a:p>
+            <a:pPr algn="l"/>
+            <a:r>
+              <a:rPr lang="en-US" sz="1000" b="0">
+                <a:solidFill>
+                  <a:srgbClr val="FEF3E2"/>
+                </a:solidFill>
+                <a:latin typeface="Segoe UI"/>
+              </a:rPr>
+              <a:t>$0.05-$0.15 per interaction</a:t>
+            </a:r>
+          </a:p>
+          <a:p>
+            <a:pPr algn="l"/>
+            <a:r>
+              <a:rPr lang="en-US" sz="150" b="0">
+                <a:solidFill>
+                  <a:srgbClr val="FFFFFF"/>
+                </a:solidFill>
+                <a:latin typeface="Segoe UI"/>
+              </a:rPr>
+              <a:t/>
+            </a:r>
+          </a:p>
+          <a:p>
+            <a:pPr algn="l"/>
+            <a:r>
+              <a:rPr lang="en-US" sz="1000" b="1">
+                <a:solidFill>
+                  <a:srgbClr val="FFFFFF"/>
+                </a:solidFill>
+                <a:latin typeface="Segoe UI"/>
+              </a:rPr>
               <a:t>Review Rating:</a:t>
             </a:r>
           </a:p>
           <a:p>
-            <a:pPr algn="ctr"/>
+            <a:pPr algn="l"/>
             <a:r>
               <a:rPr lang="en-US" sz="1000" b="0">
                 <a:solidFill>
@@ -2998,42 +3059,6 @@
                 <a:latin typeface="Segoe UI"/>
               </a:rPr>
               <a:t>Maintain 4.5+ stars</a:t>
-            </a:r>
-          </a:p>
-          <a:p>
-            <a:pPr algn="ctr"/>
-            <a:r>
-              <a:rPr lang="en-US" sz="200" b="0">
-                <a:solidFill>
-                  <a:srgbClr val="FFFFFF"/>
-                </a:solidFill>
-                <a:latin typeface="Segoe UI"/>
-              </a:rPr>
-              <a:t/>
-            </a:r>
-          </a:p>
-          <a:p>
-            <a:pPr algn="ctr"/>
-            <a:r>
-              <a:rPr lang="en-US" sz="1000" b="1">
-                <a:solidFill>
-                  <a:srgbClr val="FFFFFF"/>
-                </a:solidFill>
-                <a:latin typeface="Segoe UI"/>
-              </a:rPr>
-              <a:t>Community Growth:</a:t>
-            </a:r>
-          </a:p>
-          <a:p>
-            <a:pPr algn="ctr"/>
-            <a:r>
-              <a:rPr lang="en-US" sz="1000" b="0">
-                <a:solidFill>
-                  <a:srgbClr val="FEF3E2"/>
-                </a:solidFill>
-                <a:latin typeface="Segoe UI"/>
-              </a:rPr>
-              <a:t>Engaged local following</a:t>
             </a:r>
           </a:p>
         </p:txBody>
@@ -3063,14 +3088,14 @@
       <p:grpSpPr/>
       <p:sp>
         <p:nvSpPr>
-          <p:cNvPr id="2" name="header_bg"/>
+          <p:cNvPr id="2" name="h"/>
           <p:cNvSpPr/>
           <p:nvPr/>
         </p:nvSpPr>
         <p:spPr>
           <a:xfrm>
             <a:off x="0" y="0"/>
-            <a:ext cx="12192000" cy="1097280"/>
+            <a:ext cx="12192000" cy="1005840"/>
           </a:xfrm>
           <a:prstGeom prst="rect"/>
           <a:solidFill>
@@ -3083,13 +3108,13 @@
       </p:sp>
       <p:sp>
         <p:nvSpPr>
-          <p:cNvPr id="3" name="header"/>
+          <p:cNvPr id="3" name="ht"/>
           <p:cNvSpPr txBox="1"/>
           <p:nvPr/>
         </p:nvSpPr>
         <p:spPr>
           <a:xfrm>
-            <a:off x="457200" y="182880"/>
+            <a:off x="457200" y="137160"/>
             <a:ext cx="9144000" cy="822960"/>
           </a:xfrm>
           <a:prstGeom prst="rect"/>
@@ -3105,13 +3130,13 @@
               </a:spcBef>
             </a:pPr>
             <a:r>
-              <a:rPr lang="en-US" sz="2000" b="1" dirty="0">
-                <a:solidFill>
-                  <a:srgbClr val="FFFFFF"/>
-                </a:solidFill>
-                <a:latin typeface="Segoe UI"/>
-              </a:rPr>
-              <a:t>10 | STANDARD PLAN - PROPOSAL</a:t>
+              <a:rPr lang="en-US" sz="1900" b="1" dirty="0">
+                <a:solidFill>
+                  <a:srgbClr val="FFFFFF"/>
+                </a:solidFill>
+                <a:latin typeface="Segoe UI"/>
+              </a:rPr>
+              <a:t>10 | STANDARD PLAN - INR 10,000/month</a:t>
             </a:r>
           </a:p>
         </p:txBody>
@@ -3124,22 +3149,22 @@
         </p:nvSpPr>
         <p:spPr>
           <a:xfrm>
-            <a:off x="457200" y="1371600"/>
-            <a:ext cx="6400800" cy="5212080"/>
+            <a:off x="365760" y="1280160"/>
+            <a:ext cx="6583680" cy="5212080"/>
           </a:xfrm>
           <a:prstGeom prst="roundRect"/>
           <a:solidFill>
-            <a:srgbClr val="F0F4F8"/>
+            <a:srgbClr val="F4F6F8"/>
           </a:solidFill>
           <a:ln>
             <a:noFill/>
           </a:ln>
         </p:spPr>
         <p:txBody>
-          <a:bodyPr wrap="square" anchor="ctr"/>
+          <a:bodyPr wrap="square" anchor="ctr" lIns="91440" rIns="91440" tIns="45720" bIns="45720"/>
           <a:lstStyle/>
           <a:p>
-            <a:pPr algn="ctr"/>
+            <a:pPr algn="l"/>
             <a:r>
               <a:rPr lang="en-US" sz="1800" b="1">
                 <a:solidFill>
@@ -3151,7 +3176,7 @@
             </a:r>
           </a:p>
           <a:p>
-            <a:pPr algn="ctr"/>
+            <a:pPr algn="l"/>
             <a:r>
               <a:rPr lang="en-US" sz="1100" b="0">
                 <a:solidFill>
@@ -3159,13 +3184,13 @@
                 </a:solidFill>
                 <a:latin typeface="Segoe UI"/>
               </a:rPr>
-              <a:t>3-Month Digital Growth Package</a:t>
-            </a:r>
-          </a:p>
-          <a:p>
-            <a:pPr algn="ctr"/>
-            <a:r>
-              <a:rPr lang="en-US" sz="300" b="0">
+              <a:t>Social Media Management Package</a:t>
+            </a:r>
+          </a:p>
+          <a:p>
+            <a:pPr algn="l"/>
+            <a:r>
+              <a:rPr lang="en-US" sz="250" b="0">
                 <a:solidFill>
                   <a:srgbClr val="333333"/>
                 </a:solidFill>
@@ -3175,11 +3200,11 @@
             </a:r>
           </a:p>
           <a:p>
-            <a:pPr algn="ctr"/>
+            <a:pPr algn="l"/>
             <a:r>
               <a:rPr lang="en-US" sz="1100" b="1">
                 <a:solidFill>
-                  <a:srgbClr val="E74C3C"/>
+                  <a:srgbClr val="C41E3A"/>
                 </a:solidFill>
                 <a:latin typeface="Segoe UI"/>
               </a:rPr>
@@ -3187,7 +3212,7 @@
             </a:r>
           </a:p>
           <a:p>
-            <a:pPr algn="ctr"/>
+            <a:pPr algn="l"/>
             <a:r>
               <a:rPr lang="en-US" sz="150" b="0">
                 <a:solidFill>
@@ -3199,161 +3224,161 @@
             </a:r>
           </a:p>
           <a:p>
-            <a:pPr algn="ctr"/>
-            <a:r>
-              <a:rPr lang="en-US" sz="1000" b="0">
+            <a:pPr algn="l"/>
+            <a:r>
+              <a:rPr lang="en-US" sz="1050" b="0">
                 <a:solidFill>
                   <a:srgbClr val="333333"/>
                 </a:solidFill>
                 <a:latin typeface="Segoe UI"/>
               </a:rPr>
-              <a:t>Social Media Management (IG + FB)</a:t>
-            </a:r>
-          </a:p>
-          <a:p>
-            <a:pPr algn="ctr"/>
-            <a:r>
-              <a:rPr lang="en-US" sz="900" b="0">
+              <a:t>Monthly Content Calendar [8-11 Posts]</a:t>
+            </a:r>
+          </a:p>
+          <a:p>
+            <a:pPr algn="l"/>
+            <a:r>
+              <a:rPr lang="en-US" sz="950" b="0">
                 <a:solidFill>
                   <a:srgbClr val="555555"/>
                 </a:solidFill>
                 <a:latin typeface="Segoe UI"/>
               </a:rPr>
-              <a:t>   12-16 posts/month + Stories</a:t>
-            </a:r>
-          </a:p>
-          <a:p>
-            <a:pPr algn="ctr"/>
-            <a:r>
-              <a:rPr lang="en-US" sz="1000" b="0">
+              <a:t>   1-2 Reels</a:t>
+            </a:r>
+          </a:p>
+          <a:p>
+            <a:pPr algn="l"/>
+            <a:r>
+              <a:rPr lang="en-US" sz="950" b="0">
+                <a:solidFill>
+                  <a:srgbClr val="555555"/>
+                </a:solidFill>
+                <a:latin typeface="Segoe UI"/>
+              </a:rPr>
+              <a:t>   2-3 Carousels</a:t>
+            </a:r>
+          </a:p>
+          <a:p>
+            <a:pPr algn="l"/>
+            <a:r>
+              <a:rPr lang="en-US" sz="950" b="0">
+                <a:solidFill>
+                  <a:srgbClr val="555555"/>
+                </a:solidFill>
+                <a:latin typeface="Segoe UI"/>
+              </a:rPr>
+              <a:t>   4-6 Static Posts</a:t>
+            </a:r>
+          </a:p>
+          <a:p>
+            <a:pPr algn="l"/>
+            <a:r>
+              <a:rPr lang="en-US" sz="100" b="0">
                 <a:solidFill>
                   <a:srgbClr val="333333"/>
                 </a:solidFill>
                 <a:latin typeface="Segoe UI"/>
               </a:rPr>
-              <a:t>Content Creation (Graphics + Reels)</a:t>
-            </a:r>
-          </a:p>
-          <a:p>
-            <a:pPr algn="ctr"/>
-            <a:r>
-              <a:rPr lang="en-US" sz="900" b="0">
-                <a:solidFill>
-                  <a:srgbClr val="555555"/>
-                </a:solidFill>
-                <a:latin typeface="Segoe UI"/>
-              </a:rPr>
-              <a:t>   Professional visuals + short-form video</a:t>
-            </a:r>
-          </a:p>
-          <a:p>
-            <a:pPr algn="ctr"/>
-            <a:r>
-              <a:rPr lang="en-US" sz="1000" b="0">
+              <a:t/>
+            </a:r>
+          </a:p>
+          <a:p>
+            <a:pPr algn="l"/>
+            <a:r>
+              <a:rPr lang="en-US" sz="1050" b="0">
                 <a:solidFill>
                   <a:srgbClr val="333333"/>
                 </a:solidFill>
                 <a:latin typeface="Segoe UI"/>
               </a:rPr>
-              <a:t>Community Management &amp; Engagement</a:t>
-            </a:r>
-          </a:p>
-          <a:p>
-            <a:pPr algn="ctr"/>
-            <a:r>
-              <a:rPr lang="en-US" sz="900" b="0">
-                <a:solidFill>
-                  <a:srgbClr val="555555"/>
-                </a:solidFill>
-                <a:latin typeface="Segoe UI"/>
-              </a:rPr>
-              <a:t>   Daily monitoring + responses</a:t>
-            </a:r>
-          </a:p>
-          <a:p>
-            <a:pPr algn="ctr"/>
-            <a:r>
-              <a:rPr lang="en-US" sz="1000" b="0">
+              <a:t>Hashtag Research</a:t>
+            </a:r>
+          </a:p>
+          <a:p>
+            <a:pPr algn="l"/>
+            <a:r>
+              <a:rPr lang="en-US" sz="1050" b="0">
                 <a:solidFill>
                   <a:srgbClr val="333333"/>
                 </a:solidFill>
                 <a:latin typeface="Segoe UI"/>
               </a:rPr>
-              <a:t>Website SEO Optimization (On-Page)</a:t>
-            </a:r>
-          </a:p>
-          <a:p>
-            <a:pPr algn="ctr"/>
-            <a:r>
-              <a:rPr lang="en-US" sz="900" b="0">
-                <a:solidFill>
-                  <a:srgbClr val="555555"/>
-                </a:solidFill>
-                <a:latin typeface="Segoe UI"/>
-              </a:rPr>
-              <a:t>   Meta tags, schema, speed fixes</a:t>
-            </a:r>
-          </a:p>
-          <a:p>
-            <a:pPr algn="ctr"/>
-            <a:r>
-              <a:rPr lang="en-US" sz="1000" b="0">
+              <a:t>Basic SEO-Based Optimization</a:t>
+            </a:r>
+          </a:p>
+          <a:p>
+            <a:pPr algn="l"/>
+            <a:r>
+              <a:rPr lang="en-US" sz="1050" b="0">
                 <a:solidFill>
                   <a:srgbClr val="333333"/>
                 </a:solidFill>
                 <a:latin typeface="Segoe UI"/>
               </a:rPr>
-              <a:t>Blog Content (2 SEO articles/month)</a:t>
-            </a:r>
-          </a:p>
-          <a:p>
-            <a:pPr algn="ctr"/>
-            <a:r>
-              <a:rPr lang="en-US" sz="1000" b="0">
+              <a:t>Basic Page Optimization</a:t>
+            </a:r>
+          </a:p>
+          <a:p>
+            <a:pPr algn="l"/>
+            <a:r>
+              <a:rPr lang="en-US" sz="1050" b="0">
                 <a:solidFill>
                   <a:srgbClr val="333333"/>
                 </a:solidFill>
                 <a:latin typeface="Segoe UI"/>
               </a:rPr>
-              <a:t>GMB Management &amp; Weekly Posts</a:t>
-            </a:r>
-          </a:p>
-          <a:p>
-            <a:pPr algn="ctr"/>
-            <a:r>
-              <a:rPr lang="en-US" sz="1000" b="0">
+              <a:t>Monthly Performance Report</a:t>
+            </a:r>
+          </a:p>
+          <a:p>
+            <a:pPr algn="l"/>
+            <a:r>
+              <a:rPr lang="en-US" sz="250" b="0">
                 <a:solidFill>
                   <a:srgbClr val="333333"/>
                 </a:solidFill>
                 <a:latin typeface="Segoe UI"/>
               </a:rPr>
-              <a:t>Monthly Analytics Report &amp; Strategy Call</a:t>
-            </a:r>
-          </a:p>
-          <a:p>
-            <a:pPr algn="ctr"/>
-            <a:r>
-              <a:rPr lang="en-US" sz="1000" b="0">
-                <a:solidFill>
-                  <a:srgbClr val="333333"/>
-                </a:solidFill>
-                <a:latin typeface="Segoe UI"/>
-              </a:rPr>
-              <a:t>Ad Management (budget separate)</a:t>
+              <a:t/>
+            </a:r>
+          </a:p>
+          <a:p>
+            <a:pPr algn="l"/>
+            <a:r>
+              <a:rPr lang="en-US" sz="1050" b="1">
+                <a:solidFill>
+                  <a:srgbClr val="2C3E50"/>
+                </a:solidFill>
+                <a:latin typeface="Segoe UI"/>
+              </a:rPr>
+              <a:t>Platform: Facebook &amp; Instagram Only</a:t>
+            </a:r>
+          </a:p>
+          <a:p>
+            <a:pPr algn="l"/>
+            <a:r>
+              <a:rPr lang="en-US" sz="1050" b="0">
+                <a:solidFill>
+                  <a:srgbClr val="C41E3A"/>
+                </a:solidFill>
+                <a:latin typeface="Segoe UI"/>
+              </a:rPr>
+              <a:t>NO Ads Management Included</a:t>
             </a:r>
           </a:p>
         </p:txBody>
       </p:sp>
       <p:sp>
         <p:nvSpPr>
-          <p:cNvPr id="5" name="pricing"/>
+          <p:cNvPr id="5" name="price"/>
           <p:cNvSpPr/>
           <p:nvPr/>
         </p:nvSpPr>
         <p:spPr>
           <a:xfrm>
-            <a:off x="7132320" y="1371600"/>
-            <a:ext cx="3474720" cy="2743200"/>
+            <a:off x="7223760" y="1280160"/>
+            <a:ext cx="3383280" cy="2743200"/>
           </a:xfrm>
           <a:prstGeom prst="roundRect"/>
           <a:solidFill>
@@ -3364,14 +3389,14 @@
           </a:ln>
         </p:spPr>
         <p:txBody>
-          <a:bodyPr wrap="square" anchor="ctr"/>
+          <a:bodyPr wrap="square" anchor="ctr" lIns="91440" rIns="91440" tIns="45720" bIns="45720"/>
           <a:lstStyle/>
           <a:p>
-            <a:pPr algn="ctr"/>
+            <a:pPr algn="l"/>
             <a:r>
               <a:rPr lang="en-US" sz="1200" b="1">
                 <a:solidFill>
-                  <a:srgbClr val="E74C3C"/>
+                  <a:srgbClr val="C41E3A"/>
                 </a:solidFill>
                 <a:latin typeface="Segoe UI"/>
               </a:rPr>
@@ -3379,7 +3404,7 @@
             </a:r>
           </a:p>
           <a:p>
-            <a:pPr algn="ctr"/>
+            <a:pPr algn="l"/>
             <a:r>
               <a:rPr lang="en-US" sz="300" b="0">
                 <a:solidFill>
@@ -3391,43 +3416,43 @@
             </a:r>
           </a:p>
           <a:p>
-            <a:pPr algn="ctr"/>
-            <a:r>
-              <a:rPr lang="en-US" sz="1600" b="1">
-                <a:solidFill>
-                  <a:srgbClr val="FFFFFF"/>
-                </a:solidFill>
-                <a:latin typeface="Segoe UI"/>
-              </a:rPr>
-              <a:t>$______/month</a:t>
-            </a:r>
-          </a:p>
-          <a:p>
-            <a:pPr algn="ctr"/>
-            <a:r>
-              <a:rPr lang="en-US" sz="200" b="0">
-                <a:solidFill>
-                  <a:srgbClr val="FFFFFF"/>
-                </a:solidFill>
-                <a:latin typeface="Segoe UI"/>
-              </a:rPr>
-              <a:t/>
-            </a:r>
-          </a:p>
-          <a:p>
-            <a:pPr algn="ctr"/>
-            <a:r>
-              <a:rPr lang="en-US" sz="1000" b="0">
+            <a:pPr algn="l"/>
+            <a:r>
+              <a:rPr lang="en-US" sz="2000" b="1">
+                <a:solidFill>
+                  <a:srgbClr val="FFFFFF"/>
+                </a:solidFill>
+                <a:latin typeface="Segoe UI"/>
+              </a:rPr>
+              <a:t>INR 10,000</a:t>
+            </a:r>
+          </a:p>
+          <a:p>
+            <a:pPr algn="l"/>
+            <a:r>
+              <a:rPr lang="en-US" sz="1200" b="0">
                 <a:solidFill>
                   <a:srgbClr val="BDC3C7"/>
                 </a:solidFill>
                 <a:latin typeface="Segoe UI"/>
               </a:rPr>
-              <a:t>3-month commitment</a:t>
-            </a:r>
-          </a:p>
-          <a:p>
-            <a:pPr algn="ctr"/>
+              <a:t>/month</a:t>
+            </a:r>
+          </a:p>
+          <a:p>
+            <a:pPr algn="l"/>
+            <a:r>
+              <a:rPr lang="en-US" sz="250" b="0">
+                <a:solidFill>
+                  <a:srgbClr val="FFFFFF"/>
+                </a:solidFill>
+                <a:latin typeface="Segoe UI"/>
+              </a:rPr>
+              <a:t/>
+            </a:r>
+          </a:p>
+          <a:p>
+            <a:pPr algn="l"/>
             <a:r>
               <a:rPr lang="en-US" sz="1000" b="0">
                 <a:solidFill>
@@ -3435,95 +3460,59 @@
                 </a:solidFill>
                 <a:latin typeface="Segoe UI"/>
               </a:rPr>
-              <a:t>Ad budget separate</a:t>
-            </a:r>
-          </a:p>
-          <a:p>
-            <a:pPr algn="ctr"/>
-            <a:r>
-              <a:rPr lang="en-US" sz="900" b="0">
+              <a:t>Best for businesses starting</a:t>
+            </a:r>
+          </a:p>
+          <a:p>
+            <a:pPr algn="l"/>
+            <a:r>
+              <a:rPr lang="en-US" sz="1000" b="0">
                 <a:solidFill>
                   <a:srgbClr val="BDC3C7"/>
                 </a:solidFill>
                 <a:latin typeface="Segoe UI"/>
               </a:rPr>
-              <a:t>(recommended $500-600/mo)</a:t>
-            </a:r>
-          </a:p>
-          <a:p>
-            <a:pPr algn="ctr"/>
-            <a:r>
-              <a:rPr lang="en-US" sz="200" b="0">
-                <a:solidFill>
-                  <a:srgbClr val="FFFFFF"/>
-                </a:solidFill>
-                <a:latin typeface="Segoe UI"/>
-              </a:rPr>
-              <a:t/>
-            </a:r>
-          </a:p>
-          <a:p>
-            <a:pPr algn="ctr"/>
-            <a:r>
-              <a:rPr lang="en-US" sz="1000" b="0">
-                <a:solidFill>
-                  <a:srgbClr val="BDC3C7"/>
-                </a:solidFill>
-                <a:latin typeface="Segoe UI"/>
-              </a:rPr>
-              <a:t>Setup fee: $______</a:t>
-            </a:r>
-          </a:p>
-          <a:p>
-            <a:pPr algn="ctr"/>
-            <a:r>
-              <a:rPr lang="en-US" sz="900" b="0">
-                <a:solidFill>
-                  <a:srgbClr val="BDC3C7"/>
-                </a:solidFill>
-                <a:latin typeface="Segoe UI"/>
-              </a:rPr>
-              <a:t>(one-time, Month 1 only)</a:t>
+              <a:t>their social media journey</a:t>
             </a:r>
           </a:p>
         </p:txBody>
       </p:sp>
       <p:sp>
         <p:nvSpPr>
-          <p:cNvPr id="6" name="not_inc"/>
+          <p:cNvPr id="6" name="ideal"/>
           <p:cNvSpPr/>
           <p:nvPr/>
         </p:nvSpPr>
         <p:spPr>
           <a:xfrm>
-            <a:off x="7132320" y="4297680"/>
-            <a:ext cx="3474720" cy="2286000"/>
+            <a:off x="7223760" y="4206240"/>
+            <a:ext cx="3383280" cy="2286000"/>
           </a:xfrm>
           <a:prstGeom prst="roundRect"/>
           <a:solidFill>
-            <a:srgbClr val="F8F0F0"/>
+            <a:srgbClr val="F4F6F8"/>
           </a:solidFill>
           <a:ln>
             <a:noFill/>
           </a:ln>
         </p:spPr>
         <p:txBody>
-          <a:bodyPr wrap="square" anchor="ctr"/>
+          <a:bodyPr wrap="square" anchor="ctr" lIns="91440" rIns="91440" tIns="45720" bIns="45720"/>
           <a:lstStyle/>
           <a:p>
-            <a:pPr algn="ctr"/>
-            <a:r>
-              <a:rPr lang="en-US" sz="1000" b="1">
-                <a:solidFill>
-                  <a:srgbClr val="E74C3C"/>
-                </a:solidFill>
-                <a:latin typeface="Segoe UI"/>
-              </a:rPr>
-              <a:t>NOTE:</a:t>
-            </a:r>
-          </a:p>
-          <a:p>
-            <a:pPr algn="ctr"/>
+            <a:pPr algn="l"/>
+            <a:r>
+              <a:rPr lang="en-US" sz="1050" b="1">
+                <a:solidFill>
+                  <a:srgbClr val="1B2A4A"/>
+                </a:solidFill>
+                <a:latin typeface="Segoe UI"/>
+              </a:rPr>
+              <a:t>IDEAL FOR:</a:t>
+            </a:r>
+          </a:p>
+          <a:p>
+            <a:pPr algn="l"/>
             <a:r>
               <a:rPr lang="en-US" sz="150" b="0">
                 <a:solidFill>
@@ -3535,63 +3524,63 @@
             </a:r>
           </a:p>
           <a:p>
-            <a:pPr algn="ctr"/>
-            <a:r>
-              <a:rPr lang="en-US" sz="900" b="0">
+            <a:pPr algn="l"/>
+            <a:r>
+              <a:rPr lang="en-US" sz="950" b="0">
                 <a:solidFill>
                   <a:srgbClr val="555555"/>
                 </a:solidFill>
                 <a:latin typeface="Segoe UI"/>
               </a:rPr>
-              <a:t>Ad spend is client-funded</a:t>
-            </a:r>
-          </a:p>
-          <a:p>
-            <a:pPr algn="ctr"/>
-            <a:r>
-              <a:rPr lang="en-US" sz="900" b="0">
+              <a:t>Businesses needing basic</a:t>
+            </a:r>
+          </a:p>
+          <a:p>
+            <a:pPr algn="l"/>
+            <a:r>
+              <a:rPr lang="en-US" sz="950" b="0">
                 <a:solidFill>
                   <a:srgbClr val="555555"/>
                 </a:solidFill>
                 <a:latin typeface="Segoe UI"/>
               </a:rPr>
-              <a:t>Website redesign not included</a:t>
-            </a:r>
-          </a:p>
-          <a:p>
-            <a:pPr algn="ctr"/>
-            <a:r>
-              <a:rPr lang="en-US" sz="900" b="0">
+              <a:t>social presence</a:t>
+            </a:r>
+          </a:p>
+          <a:p>
+            <a:pPr algn="l"/>
+            <a:r>
+              <a:rPr lang="en-US" sz="950" b="0">
                 <a:solidFill>
                   <a:srgbClr val="555555"/>
                 </a:solidFill>
                 <a:latin typeface="Segoe UI"/>
               </a:rPr>
-              <a:t>Photography/video shoots extra</a:t>
-            </a:r>
-          </a:p>
-          <a:p>
-            <a:pPr algn="ctr"/>
-            <a:r>
-              <a:rPr lang="en-US" sz="900" b="0">
+              <a:t>Consistent posting without</a:t>
+            </a:r>
+          </a:p>
+          <a:p>
+            <a:pPr algn="l"/>
+            <a:r>
+              <a:rPr lang="en-US" sz="950" b="0">
                 <a:solidFill>
                   <a:srgbClr val="555555"/>
                 </a:solidFill>
                 <a:latin typeface="Segoe UI"/>
               </a:rPr>
-              <a:t>Pricing shown is placeholder -</a:t>
-            </a:r>
-          </a:p>
-          <a:p>
-            <a:pPr algn="ctr"/>
-            <a:r>
-              <a:rPr lang="en-US" sz="900" b="0">
+              <a:t>ad spend commitment</a:t>
+            </a:r>
+          </a:p>
+          <a:p>
+            <a:pPr algn="l"/>
+            <a:r>
+              <a:rPr lang="en-US" sz="950" b="0">
                 <a:solidFill>
                   <a:srgbClr val="555555"/>
                 </a:solidFill>
                 <a:latin typeface="Segoe UI"/>
               </a:rPr>
-              <a:t>customize before presenting</a:t>
+              <a:t>Brand building on a budget</a:t>
             </a:r>
           </a:p>
         </p:txBody>
@@ -3602,6 +3591,552 @@
 </file>
 
 <file path=ppt/slides/slide15.xml><?xml version="1.0" encoding="utf-8"?>
+<p:sld xmlns:a="http://schemas.openxmlformats.org/drawingml/2006/main" xmlns:r="http://schemas.openxmlformats.org/officeDocument/2006/relationships" xmlns:p="http://schemas.openxmlformats.org/presentationml/2006/main">
+  <p:cSld>
+    <p:bg>
+      <p:bgPr>
+        <a:solidFill>
+          <a:srgbClr val="FFFFFF"/>
+        </a:solidFill>
+        <a:effectLst/>
+      </p:bgPr>
+    </p:bg>
+    <p:spTree>
+      <p:nvGrpSpPr>
+        <p:cNvPr id="1" name=""/>
+        <p:cNvGrpSpPr/>
+        <p:nvPr/>
+      </p:nvGrpSpPr>
+      <p:grpSpPr/>
+      <p:sp>
+        <p:nvSpPr>
+          <p:cNvPr id="2" name="h"/>
+          <p:cNvSpPr/>
+          <p:nvPr/>
+        </p:nvSpPr>
+        <p:spPr>
+          <a:xfrm>
+            <a:off x="0" y="0"/>
+            <a:ext cx="12192000" cy="1005840"/>
+          </a:xfrm>
+          <a:prstGeom prst="rect"/>
+          <a:solidFill>
+            <a:srgbClr val="1B2A4A"/>
+          </a:solidFill>
+          <a:ln>
+            <a:noFill/>
+          </a:ln>
+        </p:spPr>
+      </p:sp>
+      <p:sp>
+        <p:nvSpPr>
+          <p:cNvPr id="3" name="ht"/>
+          <p:cNvSpPr txBox="1"/>
+          <p:nvPr/>
+        </p:nvSpPr>
+        <p:spPr>
+          <a:xfrm>
+            <a:off x="457200" y="137160"/>
+            <a:ext cx="9144000" cy="822960"/>
+          </a:xfrm>
+          <a:prstGeom prst="rect"/>
+          <a:noFill/>
+        </p:spPr>
+        <p:txBody>
+          <a:bodyPr wrap="square" anchor="t"/>
+          <a:lstStyle/>
+          <a:p>
+            <a:pPr algn="l">
+              <a:spcBef>
+                <a:spcPts val="0"/>
+              </a:spcBef>
+            </a:pPr>
+            <a:r>
+              <a:rPr lang="en-US" sz="1900" b="1" dirty="0">
+                <a:solidFill>
+                  <a:srgbClr val="FFFFFF"/>
+                </a:solidFill>
+                <a:latin typeface="Segoe UI"/>
+              </a:rPr>
+              <a:t>11 | BUSINESS PLAN - INR 18,000/month</a:t>
+            </a:r>
+          </a:p>
+        </p:txBody>
+      </p:sp>
+      <p:sp>
+        <p:nvSpPr>
+          <p:cNvPr id="4" name="plan"/>
+          <p:cNvSpPr/>
+          <p:nvPr/>
+        </p:nvSpPr>
+        <p:spPr>
+          <a:xfrm>
+            <a:off x="365760" y="1280160"/>
+            <a:ext cx="6583680" cy="5212080"/>
+          </a:xfrm>
+          <a:prstGeom prst="roundRect"/>
+          <a:solidFill>
+            <a:srgbClr val="F4F6F8"/>
+          </a:solidFill>
+          <a:ln>
+            <a:noFill/>
+          </a:ln>
+        </p:spPr>
+        <p:txBody>
+          <a:bodyPr wrap="square" anchor="ctr" lIns="91440" rIns="91440" tIns="45720" bIns="45720"/>
+          <a:lstStyle/>
+          <a:p>
+            <a:pPr algn="l"/>
+            <a:r>
+              <a:rPr lang="en-US" sz="1800" b="1">
+                <a:solidFill>
+                  <a:srgbClr val="1B2A4A"/>
+                </a:solidFill>
+                <a:latin typeface="Segoe UI"/>
+              </a:rPr>
+              <a:t>BUSINESS PLAN</a:t>
+            </a:r>
+          </a:p>
+          <a:p>
+            <a:pPr algn="l"/>
+            <a:r>
+              <a:rPr lang="en-US" sz="1100" b="0">
+                <a:solidFill>
+                  <a:srgbClr val="7F8C8D"/>
+                </a:solidFill>
+                <a:latin typeface="Segoe UI"/>
+              </a:rPr>
+              <a:t>Complete Digital Growth Package</a:t>
+            </a:r>
+          </a:p>
+          <a:p>
+            <a:pPr algn="l"/>
+            <a:r>
+              <a:rPr lang="en-US" sz="250" b="0">
+                <a:solidFill>
+                  <a:srgbClr val="333333"/>
+                </a:solidFill>
+                <a:latin typeface="Segoe UI"/>
+              </a:rPr>
+              <a:t/>
+            </a:r>
+          </a:p>
+          <a:p>
+            <a:pPr algn="l"/>
+            <a:r>
+              <a:rPr lang="en-US" sz="1100" b="1">
+                <a:solidFill>
+                  <a:srgbClr val="C41E3A"/>
+                </a:solidFill>
+                <a:latin typeface="Segoe UI"/>
+              </a:rPr>
+              <a:t>INCLUDED SERVICES:</a:t>
+            </a:r>
+          </a:p>
+          <a:p>
+            <a:pPr algn="l"/>
+            <a:r>
+              <a:rPr lang="en-US" sz="150" b="0">
+                <a:solidFill>
+                  <a:srgbClr val="333333"/>
+                </a:solidFill>
+                <a:latin typeface="Segoe UI"/>
+              </a:rPr>
+              <a:t/>
+            </a:r>
+          </a:p>
+          <a:p>
+            <a:pPr algn="l"/>
+            <a:r>
+              <a:rPr lang="en-US" sz="1050" b="0">
+                <a:solidFill>
+                  <a:srgbClr val="333333"/>
+                </a:solidFill>
+                <a:latin typeface="Segoe UI"/>
+              </a:rPr>
+              <a:t>Monthly Content Calendar [18-20 Posts]</a:t>
+            </a:r>
+          </a:p>
+          <a:p>
+            <a:pPr algn="l"/>
+            <a:r>
+              <a:rPr lang="en-US" sz="950" b="0">
+                <a:solidFill>
+                  <a:srgbClr val="555555"/>
+                </a:solidFill>
+                <a:latin typeface="Segoe UI"/>
+              </a:rPr>
+              <a:t>   2-4 Reels</a:t>
+            </a:r>
+          </a:p>
+          <a:p>
+            <a:pPr algn="l"/>
+            <a:r>
+              <a:rPr lang="en-US" sz="950" b="0">
+                <a:solidFill>
+                  <a:srgbClr val="555555"/>
+                </a:solidFill>
+                <a:latin typeface="Segoe UI"/>
+              </a:rPr>
+              <a:t>   3-5 Carousels</a:t>
+            </a:r>
+          </a:p>
+          <a:p>
+            <a:pPr algn="l"/>
+            <a:r>
+              <a:rPr lang="en-US" sz="950" b="0">
+                <a:solidFill>
+                  <a:srgbClr val="555555"/>
+                </a:solidFill>
+                <a:latin typeface="Segoe UI"/>
+              </a:rPr>
+              <a:t>   9-12 Static Posts</a:t>
+            </a:r>
+          </a:p>
+          <a:p>
+            <a:pPr algn="l"/>
+            <a:r>
+              <a:rPr lang="en-US" sz="100" b="0">
+                <a:solidFill>
+                  <a:srgbClr val="333333"/>
+                </a:solidFill>
+                <a:latin typeface="Segoe UI"/>
+              </a:rPr>
+              <a:t/>
+            </a:r>
+          </a:p>
+          <a:p>
+            <a:pPr algn="l"/>
+            <a:r>
+              <a:rPr lang="en-US" sz="1050" b="1">
+                <a:solidFill>
+                  <a:srgbClr val="2C3E50"/>
+                </a:solidFill>
+                <a:latin typeface="Segoe UI"/>
+              </a:rPr>
+              <a:t>Platforms: Facebook, Instagram, LinkedIn, YouTube</a:t>
+            </a:r>
+          </a:p>
+          <a:p>
+            <a:pPr algn="l"/>
+            <a:r>
+              <a:rPr lang="en-US" sz="100" b="0">
+                <a:solidFill>
+                  <a:srgbClr val="333333"/>
+                </a:solidFill>
+                <a:latin typeface="Segoe UI"/>
+              </a:rPr>
+              <a:t/>
+            </a:r>
+          </a:p>
+          <a:p>
+            <a:pPr algn="l"/>
+            <a:r>
+              <a:rPr lang="en-US" sz="1050" b="0">
+                <a:solidFill>
+                  <a:srgbClr val="333333"/>
+                </a:solidFill>
+                <a:latin typeface="Segoe UI"/>
+              </a:rPr>
+              <a:t>ADs Management Included</a:t>
+            </a:r>
+          </a:p>
+          <a:p>
+            <a:pPr algn="l"/>
+            <a:r>
+              <a:rPr lang="en-US" sz="950" b="0">
+                <a:solidFill>
+                  <a:srgbClr val="555555"/>
+                </a:solidFill>
+                <a:latin typeface="Segoe UI"/>
+              </a:rPr>
+              <a:t>   (Budget up to $300 USD/month)</a:t>
+            </a:r>
+          </a:p>
+          <a:p>
+            <a:pPr algn="l"/>
+            <a:r>
+              <a:rPr lang="en-US" sz="1050" b="0">
+                <a:solidFill>
+                  <a:srgbClr val="333333"/>
+                </a:solidFill>
+                <a:latin typeface="Segoe UI"/>
+              </a:rPr>
+              <a:t>Basic GMB Optimization &amp; Updates</a:t>
+            </a:r>
+          </a:p>
+          <a:p>
+            <a:pPr algn="l"/>
+            <a:r>
+              <a:rPr lang="en-US" sz="1050" b="0">
+                <a:solidFill>
+                  <a:srgbClr val="333333"/>
+                </a:solidFill>
+                <a:latin typeface="Segoe UI"/>
+              </a:rPr>
+              <a:t>Bi-Weekly Strategy Calls</a:t>
+            </a:r>
+          </a:p>
+          <a:p>
+            <a:pPr algn="l"/>
+            <a:r>
+              <a:rPr lang="en-US" sz="1050" b="0">
+                <a:solidFill>
+                  <a:srgbClr val="333333"/>
+                </a:solidFill>
+                <a:latin typeface="Segoe UI"/>
+              </a:rPr>
+              <a:t>Monthly Performance Report</a:t>
+            </a:r>
+          </a:p>
+        </p:txBody>
+      </p:sp>
+      <p:sp>
+        <p:nvSpPr>
+          <p:cNvPr id="5" name="price"/>
+          <p:cNvSpPr/>
+          <p:nvPr/>
+        </p:nvSpPr>
+        <p:spPr>
+          <a:xfrm>
+            <a:off x="7223760" y="1280160"/>
+            <a:ext cx="3383280" cy="2926080"/>
+          </a:xfrm>
+          <a:prstGeom prst="roundRect"/>
+          <a:solidFill>
+            <a:srgbClr val="1B2A4A"/>
+          </a:solidFill>
+          <a:ln>
+            <a:noFill/>
+          </a:ln>
+        </p:spPr>
+        <p:txBody>
+          <a:bodyPr wrap="square" anchor="ctr" lIns="91440" rIns="91440" tIns="45720" bIns="45720"/>
+          <a:lstStyle/>
+          <a:p>
+            <a:pPr algn="l"/>
+            <a:r>
+              <a:rPr lang="en-US" sz="1200" b="1">
+                <a:solidFill>
+                  <a:srgbClr val="C41E3A"/>
+                </a:solidFill>
+                <a:latin typeface="Segoe UI"/>
+              </a:rPr>
+              <a:t>INVESTMENT</a:t>
+            </a:r>
+          </a:p>
+          <a:p>
+            <a:pPr algn="l"/>
+            <a:r>
+              <a:rPr lang="en-US" sz="300" b="0">
+                <a:solidFill>
+                  <a:srgbClr val="FFFFFF"/>
+                </a:solidFill>
+                <a:latin typeface="Segoe UI"/>
+              </a:rPr>
+              <a:t/>
+            </a:r>
+          </a:p>
+          <a:p>
+            <a:pPr algn="l"/>
+            <a:r>
+              <a:rPr lang="en-US" sz="2000" b="1">
+                <a:solidFill>
+                  <a:srgbClr val="FFFFFF"/>
+                </a:solidFill>
+                <a:latin typeface="Segoe UI"/>
+              </a:rPr>
+              <a:t>INR 18,000</a:t>
+            </a:r>
+          </a:p>
+          <a:p>
+            <a:pPr algn="l"/>
+            <a:r>
+              <a:rPr lang="en-US" sz="1200" b="0">
+                <a:solidFill>
+                  <a:srgbClr val="BDC3C7"/>
+                </a:solidFill>
+                <a:latin typeface="Segoe UI"/>
+              </a:rPr>
+              <a:t>/month</a:t>
+            </a:r>
+          </a:p>
+          <a:p>
+            <a:pPr algn="l"/>
+            <a:r>
+              <a:rPr lang="en-US" sz="250" b="0">
+                <a:solidFill>
+                  <a:srgbClr val="FFFFFF"/>
+                </a:solidFill>
+                <a:latin typeface="Segoe UI"/>
+              </a:rPr>
+              <a:t/>
+            </a:r>
+          </a:p>
+          <a:p>
+            <a:pPr algn="l"/>
+            <a:r>
+              <a:rPr lang="en-US" sz="1000" b="0">
+                <a:solidFill>
+                  <a:srgbClr val="BDC3C7"/>
+                </a:solidFill>
+                <a:latin typeface="Segoe UI"/>
+              </a:rPr>
+              <a:t>Ad budget separate:</a:t>
+            </a:r>
+          </a:p>
+          <a:p>
+            <a:pPr algn="l"/>
+            <a:r>
+              <a:rPr lang="en-US" sz="1100" b="1">
+                <a:solidFill>
+                  <a:srgbClr val="FFFFFF"/>
+                </a:solidFill>
+                <a:latin typeface="Segoe UI"/>
+              </a:rPr>
+              <a:t>$300 USD/month</a:t>
+            </a:r>
+          </a:p>
+          <a:p>
+            <a:pPr algn="l"/>
+            <a:r>
+              <a:rPr lang="en-US" sz="900" b="0">
+                <a:solidFill>
+                  <a:srgbClr val="BDC3C7"/>
+                </a:solidFill>
+                <a:latin typeface="Segoe UI"/>
+              </a:rPr>
+              <a:t>(client-funded)</a:t>
+            </a:r>
+          </a:p>
+        </p:txBody>
+      </p:sp>
+      <p:sp>
+        <p:nvSpPr>
+          <p:cNvPr id="6" name="reco"/>
+          <p:cNvSpPr/>
+          <p:nvPr/>
+        </p:nvSpPr>
+        <p:spPr>
+          <a:xfrm>
+            <a:off x="7223760" y="4389120"/>
+            <a:ext cx="3383280" cy="2103120"/>
+          </a:xfrm>
+          <a:prstGeom prst="roundRect"/>
+          <a:solidFill>
+            <a:srgbClr val="C41E3A"/>
+          </a:solidFill>
+          <a:ln>
+            <a:noFill/>
+          </a:ln>
+        </p:spPr>
+        <p:txBody>
+          <a:bodyPr wrap="square" anchor="ctr" lIns="91440" rIns="91440" tIns="45720" bIns="45720"/>
+          <a:lstStyle/>
+          <a:p>
+            <a:pPr algn="l"/>
+            <a:r>
+              <a:rPr lang="en-US" sz="1100" b="1">
+                <a:solidFill>
+                  <a:srgbClr val="FFFFFF"/>
+                </a:solidFill>
+                <a:latin typeface="Segoe UI"/>
+              </a:rPr>
+              <a:t>RECOMMENDED</a:t>
+            </a:r>
+          </a:p>
+          <a:p>
+            <a:pPr algn="l"/>
+            <a:r>
+              <a:rPr lang="en-US" sz="150" b="0">
+                <a:solidFill>
+                  <a:srgbClr val="FFFFFF"/>
+                </a:solidFill>
+                <a:latin typeface="Segoe UI"/>
+              </a:rPr>
+              <a:t/>
+            </a:r>
+          </a:p>
+          <a:p>
+            <a:pPr algn="l"/>
+            <a:r>
+              <a:rPr lang="en-US" sz="950" b="0">
+                <a:solidFill>
+                  <a:srgbClr val="FFFFFF"/>
+                </a:solidFill>
+                <a:latin typeface="Segoe UI"/>
+              </a:rPr>
+              <a:t>Best value for businesses</a:t>
+            </a:r>
+          </a:p>
+          <a:p>
+            <a:pPr algn="l"/>
+            <a:r>
+              <a:rPr lang="en-US" sz="950" b="0">
+                <a:solidFill>
+                  <a:srgbClr val="FFFFFF"/>
+                </a:solidFill>
+                <a:latin typeface="Segoe UI"/>
+              </a:rPr>
+              <a:t>ready to grow aggressively</a:t>
+            </a:r>
+          </a:p>
+          <a:p>
+            <a:pPr algn="l"/>
+            <a:r>
+              <a:rPr lang="en-US" sz="100" b="0">
+                <a:solidFill>
+                  <a:srgbClr val="FFFFFF"/>
+                </a:solidFill>
+                <a:latin typeface="Segoe UI"/>
+              </a:rPr>
+              <a:t/>
+            </a:r>
+          </a:p>
+          <a:p>
+            <a:pPr algn="l"/>
+            <a:r>
+              <a:rPr lang="en-US" sz="950" b="0">
+                <a:solidFill>
+                  <a:srgbClr val="FFFFFF"/>
+                </a:solidFill>
+                <a:latin typeface="Segoe UI"/>
+              </a:rPr>
+              <a:t>Includes ads management</a:t>
+            </a:r>
+          </a:p>
+          <a:p>
+            <a:pPr algn="l"/>
+            <a:r>
+              <a:rPr lang="en-US" sz="950" b="0">
+                <a:solidFill>
+                  <a:srgbClr val="FFFFFF"/>
+                </a:solidFill>
+                <a:latin typeface="Segoe UI"/>
+              </a:rPr>
+              <a:t>Multi-platform presence</a:t>
+            </a:r>
+          </a:p>
+          <a:p>
+            <a:pPr algn="l"/>
+            <a:r>
+              <a:rPr lang="en-US" sz="950" b="0">
+                <a:solidFill>
+                  <a:srgbClr val="FFFFFF"/>
+                </a:solidFill>
+                <a:latin typeface="Segoe UI"/>
+              </a:rPr>
+              <a:t>GMB + Strategy calls</a:t>
+            </a:r>
+          </a:p>
+        </p:txBody>
+      </p:sp>
+    </p:spTree>
+  </p:cSld>
+</p:sld>
+</file>
+
+<file path=ppt/slides/slide16.xml><?xml version="1.0" encoding="utf-8"?>
 <p:sld xmlns:a="http://schemas.openxmlformats.org/drawingml/2006/main" xmlns:r="http://schemas.openxmlformats.org/officeDocument/2006/relationships" xmlns:p="http://schemas.openxmlformats.org/presentationml/2006/main">
   <p:cSld>
     <p:bg>
@@ -3621,18 +4156,18 @@
       <p:grpSpPr/>
       <p:sp>
         <p:nvSpPr>
-          <p:cNvPr id="2" name="top_bar"/>
+          <p:cNvPr id="2" name="top"/>
           <p:cNvSpPr/>
           <p:nvPr/>
         </p:nvSpPr>
         <p:spPr>
           <a:xfrm>
             <a:off x="0" y="0"/>
-            <a:ext cx="12192000" cy="137160"/>
+            <a:ext cx="12192000" cy="109728"/>
           </a:xfrm>
           <a:prstGeom prst="rect"/>
           <a:solidFill>
-            <a:srgbClr val="E74C3C"/>
+            <a:srgbClr val="C41E3A"/>
           </a:solidFill>
           <a:ln>
             <a:noFill/>
@@ -3641,14 +4176,14 @@
       </p:sp>
       <p:sp>
         <p:nvSpPr>
-          <p:cNvPr id="3" name="thanks"/>
+          <p:cNvPr id="3" name="ty"/>
           <p:cNvSpPr txBox="1"/>
           <p:nvPr/>
         </p:nvSpPr>
         <p:spPr>
           <a:xfrm>
-            <a:off x="1828800" y="1828800"/>
-            <a:ext cx="7315200" cy="1828800"/>
+            <a:off x="1828800" y="1645920"/>
+            <a:ext cx="7315200" cy="2011680"/>
           </a:xfrm>
           <a:prstGeom prst="rect"/>
           <a:noFill/>
@@ -3692,14 +4227,14 @@
       </p:sp>
       <p:sp>
         <p:nvSpPr>
-          <p:cNvPr id="4" name="next"/>
+          <p:cNvPr id="4" name="ns"/>
           <p:cNvSpPr/>
           <p:nvPr/>
         </p:nvSpPr>
         <p:spPr>
           <a:xfrm>
-            <a:off x="2743200" y="3840480"/>
-            <a:ext cx="5486400" cy="2286000"/>
+            <a:off x="2743200" y="3657600"/>
+            <a:ext cx="5486400" cy="2560320"/>
           </a:xfrm>
           <a:prstGeom prst="roundRect"/>
           <a:solidFill>
@@ -3710,14 +4245,14 @@
           </a:ln>
         </p:spPr>
         <p:txBody>
-          <a:bodyPr wrap="square" anchor="ctr"/>
+          <a:bodyPr wrap="square" anchor="ctr" lIns="91440" rIns="91440" tIns="45720" bIns="45720"/>
           <a:lstStyle/>
           <a:p>
             <a:pPr algn="ctr"/>
             <a:r>
               <a:rPr lang="en-US" sz="1300" b="1">
                 <a:solidFill>
-                  <a:srgbClr val="E74C3C"/>
+                  <a:srgbClr val="C41E3A"/>
                 </a:solidFill>
                 <a:latin typeface="Segoe UI"/>
               </a:rPr>
@@ -3725,15 +4260,27 @@
             </a:r>
           </a:p>
           <a:p>
+            <a:pPr algn="l"/>
+            <a:r>
+              <a:rPr lang="en-US" sz="200" b="0">
+                <a:solidFill>
+                  <a:srgbClr val="FFFFFF"/>
+                </a:solidFill>
+                <a:latin typeface="Segoe UI"/>
+              </a:rPr>
+              <a:t/>
+            </a:r>
+          </a:p>
+          <a:p>
             <a:pPr algn="ctr"/>
             <a:r>
-              <a:rPr lang="en-US" sz="200" b="0">
-                <a:solidFill>
-                  <a:srgbClr val="FFFFFF"/>
-                </a:solidFill>
-                <a:latin typeface="Segoe UI"/>
-              </a:rPr>
-              <a:t/>
+              <a:rPr lang="en-US" sz="1100" b="0">
+                <a:solidFill>
+                  <a:srgbClr val="FFFFFF"/>
+                </a:solidFill>
+                <a:latin typeface="Segoe UI"/>
+              </a:rPr>
+              <a:t>1. Review this proposal</a:t>
             </a:r>
           </a:p>
           <a:p>
@@ -3745,7 +4292,7 @@
                 </a:solidFill>
                 <a:latin typeface="Segoe UI"/>
               </a:rPr>
-              <a:t>1. Review this proposal</a:t>
+              <a:t>2. Choose your plan (Standard / Business)</a:t>
             </a:r>
           </a:p>
           <a:p>
@@ -3757,7 +4304,7 @@
                 </a:solidFill>
                 <a:latin typeface="Segoe UI"/>
               </a:rPr>
-              <a:t>2. Schedule a strategy call</a:t>
+              <a:t>3. Schedule a strategy call</a:t>
             </a:r>
           </a:p>
           <a:p>
@@ -3769,18 +4316,6 @@
                 </a:solidFill>
                 <a:latin typeface="Segoe UI"/>
               </a:rPr>
-              <a:t>3. Confirm plan &amp; timeline</a:t>
-            </a:r>
-          </a:p>
-          <a:p>
-            <a:pPr algn="ctr"/>
-            <a:r>
-              <a:rPr lang="en-US" sz="1100" b="0">
-                <a:solidFill>
-                  <a:srgbClr val="FFFFFF"/>
-                </a:solidFill>
-                <a:latin typeface="Segoe UI"/>
-              </a:rPr>
               <a:t>4. We start working within 48 hours</a:t>
             </a:r>
           </a:p>
@@ -3788,18 +4323,18 @@
       </p:sp>
       <p:sp>
         <p:nvSpPr>
-          <p:cNvPr id="5" name="bottom_bar"/>
+          <p:cNvPr id="5" name="bot"/>
           <p:cNvSpPr/>
           <p:nvPr/>
         </p:nvSpPr>
         <p:spPr>
           <a:xfrm>
-            <a:off x="0" y="6583680"/>
-            <a:ext cx="12192000" cy="274320"/>
+            <a:off x="0" y="6675120"/>
+            <a:ext cx="12192000" cy="182880"/>
           </a:xfrm>
           <a:prstGeom prst="rect"/>
           <a:solidFill>
-            <a:srgbClr val="E74C3C"/>
+            <a:srgbClr val="C41E3A"/>
           </a:solidFill>
           <a:ln>
             <a:noFill/>
@@ -3831,14 +4366,14 @@
       <p:grpSpPr/>
       <p:sp>
         <p:nvSpPr>
-          <p:cNvPr id="2" name="header_bg"/>
+          <p:cNvPr id="2" name="h"/>
           <p:cNvSpPr/>
           <p:nvPr/>
         </p:nvSpPr>
         <p:spPr>
           <a:xfrm>
             <a:off x="0" y="0"/>
-            <a:ext cx="12192000" cy="1097280"/>
+            <a:ext cx="12192000" cy="1005840"/>
           </a:xfrm>
           <a:prstGeom prst="rect"/>
           <a:solidFill>
@@ -3851,14 +4386,14 @@
       </p:sp>
       <p:sp>
         <p:nvSpPr>
-          <p:cNvPr id="3" name="header"/>
+          <p:cNvPr id="3" name="ht"/>
           <p:cNvSpPr txBox="1"/>
           <p:nvPr/>
         </p:nvSpPr>
         <p:spPr>
           <a:xfrm>
-            <a:off x="457200" y="182880"/>
-            <a:ext cx="7315200" cy="822960"/>
+            <a:off x="457200" y="137160"/>
+            <a:ext cx="8229600" cy="822960"/>
           </a:xfrm>
           <a:prstGeom prst="rect"/>
           <a:noFill/>
@@ -3879,21 +4414,21 @@
                 </a:solidFill>
                 <a:latin typeface="Segoe UI"/>
               </a:rPr>
-              <a:t>AGENDA / TABLE OF CONTENTS</a:t>
+              <a:t>TABLE OF CONTENTS</a:t>
             </a:r>
           </a:p>
         </p:txBody>
       </p:sp>
       <p:sp>
         <p:nvSpPr>
-          <p:cNvPr id="4" name="left_col"/>
+          <p:cNvPr id="4" name="l"/>
           <p:cNvSpPr txBox="1"/>
           <p:nvPr/>
         </p:nvSpPr>
         <p:spPr>
           <a:xfrm>
-            <a:off x="731520" y="1463040"/>
-            <a:ext cx="4572000" cy="4572000"/>
+            <a:off x="640080" y="1280160"/>
+            <a:ext cx="5029200" cy="5029200"/>
           </a:xfrm>
           <a:prstGeom prst="rect"/>
           <a:noFill/>
@@ -3904,11 +4439,11 @@
           <a:p>
             <a:pPr algn="l">
               <a:spcBef>
-                <a:spcPts val="400"/>
+                <a:spcPts val="350"/>
               </a:spcBef>
             </a:pPr>
             <a:r>
-              <a:rPr lang="en-US" sz="1400" b="0" dirty="0">
+              <a:rPr lang="en-US" sz="1350" b="0" dirty="0">
                 <a:solidFill>
                   <a:srgbClr val="2C3E50"/>
                 </a:solidFill>
@@ -3920,11 +4455,11 @@
           <a:p>
             <a:pPr algn="l">
               <a:spcBef>
-                <a:spcPts val="400"/>
+                <a:spcPts val="350"/>
               </a:spcBef>
             </a:pPr>
             <a:r>
-              <a:rPr lang="en-US" sz="1400" b="0" dirty="0">
+              <a:rPr lang="en-US" sz="1350" b="0" dirty="0">
                 <a:solidFill>
                   <a:srgbClr val="2C3E50"/>
                 </a:solidFill>
@@ -3936,11 +4471,11 @@
           <a:p>
             <a:pPr algn="l">
               <a:spcBef>
-                <a:spcPts val="400"/>
+                <a:spcPts val="350"/>
               </a:spcBef>
             </a:pPr>
             <a:r>
-              <a:rPr lang="en-US" sz="1400" b="0" dirty="0">
+              <a:rPr lang="en-US" sz="1350" b="0" dirty="0">
                 <a:solidFill>
                   <a:srgbClr val="2C3E50"/>
                 </a:solidFill>
@@ -3952,11 +4487,11 @@
           <a:p>
             <a:pPr algn="l">
               <a:spcBef>
-                <a:spcPts val="400"/>
+                <a:spcPts val="350"/>
               </a:spcBef>
             </a:pPr>
             <a:r>
-              <a:rPr lang="en-US" sz="1400" b="0" dirty="0">
+              <a:rPr lang="en-US" sz="1350" b="0" dirty="0">
                 <a:solidFill>
                   <a:srgbClr val="2C3E50"/>
                 </a:solidFill>
@@ -3968,11 +4503,11 @@
           <a:p>
             <a:pPr algn="l">
               <a:spcBef>
-                <a:spcPts val="400"/>
+                <a:spcPts val="350"/>
               </a:spcBef>
             </a:pPr>
             <a:r>
-              <a:rPr lang="en-US" sz="1400" b="0" dirty="0">
+              <a:rPr lang="en-US" sz="1350" b="0" dirty="0">
                 <a:solidFill>
                   <a:srgbClr val="2C3E50"/>
                 </a:solidFill>
@@ -3981,18 +4516,34 @@
               <a:t>05  Opportunities &amp; Quick Wins</a:t>
             </a:r>
           </a:p>
+          <a:p>
+            <a:pPr algn="l">
+              <a:spcBef>
+                <a:spcPts val="350"/>
+              </a:spcBef>
+            </a:pPr>
+            <a:r>
+              <a:rPr lang="en-US" sz="1350" b="0" dirty="0">
+                <a:solidFill>
+                  <a:srgbClr val="2C3E50"/>
+                </a:solidFill>
+                <a:latin typeface="Segoe UI"/>
+              </a:rPr>
+              <a:t>06  Content Plan (Month 1-3)</a:t>
+            </a:r>
+          </a:p>
         </p:txBody>
       </p:sp>
       <p:sp>
         <p:nvSpPr>
-          <p:cNvPr id="5" name="right_col"/>
+          <p:cNvPr id="5" name="r"/>
           <p:cNvSpPr txBox="1"/>
           <p:nvPr/>
         </p:nvSpPr>
         <p:spPr>
           <a:xfrm>
-            <a:off x="5669280" y="1463040"/>
-            <a:ext cx="4572000" cy="4572000"/>
+            <a:off x="5760720" y="1280160"/>
+            <a:ext cx="5029200" cy="5029200"/>
           </a:xfrm>
           <a:prstGeom prst="rect"/>
           <a:noFill/>
@@ -4003,99 +4554,99 @@
           <a:p>
             <a:pPr algn="l">
               <a:spcBef>
-                <a:spcPts val="400"/>
+                <a:spcPts val="350"/>
               </a:spcBef>
             </a:pPr>
             <a:r>
-              <a:rPr lang="en-US" sz="1400" b="0" dirty="0">
+              <a:rPr lang="en-US" sz="1350" b="0" dirty="0">
                 <a:solidFill>
                   <a:srgbClr val="2C3E50"/>
                 </a:solidFill>
                 <a:latin typeface="Segoe UI"/>
               </a:rPr>
-              <a:t>06  3-Month Content Plan</a:t>
+              <a:t>07  Ads Strategy ($300/mo Breakdown)</a:t>
             </a:r>
           </a:p>
           <a:p>
             <a:pPr algn="l">
               <a:spcBef>
-                <a:spcPts val="400"/>
+                <a:spcPts val="350"/>
               </a:spcBef>
             </a:pPr>
             <a:r>
-              <a:rPr lang="en-US" sz="1400" b="0" dirty="0">
+              <a:rPr lang="en-US" sz="1350" b="0" dirty="0">
                 <a:solidFill>
                   <a:srgbClr val="2C3E50"/>
                 </a:solidFill>
                 <a:latin typeface="Segoe UI"/>
               </a:rPr>
-              <a:t>07  Ads Strategy (Engagement &amp; Growth)</a:t>
+              <a:t>08  Month-by-Month Roadmap</a:t>
             </a:r>
           </a:p>
           <a:p>
             <a:pPr algn="l">
               <a:spcBef>
-                <a:spcPts val="400"/>
+                <a:spcPts val="350"/>
               </a:spcBef>
             </a:pPr>
             <a:r>
-              <a:rPr lang="en-US" sz="1400" b="0" dirty="0">
+              <a:rPr lang="en-US" sz="1350" b="0" dirty="0">
                 <a:solidFill>
                   <a:srgbClr val="2C3E50"/>
                 </a:solidFill>
                 <a:latin typeface="Segoe UI"/>
               </a:rPr>
-              <a:t>08  Month-by-Month Roadmap</a:t>
+              <a:t>09  KPIs &amp; Success Metrics</a:t>
             </a:r>
           </a:p>
           <a:p>
             <a:pPr algn="l">
               <a:spcBef>
-                <a:spcPts val="400"/>
+                <a:spcPts val="350"/>
               </a:spcBef>
             </a:pPr>
             <a:r>
-              <a:rPr lang="en-US" sz="1400" b="0" dirty="0">
+              <a:rPr lang="en-US" sz="1350" b="0" dirty="0">
                 <a:solidFill>
                   <a:srgbClr val="2C3E50"/>
                 </a:solidFill>
                 <a:latin typeface="Segoe UI"/>
               </a:rPr>
-              <a:t>09  KPIs &amp; Success Metrics</a:t>
+              <a:t>10  Standard Plan (INR 10K)</a:t>
             </a:r>
           </a:p>
           <a:p>
             <a:pPr algn="l">
               <a:spcBef>
-                <a:spcPts val="400"/>
+                <a:spcPts val="350"/>
               </a:spcBef>
             </a:pPr>
             <a:r>
-              <a:rPr lang="en-US" sz="1400" b="0" dirty="0">
+              <a:rPr lang="en-US" sz="1350" b="0" dirty="0">
                 <a:solidFill>
                   <a:srgbClr val="2C3E50"/>
                 </a:solidFill>
                 <a:latin typeface="Segoe UI"/>
               </a:rPr>
-              <a:t>10  Standard Plan Proposal</a:t>
+              <a:t>11  Business Plan (INR 18K)</a:t>
             </a:r>
           </a:p>
         </p:txBody>
       </p:sp>
       <p:sp>
         <p:nvSpPr>
-          <p:cNvPr id="6" name="accent"/>
+          <p:cNvPr id="6" name="acc"/>
           <p:cNvSpPr/>
           <p:nvPr/>
         </p:nvSpPr>
         <p:spPr>
           <a:xfrm>
-            <a:off x="731520" y="1280160"/>
-            <a:ext cx="1828800" cy="36576"/>
+            <a:off x="640080" y="1143000"/>
+            <a:ext cx="1645920" cy="36576"/>
           </a:xfrm>
           <a:prstGeom prst="rect"/>
           <a:solidFill>
-            <a:srgbClr val="E74C3C"/>
+            <a:srgbClr val="C41E3A"/>
           </a:solidFill>
           <a:ln>
             <a:noFill/>
@@ -4127,14 +4678,14 @@
       <p:grpSpPr/>
       <p:sp>
         <p:nvSpPr>
-          <p:cNvPr id="2" name="header_bg"/>
+          <p:cNvPr id="2" name="h"/>
           <p:cNvSpPr/>
           <p:nvPr/>
         </p:nvSpPr>
         <p:spPr>
           <a:xfrm>
             <a:off x="0" y="0"/>
-            <a:ext cx="12192000" cy="1097280"/>
+            <a:ext cx="12192000" cy="1005840"/>
           </a:xfrm>
           <a:prstGeom prst="rect"/>
           <a:solidFill>
@@ -4147,13 +4698,13 @@
       </p:sp>
       <p:sp>
         <p:nvSpPr>
-          <p:cNvPr id="3" name="header"/>
+          <p:cNvPr id="3" name="ht"/>
           <p:cNvSpPr txBox="1"/>
           <p:nvPr/>
         </p:nvSpPr>
         <p:spPr>
           <a:xfrm>
-            <a:off x="457200" y="182880"/>
+            <a:off x="457200" y="137160"/>
             <a:ext cx="9144000" cy="822960"/>
           </a:xfrm>
           <a:prstGeom prst="rect"/>
@@ -4169,7 +4720,7 @@
               </a:spcBef>
             </a:pPr>
             <a:r>
-              <a:rPr lang="en-US" sz="2000" b="1" dirty="0">
+              <a:rPr lang="en-US" sz="1900" b="1" dirty="0">
                 <a:solidFill>
                   <a:srgbClr val="FFFFFF"/>
                 </a:solidFill>
@@ -4182,28 +4733,28 @@
       </p:sp>
       <p:sp>
         <p:nvSpPr>
-          <p:cNvPr id="4" name="brand_box"/>
+          <p:cNvPr id="4" name="info"/>
           <p:cNvSpPr/>
           <p:nvPr/>
         </p:nvSpPr>
         <p:spPr>
           <a:xfrm>
-            <a:off x="457200" y="1371600"/>
-            <a:ext cx="5029200" cy="5029200"/>
+            <a:off x="365760" y="1280160"/>
+            <a:ext cx="5120640" cy="5212080"/>
           </a:xfrm>
           <a:prstGeom prst="roundRect"/>
           <a:solidFill>
-            <a:srgbClr val="F0F4F8"/>
+            <a:srgbClr val="F4F6F8"/>
           </a:solidFill>
           <a:ln>
             <a:noFill/>
           </a:ln>
         </p:spPr>
         <p:txBody>
-          <a:bodyPr wrap="square" anchor="ctr"/>
+          <a:bodyPr wrap="square" anchor="ctr" lIns="91440" rIns="91440" tIns="45720" bIns="45720"/>
           <a:lstStyle/>
           <a:p>
-            <a:pPr algn="ctr"/>
+            <a:pPr algn="l"/>
             <a:r>
               <a:rPr lang="en-US" sz="1400" b="1">
                 <a:solidFill>
@@ -4215,9 +4766,9 @@
             </a:r>
           </a:p>
           <a:p>
-            <a:pPr algn="ctr"/>
-            <a:r>
-              <a:rPr lang="en-US" sz="400" b="0">
+            <a:pPr algn="l"/>
+            <a:r>
+              <a:rPr lang="en-US" sz="350" b="0">
                 <a:solidFill>
                   <a:srgbClr val="1B2A4A"/>
                 </a:solidFill>
@@ -4227,9 +4778,9 @@
             </a:r>
           </a:p>
           <a:p>
-            <a:pPr algn="ctr"/>
-            <a:r>
-              <a:rPr lang="en-US" sz="1100" b="0">
+            <a:pPr algn="l"/>
+            <a:r>
+              <a:rPr lang="en-US" sz="1050" b="0">
                 <a:solidFill>
                   <a:srgbClr val="2C3E50"/>
                 </a:solidFill>
@@ -4239,9 +4790,9 @@
             </a:r>
           </a:p>
           <a:p>
-            <a:pPr algn="ctr"/>
-            <a:r>
-              <a:rPr lang="en-US" sz="400" b="0">
+            <a:pPr algn="l"/>
+            <a:r>
+              <a:rPr lang="en-US" sz="350" b="0">
                 <a:solidFill>
                   <a:srgbClr val="1B2A4A"/>
                 </a:solidFill>
@@ -4251,7 +4802,7 @@
             </a:r>
           </a:p>
           <a:p>
-            <a:pPr algn="ctr"/>
+            <a:pPr algn="l"/>
             <a:r>
               <a:rPr lang="en-US" sz="1000" b="0">
                 <a:solidFill>
@@ -4263,7 +4814,7 @@
             </a:r>
           </a:p>
           <a:p>
-            <a:pPr algn="ctr"/>
+            <a:pPr algn="l"/>
             <a:r>
               <a:rPr lang="en-US" sz="1000" b="0">
                 <a:solidFill>
@@ -4275,7 +4826,7 @@
             </a:r>
           </a:p>
           <a:p>
-            <a:pPr algn="ctr"/>
+            <a:pPr algn="l"/>
             <a:r>
               <a:rPr lang="en-US" sz="1000" b="0">
                 <a:solidFill>
@@ -4287,7 +4838,7 @@
             </a:r>
           </a:p>
           <a:p>
-            <a:pPr algn="ctr"/>
+            <a:pPr algn="l"/>
             <a:r>
               <a:rPr lang="en-US" sz="1000" b="0">
                 <a:solidFill>
@@ -4299,9 +4850,9 @@
             </a:r>
           </a:p>
           <a:p>
-            <a:pPr algn="ctr"/>
-            <a:r>
-              <a:rPr lang="en-US" sz="400" b="0">
+            <a:pPr algn="l"/>
+            <a:r>
+              <a:rPr lang="en-US" sz="350" b="0">
                 <a:solidFill>
                   <a:srgbClr val="1B2A4A"/>
                 </a:solidFill>
@@ -4311,7 +4862,7 @@
             </a:r>
           </a:p>
           <a:p>
-            <a:pPr algn="ctr"/>
+            <a:pPr algn="l"/>
             <a:r>
               <a:rPr lang="en-US" sz="1000" b="1">
                 <a:solidFill>
@@ -4323,7 +4874,7 @@
             </a:r>
           </a:p>
           <a:p>
-            <a:pPr algn="ctr"/>
+            <a:pPr algn="l"/>
             <a:r>
               <a:rPr lang="en-US" sz="1000" b="0">
                 <a:solidFill>
@@ -4335,7 +4886,7 @@
             </a:r>
           </a:p>
           <a:p>
-            <a:pPr algn="ctr"/>
+            <a:pPr algn="l"/>
             <a:r>
               <a:rPr lang="en-US" sz="1000" b="0">
                 <a:solidFill>
@@ -4347,7 +4898,7 @@
             </a:r>
           </a:p>
           <a:p>
-            <a:pPr algn="ctr"/>
+            <a:pPr algn="l"/>
             <a:r>
               <a:rPr lang="en-US" sz="1000" b="0">
                 <a:solidFill>
@@ -4359,7 +4910,7 @@
             </a:r>
           </a:p>
           <a:p>
-            <a:pPr algn="ctr"/>
+            <a:pPr algn="l"/>
             <a:r>
               <a:rPr lang="en-US" sz="1000" b="0">
                 <a:solidFill>
@@ -4374,28 +4925,28 @@
       </p:sp>
       <p:sp>
         <p:nvSpPr>
-          <p:cNvPr id="5" name="strengths"/>
+          <p:cNvPr id="5" name="str"/>
           <p:cNvSpPr/>
           <p:nvPr/>
         </p:nvSpPr>
         <p:spPr>
           <a:xfrm>
-            <a:off x="5760720" y="1371600"/>
-            <a:ext cx="4846320" cy="2286000"/>
+            <a:off x="5669280" y="1280160"/>
+            <a:ext cx="4937760" cy="2377440"/>
           </a:xfrm>
           <a:prstGeom prst="roundRect"/>
           <a:solidFill>
-            <a:srgbClr val="2ECC71"/>
+            <a:srgbClr val="1D6B3F"/>
           </a:solidFill>
           <a:ln>
             <a:noFill/>
           </a:ln>
         </p:spPr>
         <p:txBody>
-          <a:bodyPr wrap="square" anchor="ctr"/>
+          <a:bodyPr wrap="square" anchor="ctr" lIns="91440" rIns="91440" tIns="45720" bIns="45720"/>
           <a:lstStyle/>
           <a:p>
-            <a:pPr algn="ctr"/>
+            <a:pPr algn="l"/>
             <a:r>
               <a:rPr lang="en-US" sz="1200" b="1">
                 <a:solidFill>
@@ -4407,7 +4958,7 @@
             </a:r>
           </a:p>
           <a:p>
-            <a:pPr algn="ctr"/>
+            <a:pPr algn="l"/>
             <a:r>
               <a:rPr lang="en-US" sz="1000" b="0">
                 <a:solidFill>
@@ -4419,7 +4970,7 @@
             </a:r>
           </a:p>
           <a:p>
-            <a:pPr algn="ctr"/>
+            <a:pPr algn="l"/>
             <a:r>
               <a:rPr lang="en-US" sz="1000" b="0">
                 <a:solidFill>
@@ -4431,67 +4982,67 @@
             </a:r>
           </a:p>
           <a:p>
-            <a:pPr algn="ctr"/>
-            <a:r>
-              <a:rPr lang="en-US" sz="1000" b="0">
-                <a:solidFill>
-                  <a:srgbClr val="FFFFFF"/>
-                </a:solidFill>
-                <a:latin typeface="Segoe UI"/>
-              </a:rPr>
-              <a:t>BBB A+ rated - high trust</a:t>
-            </a:r>
-          </a:p>
-          <a:p>
-            <a:pPr algn="ctr"/>
-            <a:r>
-              <a:rPr lang="en-US" sz="1000" b="0">
-                <a:solidFill>
-                  <a:srgbClr val="FFFFFF"/>
-                </a:solidFill>
-                <a:latin typeface="Segoe UI"/>
-              </a:rPr>
-              <a:t>Climate-specific expertise</a:t>
-            </a:r>
-          </a:p>
-          <a:p>
-            <a:pPr algn="ctr"/>
-            <a:r>
-              <a:rPr lang="en-US" sz="1000" b="0">
-                <a:solidFill>
-                  <a:srgbClr val="FFFFFF"/>
-                </a:solidFill>
-                <a:latin typeface="Segoe UI"/>
-              </a:rPr>
-              <a:t>Competitive pricing</a:t>
+            <a:pPr algn="l"/>
+            <a:r>
+              <a:rPr lang="en-US" sz="1000" b="0">
+                <a:solidFill>
+                  <a:srgbClr val="FFFFFF"/>
+                </a:solidFill>
+                <a:latin typeface="Segoe UI"/>
+              </a:rPr>
+              <a:t>BBB A+ rated - high trust signal</a:t>
+            </a:r>
+          </a:p>
+          <a:p>
+            <a:pPr algn="l"/>
+            <a:r>
+              <a:rPr lang="en-US" sz="1000" b="0">
+                <a:solidFill>
+                  <a:srgbClr val="FFFFFF"/>
+                </a:solidFill>
+                <a:latin typeface="Segoe UI"/>
+              </a:rPr>
+              <a:t>Climate-specific engineering</a:t>
+            </a:r>
+          </a:p>
+          <a:p>
+            <a:pPr algn="l"/>
+            <a:r>
+              <a:rPr lang="en-US" sz="1000" b="0">
+                <a:solidFill>
+                  <a:srgbClr val="FFFFFF"/>
+                </a:solidFill>
+                <a:latin typeface="Segoe UI"/>
+              </a:rPr>
+              <a:t>Competitive pricing vs. national brands</a:t>
             </a:r>
           </a:p>
         </p:txBody>
       </p:sp>
       <p:sp>
         <p:nvSpPr>
-          <p:cNvPr id="6" name="challenges"/>
+          <p:cNvPr id="6" name="ch"/>
           <p:cNvSpPr/>
           <p:nvPr/>
         </p:nvSpPr>
         <p:spPr>
           <a:xfrm>
-            <a:off x="5760720" y="3931920"/>
-            <a:ext cx="4846320" cy="2468880"/>
+            <a:off x="5669280" y="3840480"/>
+            <a:ext cx="4937760" cy="2651760"/>
           </a:xfrm>
           <a:prstGeom prst="roundRect"/>
           <a:solidFill>
-            <a:srgbClr val="E74C3C"/>
+            <a:srgbClr val="C41E3A"/>
           </a:solidFill>
           <a:ln>
             <a:noFill/>
           </a:ln>
         </p:spPr>
         <p:txBody>
-          <a:bodyPr wrap="square" anchor="ctr"/>
+          <a:bodyPr wrap="square" anchor="ctr" lIns="91440" rIns="91440" tIns="45720" bIns="45720"/>
           <a:lstStyle/>
           <a:p>
-            <a:pPr algn="ctr"/>
+            <a:pPr algn="l"/>
             <a:r>
               <a:rPr lang="en-US" sz="1200" b="1">
                 <a:solidFill>
@@ -4503,7 +5054,7 @@
             </a:r>
           </a:p>
           <a:p>
-            <a:pPr algn="ctr"/>
+            <a:pPr algn="l"/>
             <a:r>
               <a:rPr lang="en-US" sz="1000" b="0">
                 <a:solidFill>
@@ -4515,7 +5066,7 @@
             </a:r>
           </a:p>
           <a:p>
-            <a:pPr algn="ctr"/>
+            <a:pPr algn="l"/>
             <a:r>
               <a:rPr lang="en-US" sz="1000" b="0">
                 <a:solidFill>
@@ -4527,7 +5078,7 @@
             </a:r>
           </a:p>
           <a:p>
-            <a:pPr algn="ctr"/>
+            <a:pPr algn="l"/>
             <a:r>
               <a:rPr lang="en-US" sz="1000" b="0">
                 <a:solidFill>
@@ -4539,7 +5090,7 @@
             </a:r>
           </a:p>
           <a:p>
-            <a:pPr algn="ctr"/>
+            <a:pPr algn="l"/>
             <a:r>
               <a:rPr lang="en-US" sz="1000" b="0">
                 <a:solidFill>
@@ -4551,7 +5102,7 @@
             </a:r>
           </a:p>
           <a:p>
-            <a:pPr algn="ctr"/>
+            <a:pPr algn="l"/>
             <a:r>
               <a:rPr lang="en-US" sz="1000" b="0">
                 <a:solidFill>
@@ -4560,6 +5111,18 @@
                 <a:latin typeface="Segoe UI"/>
               </a:rPr>
               <a:t>Minimal Google reviews strategy</a:t>
+            </a:r>
+          </a:p>
+          <a:p>
+            <a:pPr algn="l"/>
+            <a:r>
+              <a:rPr lang="en-US" sz="1000" b="0">
+                <a:solidFill>
+                  <a:srgbClr val="FFFFFF"/>
+                </a:solidFill>
+                <a:latin typeface="Segoe UI"/>
+              </a:rPr>
+              <a:t>No paid ads running currently</a:t>
             </a:r>
           </a:p>
         </p:txBody>
@@ -4589,14 +5152,14 @@
       <p:grpSpPr/>
       <p:sp>
         <p:nvSpPr>
-          <p:cNvPr id="2" name="header_bg"/>
+          <p:cNvPr id="2" name="h"/>
           <p:cNvSpPr/>
           <p:nvPr/>
         </p:nvSpPr>
         <p:spPr>
           <a:xfrm>
             <a:off x="0" y="0"/>
-            <a:ext cx="12192000" cy="1097280"/>
+            <a:ext cx="12192000" cy="1005840"/>
           </a:xfrm>
           <a:prstGeom prst="rect"/>
           <a:solidFill>
@@ -4609,13 +5172,13 @@
       </p:sp>
       <p:sp>
         <p:nvSpPr>
-          <p:cNvPr id="3" name="header"/>
+          <p:cNvPr id="3" name="ht"/>
           <p:cNvSpPr txBox="1"/>
           <p:nvPr/>
         </p:nvSpPr>
         <p:spPr>
           <a:xfrm>
-            <a:off x="457200" y="182880"/>
+            <a:off x="457200" y="137160"/>
             <a:ext cx="9144000" cy="822960"/>
           </a:xfrm>
           <a:prstGeom prst="rect"/>
@@ -4631,7 +5194,7 @@
               </a:spcBef>
             </a:pPr>
             <a:r>
-              <a:rPr lang="en-US" sz="2000" b="1" dirty="0">
+              <a:rPr lang="en-US" sz="1900" b="1" dirty="0">
                 <a:solidFill>
                   <a:srgbClr val="FFFFFF"/>
                 </a:solidFill>
@@ -4644,14 +5207,14 @@
       </p:sp>
       <p:sp>
         <p:nvSpPr>
-          <p:cNvPr id="4" name="issues_title"/>
+          <p:cNvPr id="4" name="it"/>
           <p:cNvSpPr txBox="1"/>
           <p:nvPr/>
         </p:nvSpPr>
         <p:spPr>
           <a:xfrm>
-            <a:off x="457200" y="1280160"/>
-            <a:ext cx="5029200" cy="457200"/>
+            <a:off x="457200" y="1188720"/>
+            <a:ext cx="5029200" cy="365760"/>
           </a:xfrm>
           <a:prstGeom prst="rect"/>
           <a:noFill/>
@@ -4666,9 +5229,9 @@
               </a:spcBef>
             </a:pPr>
             <a:r>
-              <a:rPr lang="en-US" sz="1300" b="1" dirty="0">
-                <a:solidFill>
-                  <a:srgbClr val="E74C3C"/>
+              <a:rPr lang="en-US" sz="1250" b="1" dirty="0">
+                <a:solidFill>
+                  <a:srgbClr val="C41E3A"/>
                 </a:solidFill>
                 <a:latin typeface="Segoe UI"/>
               </a:rPr>
@@ -4679,14 +5242,14 @@
       </p:sp>
       <p:sp>
         <p:nvSpPr>
-          <p:cNvPr id="5" name="issues"/>
+          <p:cNvPr id="5" name="iss"/>
           <p:cNvSpPr txBox="1"/>
           <p:nvPr/>
         </p:nvSpPr>
         <p:spPr>
           <a:xfrm>
-            <a:off x="457200" y="1737360"/>
-            <a:ext cx="5029200" cy="4572000"/>
+            <a:off x="457200" y="1645920"/>
+            <a:ext cx="5029200" cy="4754880"/>
           </a:xfrm>
           <a:prstGeom prst="rect"/>
           <a:noFill/>
@@ -4699,17 +5262,17 @@
               <a:buFont typeface="Arial"/>
               <a:buChar char="•"/>
               <a:spcBef>
-                <a:spcPts val="200"/>
+                <a:spcPts val="180"/>
               </a:spcBef>
             </a:pPr>
             <a:r>
-              <a:rPr lang="en-US" sz="1050" b="0" dirty="0">
+              <a:rPr lang="en-US" sz="1000" b="0" dirty="0">
                 <a:solidFill>
                   <a:srgbClr val="333333"/>
                 </a:solidFill>
                 <a:latin typeface="Segoe UI"/>
               </a:rPr>
-              <a:t>Missing or weak meta titles &amp; descriptions on key pages</a:t>
+              <a:t>Missing/weak meta titles &amp; descriptions</a:t>
             </a:r>
           </a:p>
           <a:p>
@@ -4717,17 +5280,17 @@
               <a:buFont typeface="Arial"/>
               <a:buChar char="•"/>
               <a:spcBef>
-                <a:spcPts val="200"/>
+                <a:spcPts val="180"/>
               </a:spcBef>
             </a:pPr>
             <a:r>
-              <a:rPr lang="en-US" sz="1050" b="0" dirty="0">
+              <a:rPr lang="en-US" sz="1000" b="0" dirty="0">
                 <a:solidFill>
                   <a:srgbClr val="333333"/>
                 </a:solidFill>
                 <a:latin typeface="Segoe UI"/>
               </a:rPr>
-              <a:t>No active blog / content hub for SEO ranking</a:t>
+              <a:t>No active blog or content hub for SEO</a:t>
             </a:r>
           </a:p>
           <a:p>
@@ -4735,17 +5298,17 @@
               <a:buFont typeface="Arial"/>
               <a:buChar char="•"/>
               <a:spcBef>
-                <a:spcPts val="200"/>
+                <a:spcPts val="180"/>
               </a:spcBef>
             </a:pPr>
             <a:r>
-              <a:rPr lang="en-US" sz="1050" b="0" dirty="0">
+              <a:rPr lang="en-US" sz="1000" b="0" dirty="0">
                 <a:solidFill>
                   <a:srgbClr val="333333"/>
                 </a:solidFill>
                 <a:latin typeface="Segoe UI"/>
               </a:rPr>
-              <a:t>Lack of location-specific landing pages (Calgary areas)</a:t>
+              <a:t>No location-specific landing pages</a:t>
             </a:r>
           </a:p>
           <a:p>
@@ -4753,17 +5316,17 @@
               <a:buFont typeface="Arial"/>
               <a:buChar char="•"/>
               <a:spcBef>
-                <a:spcPts val="200"/>
+                <a:spcPts val="180"/>
               </a:spcBef>
             </a:pPr>
             <a:r>
-              <a:rPr lang="en-US" sz="1050" b="0" dirty="0">
+              <a:rPr lang="en-US" sz="1000" b="0" dirty="0">
                 <a:solidFill>
                   <a:srgbClr val="333333"/>
                 </a:solidFill>
                 <a:latin typeface="Segoe UI"/>
               </a:rPr>
-              <a:t>Page speed optimization needed (images, caching)</a:t>
+              <a:t>Page speed optimization needed</a:t>
             </a:r>
           </a:p>
           <a:p>
@@ -4771,17 +5334,17 @@
               <a:buFont typeface="Arial"/>
               <a:buChar char="•"/>
               <a:spcBef>
-                <a:spcPts val="200"/>
+                <a:spcPts val="180"/>
               </a:spcBef>
             </a:pPr>
             <a:r>
-              <a:rPr lang="en-US" sz="1050" b="0" dirty="0">
+              <a:rPr lang="en-US" sz="1000" b="0" dirty="0">
                 <a:solidFill>
                   <a:srgbClr val="333333"/>
                 </a:solidFill>
                 <a:latin typeface="Segoe UI"/>
               </a:rPr>
-              <a:t>Missing schema markup (LocalBusiness, Product)</a:t>
+              <a:t>Missing schema markup (LocalBusiness)</a:t>
             </a:r>
           </a:p>
           <a:p>
@@ -4789,11 +5352,11 @@
               <a:buFont typeface="Arial"/>
               <a:buChar char="•"/>
               <a:spcBef>
-                <a:spcPts val="200"/>
+                <a:spcPts val="180"/>
               </a:spcBef>
             </a:pPr>
             <a:r>
-              <a:rPr lang="en-US" sz="1050" b="0" dirty="0">
+              <a:rPr lang="en-US" sz="1000" b="0" dirty="0">
                 <a:solidFill>
                   <a:srgbClr val="333333"/>
                 </a:solidFill>
@@ -4807,11 +5370,11 @@
               <a:buFont typeface="Arial"/>
               <a:buChar char="•"/>
               <a:spcBef>
-                <a:spcPts val="200"/>
+                <a:spcPts val="180"/>
               </a:spcBef>
             </a:pPr>
             <a:r>
-              <a:rPr lang="en-US" sz="1050" b="0" dirty="0">
+              <a:rPr lang="en-US" sz="1000" b="0" dirty="0">
                 <a:solidFill>
                   <a:srgbClr val="333333"/>
                 </a:solidFill>
@@ -4825,45 +5388,45 @@
               <a:buFont typeface="Arial"/>
               <a:buChar char="•"/>
               <a:spcBef>
-                <a:spcPts val="200"/>
+                <a:spcPts val="180"/>
               </a:spcBef>
             </a:pPr>
             <a:r>
-              <a:rPr lang="en-US" sz="1050" b="0" dirty="0">
+              <a:rPr lang="en-US" sz="1000" b="0" dirty="0">
                 <a:solidFill>
                   <a:srgbClr val="333333"/>
                 </a:solidFill>
                 <a:latin typeface="Segoe UI"/>
               </a:rPr>
-              <a:t>GMB profile needs optimization &amp; regular posts</a:t>
+              <a:t>GMB profile needs optimization &amp; posts</a:t>
             </a:r>
           </a:p>
         </p:txBody>
       </p:sp>
       <p:sp>
         <p:nvSpPr>
-          <p:cNvPr id="6" name="reco_box"/>
+          <p:cNvPr id="6" name="reco"/>
           <p:cNvSpPr/>
           <p:nvPr/>
         </p:nvSpPr>
         <p:spPr>
           <a:xfrm>
-            <a:off x="5760720" y="1280160"/>
-            <a:ext cx="4846320" cy="5029200"/>
+            <a:off x="5669280" y="1188720"/>
+            <a:ext cx="4937760" cy="5303520"/>
           </a:xfrm>
           <a:prstGeom prst="roundRect"/>
           <a:solidFill>
-            <a:srgbClr val="F0F4F8"/>
+            <a:srgbClr val="F4F6F8"/>
           </a:solidFill>
           <a:ln>
             <a:noFill/>
           </a:ln>
         </p:spPr>
         <p:txBody>
-          <a:bodyPr wrap="square" anchor="ctr"/>
+          <a:bodyPr wrap="square" anchor="ctr" lIns="91440" rIns="91440" tIns="45720" bIns="45720"/>
           <a:lstStyle/>
           <a:p>
-            <a:pPr algn="ctr"/>
+            <a:pPr algn="l"/>
             <a:r>
               <a:rPr lang="en-US" sz="1200" b="1">
                 <a:solidFill>
@@ -4875,7 +5438,103 @@
             </a:r>
           </a:p>
           <a:p>
-            <a:pPr algn="ctr"/>
+            <a:pPr algn="l"/>
+            <a:r>
+              <a:rPr lang="en-US" sz="250" b="0">
+                <a:solidFill>
+                  <a:srgbClr val="1B2A4A"/>
+                </a:solidFill>
+                <a:latin typeface="Segoe UI"/>
+              </a:rPr>
+              <a:t/>
+            </a:r>
+          </a:p>
+          <a:p>
+            <a:pPr algn="l"/>
+            <a:r>
+              <a:rPr lang="en-US" sz="1000" b="0">
+                <a:solidFill>
+                  <a:srgbClr val="333333"/>
+                </a:solidFill>
+                <a:latin typeface="Segoe UI"/>
+              </a:rPr>
+              <a:t>1. Optimize all page titles &amp; metas</a:t>
+            </a:r>
+          </a:p>
+          <a:p>
+            <a:pPr algn="l"/>
+            <a:r>
+              <a:rPr lang="en-US" sz="1000" b="0">
+                <a:solidFill>
+                  <a:srgbClr val="333333"/>
+                </a:solidFill>
+                <a:latin typeface="Segoe UI"/>
+              </a:rPr>
+              <a:t>2. Add LocalBusiness schema markup</a:t>
+            </a:r>
+          </a:p>
+          <a:p>
+            <a:pPr algn="l"/>
+            <a:r>
+              <a:rPr lang="en-US" sz="1000" b="0">
+                <a:solidFill>
+                  <a:srgbClr val="333333"/>
+                </a:solidFill>
+                <a:latin typeface="Segoe UI"/>
+              </a:rPr>
+              <a:t>3. Create Calgary neighbourhood pages</a:t>
+            </a:r>
+          </a:p>
+          <a:p>
+            <a:pPr algn="l"/>
+            <a:r>
+              <a:rPr lang="en-US" sz="1000" b="0">
+                <a:solidFill>
+                  <a:srgbClr val="333333"/>
+                </a:solidFill>
+                <a:latin typeface="Segoe UI"/>
+              </a:rPr>
+              <a:t>4. Launch blog (2 posts/month)</a:t>
+            </a:r>
+          </a:p>
+          <a:p>
+            <a:pPr algn="l"/>
+            <a:r>
+              <a:rPr lang="en-US" sz="1000" b="0">
+                <a:solidFill>
+                  <a:srgbClr val="333333"/>
+                </a:solidFill>
+                <a:latin typeface="Segoe UI"/>
+              </a:rPr>
+              <a:t>5. Compress images &amp; enable caching</a:t>
+            </a:r>
+          </a:p>
+          <a:p>
+            <a:pPr algn="l"/>
+            <a:r>
+              <a:rPr lang="en-US" sz="1000" b="0">
+                <a:solidFill>
+                  <a:srgbClr val="333333"/>
+                </a:solidFill>
+                <a:latin typeface="Segoe UI"/>
+              </a:rPr>
+              <a:t>6. Add testimonials page</a:t>
+            </a:r>
+          </a:p>
+          <a:p>
+            <a:pPr algn="l"/>
+            <a:r>
+              <a:rPr lang="en-US" sz="1000" b="0">
+                <a:solidFill>
+                  <a:srgbClr val="333333"/>
+                </a:solidFill>
+                <a:latin typeface="Segoe UI"/>
+              </a:rPr>
+              <a:t>7. Weekly GMB posts with offers</a:t>
+            </a:r>
+          </a:p>
+          <a:p>
+            <a:pPr algn="l"/>
             <a:r>
               <a:rPr lang="en-US" sz="300" b="0">
                 <a:solidFill>
@@ -4887,119 +5546,11 @@
             </a:r>
           </a:p>
           <a:p>
-            <a:pPr algn="ctr"/>
-            <a:r>
-              <a:rPr lang="en-US" sz="1000" b="0">
-                <a:solidFill>
-                  <a:srgbClr val="333333"/>
-                </a:solidFill>
-                <a:latin typeface="Segoe UI"/>
-              </a:rPr>
-              <a:t>1. Optimize all page titles &amp; metas</a:t>
-            </a:r>
-          </a:p>
-          <a:p>
-            <a:pPr algn="ctr"/>
-            <a:r>
-              <a:rPr lang="en-US" sz="1000" b="0">
-                <a:solidFill>
-                  <a:srgbClr val="333333"/>
-                </a:solidFill>
-                <a:latin typeface="Segoe UI"/>
-              </a:rPr>
-              <a:t>2. Add LocalBusiness schema markup</a:t>
-            </a:r>
-          </a:p>
-          <a:p>
-            <a:pPr algn="ctr"/>
-            <a:r>
-              <a:rPr lang="en-US" sz="1000" b="0">
-                <a:solidFill>
-                  <a:srgbClr val="333333"/>
-                </a:solidFill>
-                <a:latin typeface="Segoe UI"/>
-              </a:rPr>
-              <a:t>3. Create Calgary neighbourhood pages</a:t>
-            </a:r>
-          </a:p>
-          <a:p>
-            <a:pPr algn="ctr"/>
-            <a:r>
-              <a:rPr lang="en-US" sz="1000" b="0">
-                <a:solidFill>
-                  <a:srgbClr val="333333"/>
-                </a:solidFill>
-                <a:latin typeface="Segoe UI"/>
-              </a:rPr>
-              <a:t>4. Launch blog (2 posts/month min)</a:t>
-            </a:r>
-          </a:p>
-          <a:p>
-            <a:pPr algn="ctr"/>
-            <a:r>
-              <a:rPr lang="en-US" sz="1000" b="0">
-                <a:solidFill>
-                  <a:srgbClr val="333333"/>
-                </a:solidFill>
-                <a:latin typeface="Segoe UI"/>
-              </a:rPr>
-              <a:t>5. Compress images &amp; enable caching</a:t>
-            </a:r>
-          </a:p>
-          <a:p>
-            <a:pPr algn="ctr"/>
-            <a:r>
-              <a:rPr lang="en-US" sz="1000" b="0">
-                <a:solidFill>
-                  <a:srgbClr val="333333"/>
-                </a:solidFill>
-                <a:latin typeface="Segoe UI"/>
-              </a:rPr>
-              <a:t>6. Fix mobile responsiveness issues</a:t>
-            </a:r>
-          </a:p>
-          <a:p>
-            <a:pPr algn="ctr"/>
-            <a:r>
-              <a:rPr lang="en-US" sz="1000" b="0">
-                <a:solidFill>
-                  <a:srgbClr val="333333"/>
-                </a:solidFill>
-                <a:latin typeface="Segoe UI"/>
-              </a:rPr>
-              <a:t>7. Add customer testimonials pages</a:t>
-            </a:r>
-          </a:p>
-          <a:p>
-            <a:pPr algn="ctr"/>
-            <a:r>
-              <a:rPr lang="en-US" sz="1000" b="0">
-                <a:solidFill>
-                  <a:srgbClr val="333333"/>
-                </a:solidFill>
-                <a:latin typeface="Segoe UI"/>
-              </a:rPr>
-              <a:t>8. Weekly GMB posts with offers</a:t>
-            </a:r>
-          </a:p>
-          <a:p>
-            <a:pPr algn="ctr"/>
-            <a:r>
-              <a:rPr lang="en-US" sz="300" b="0">
-                <a:solidFill>
-                  <a:srgbClr val="1B2A4A"/>
-                </a:solidFill>
-                <a:latin typeface="Segoe UI"/>
-              </a:rPr>
-              <a:t/>
-            </a:r>
-          </a:p>
-          <a:p>
-            <a:pPr algn="ctr"/>
+            <a:pPr algn="l"/>
             <a:r>
               <a:rPr lang="en-US" sz="1000" b="1">
                 <a:solidFill>
-                  <a:srgbClr val="E74C3C"/>
+                  <a:srgbClr val="C41E3A"/>
                 </a:solidFill>
                 <a:latin typeface="Segoe UI"/>
               </a:rPr>
@@ -5007,33 +5558,45 @@
             </a:r>
           </a:p>
           <a:p>
-            <a:pPr algn="ctr"/>
-            <a:r>
-              <a:rPr lang="en-US" sz="900" b="0">
+            <a:pPr algn="l"/>
+            <a:r>
+              <a:rPr lang="en-US" sz="950" b="0">
                 <a:solidFill>
                   <a:srgbClr val="555555"/>
                 </a:solidFill>
                 <a:latin typeface="Segoe UI"/>
               </a:rPr>
-              <a:t>windows calgary, window replacement</a:t>
-            </a:r>
-          </a:p>
-          <a:p>
-            <a:pPr algn="ctr"/>
-            <a:r>
-              <a:rPr lang="en-US" sz="900" b="0">
+              <a:t>windows calgary</a:t>
+            </a:r>
+          </a:p>
+          <a:p>
+            <a:pPr algn="l"/>
+            <a:r>
+              <a:rPr lang="en-US" sz="950" b="0">
                 <a:solidFill>
                   <a:srgbClr val="555555"/>
                 </a:solidFill>
                 <a:latin typeface="Segoe UI"/>
               </a:rPr>
+              <a:t>window replacement calgary</a:t>
+            </a:r>
+          </a:p>
+          <a:p>
+            <a:pPr algn="l"/>
+            <a:r>
+              <a:rPr lang="en-US" sz="950" b="0">
+                <a:solidFill>
+                  <a:srgbClr val="555555"/>
+                </a:solidFill>
+                <a:latin typeface="Segoe UI"/>
+              </a:rPr>
               <a:t>energy efficient windows alberta</a:t>
             </a:r>
           </a:p>
           <a:p>
-            <a:pPr algn="ctr"/>
-            <a:r>
-              <a:rPr lang="en-US" sz="900" b="0">
+            <a:pPr algn="l"/>
+            <a:r>
+              <a:rPr lang="en-US" sz="950" b="0">
                 <a:solidFill>
                   <a:srgbClr val="555555"/>
                 </a:solidFill>
@@ -5043,9 +5606,9 @@
             </a:r>
           </a:p>
           <a:p>
-            <a:pPr algn="ctr"/>
-            <a:r>
-              <a:rPr lang="en-US" sz="900" b="0">
+            <a:pPr algn="l"/>
+            <a:r>
+              <a:rPr lang="en-US" sz="950" b="0">
                 <a:solidFill>
                   <a:srgbClr val="555555"/>
                 </a:solidFill>
@@ -5081,14 +5644,14 @@
       <p:grpSpPr/>
       <p:sp>
         <p:nvSpPr>
-          <p:cNvPr id="2" name="header_bg"/>
+          <p:cNvPr id="2" name="h"/>
           <p:cNvSpPr/>
           <p:nvPr/>
         </p:nvSpPr>
         <p:spPr>
           <a:xfrm>
             <a:off x="0" y="0"/>
-            <a:ext cx="12192000" cy="1097280"/>
+            <a:ext cx="12192000" cy="1005840"/>
           </a:xfrm>
           <a:prstGeom prst="rect"/>
           <a:solidFill>
@@ -5101,13 +5664,13 @@
       </p:sp>
       <p:sp>
         <p:nvSpPr>
-          <p:cNvPr id="3" name="header"/>
+          <p:cNvPr id="3" name="ht"/>
           <p:cNvSpPr txBox="1"/>
           <p:nvPr/>
         </p:nvSpPr>
         <p:spPr>
           <a:xfrm>
-            <a:off x="457200" y="182880"/>
+            <a:off x="457200" y="137160"/>
             <a:ext cx="9144000" cy="822960"/>
           </a:xfrm>
           <a:prstGeom prst="rect"/>
@@ -5123,7 +5686,7 @@
               </a:spcBef>
             </a:pPr>
             <a:r>
-              <a:rPr lang="en-US" sz="2000" b="1" dirty="0">
+              <a:rPr lang="en-US" sz="1900" b="1" dirty="0">
                 <a:solidFill>
                   <a:srgbClr val="FFFFFF"/>
                 </a:solidFill>
@@ -5136,63 +5699,28 @@
       </p:sp>
       <p:sp>
         <p:nvSpPr>
-          <p:cNvPr id="4" name="subtitle"/>
-          <p:cNvSpPr txBox="1"/>
-          <p:nvPr/>
-        </p:nvSpPr>
-        <p:spPr>
-          <a:xfrm>
-            <a:off x="457200" y="1280160"/>
-            <a:ext cx="10058400" cy="457200"/>
-          </a:xfrm>
-          <a:prstGeom prst="rect"/>
-          <a:noFill/>
-        </p:spPr>
-        <p:txBody>
-          <a:bodyPr wrap="square" anchor="t"/>
-          <a:lstStyle/>
-          <a:p>
-            <a:pPr algn="l">
-              <a:spcBef>
-                <a:spcPts val="0"/>
-              </a:spcBef>
-            </a:pPr>
-            <a:r>
-              <a:rPr lang="en-US" sz="1300" b="1" dirty="0">
-                <a:solidFill>
-                  <a:srgbClr val="2C3E50"/>
-                </a:solidFill>
-                <a:latin typeface="Segoe UI"/>
-              </a:rPr>
-              <a:t>Key Competitors &amp; What They Do Better</a:t>
-            </a:r>
-          </a:p>
-        </p:txBody>
-      </p:sp>
-      <p:sp>
-        <p:nvSpPr>
-          <p:cNvPr id="10" name="comp_Lux Windows"/>
+          <p:cNvPr id="10" name="c_Lux Windows"/>
           <p:cNvSpPr/>
           <p:nvPr/>
         </p:nvSpPr>
         <p:spPr>
           <a:xfrm>
-            <a:off x="457200" y="1920240"/>
-            <a:ext cx="3200400" cy="1371600"/>
+            <a:off x="365760" y="1280160"/>
+            <a:ext cx="3291840" cy="1463040"/>
           </a:xfrm>
           <a:prstGeom prst="roundRect"/>
           <a:solidFill>
-            <a:srgbClr val="3498DB"/>
+            <a:srgbClr val="C41E3A"/>
           </a:solidFill>
           <a:ln>
             <a:noFill/>
           </a:ln>
         </p:spPr>
         <p:txBody>
-          <a:bodyPr wrap="square" anchor="ctr"/>
+          <a:bodyPr wrap="square" anchor="ctr" lIns="91440" rIns="91440" tIns="45720" bIns="45720"/>
           <a:lstStyle/>
           <a:p>
-            <a:pPr algn="ctr"/>
+            <a:pPr algn="l"/>
             <a:r>
               <a:rPr lang="en-US" sz="1200" b="1">
                 <a:solidFill>
@@ -5204,7 +5732,7 @@
             </a:r>
           </a:p>
           <a:p>
-            <a:pPr algn="ctr"/>
+            <a:pPr algn="l"/>
             <a:r>
               <a:rPr lang="en-US" sz="850" b="0">
                 <a:solidFill>
@@ -5212,35 +5740,35 @@
                 </a:solidFill>
                 <a:latin typeface="Segoe UI"/>
               </a:rPr>
-              <a:t>Strong brand identity, premium positioning, active social media, video content, showroom experience</a:t>
+              <a:t>Premium positioning, active social, video content, showroom experience</a:t>
             </a:r>
           </a:p>
         </p:txBody>
       </p:sp>
       <p:sp>
         <p:nvSpPr>
-          <p:cNvPr id="10" name="comp_All Weather"/>
+          <p:cNvPr id="10" name="c_All Weather"/>
           <p:cNvSpPr/>
           <p:nvPr/>
         </p:nvSpPr>
         <p:spPr>
           <a:xfrm>
-            <a:off x="457200" y="3474720"/>
-            <a:ext cx="3200400" cy="1371600"/>
+            <a:off x="365760" y="2926080"/>
+            <a:ext cx="3291840" cy="1463040"/>
           </a:xfrm>
           <a:prstGeom prst="roundRect"/>
           <a:solidFill>
-            <a:srgbClr val="2ECC71"/>
+            <a:srgbClr val="1D6B3F"/>
           </a:solidFill>
           <a:ln>
             <a:noFill/>
           </a:ln>
         </p:spPr>
         <p:txBody>
-          <a:bodyPr wrap="square" anchor="ctr"/>
+          <a:bodyPr wrap="square" anchor="ctr" lIns="91440" rIns="91440" tIns="45720" bIns="45720"/>
           <a:lstStyle/>
           <a:p>
-            <a:pPr algn="ctr"/>
+            <a:pPr algn="l"/>
             <a:r>
               <a:rPr lang="en-US" sz="1200" b="1">
                 <a:solidFill>
@@ -5252,7 +5780,7 @@
             </a:r>
           </a:p>
           <a:p>
-            <a:pPr algn="ctr"/>
+            <a:pPr algn="l"/>
             <a:r>
               <a:rPr lang="en-US" sz="850" b="0">
                 <a:solidFill>
@@ -5260,35 +5788,35 @@
                 </a:solidFill>
                 <a:latin typeface="Segoe UI"/>
               </a:rPr>
-              <a:t>10x Energy Star winner, extensive product range, strong blog/SEO, dealer network, Calgary + Edmonton</a:t>
+              <a:t>10x Energy Star winner, strong blog/SEO, dealer network, Calgary+Edmonton</a:t>
             </a:r>
           </a:p>
         </p:txBody>
       </p:sp>
       <p:sp>
         <p:nvSpPr>
-          <p:cNvPr id="10" name="comp_Durabuilt"/>
+          <p:cNvPr id="10" name="c_Durabuilt"/>
           <p:cNvSpPr/>
           <p:nvPr/>
         </p:nvSpPr>
         <p:spPr>
           <a:xfrm>
-            <a:off x="457200" y="5029200"/>
-            <a:ext cx="3200400" cy="1371600"/>
+            <a:off x="365760" y="4572000"/>
+            <a:ext cx="3291840" cy="1463040"/>
           </a:xfrm>
           <a:prstGeom prst="roundRect"/>
           <a:solidFill>
-            <a:srgbClr val="F39C12"/>
+            <a:srgbClr val="D4740E"/>
           </a:solidFill>
           <a:ln>
             <a:noFill/>
           </a:ln>
         </p:spPr>
         <p:txBody>
-          <a:bodyPr wrap="square" anchor="ctr"/>
+          <a:bodyPr wrap="square" anchor="ctr" lIns="91440" rIns="91440" tIns="45720" bIns="45720"/>
           <a:lstStyle/>
           <a:p>
-            <a:pPr algn="ctr"/>
+            <a:pPr algn="l"/>
             <a:r>
               <a:rPr lang="en-US" sz="1200" b="1">
                 <a:solidFill>
@@ -5300,7 +5828,7 @@
             </a:r>
           </a:p>
           <a:p>
-            <a:pPr algn="ctr"/>
+            <a:pPr algn="l"/>
             <a:r>
               <a:rPr lang="en-US" sz="850" b="0">
                 <a:solidFill>
@@ -5308,35 +5836,35 @@
                 </a:solidFill>
                 <a:latin typeface="Segoe UI"/>
               </a:rPr>
-              <a:t>Multi-city presence, design galleries, active social channels, builder partnerships, warranty focus</a:t>
+              <a:t>Multi-city, design galleries, social channels, builder partnerships</a:t>
             </a:r>
           </a:p>
         </p:txBody>
       </p:sp>
       <p:sp>
         <p:nvSpPr>
-          <p:cNvPr id="11" name="comp2_JELD-WEN"/>
+          <p:cNvPr id="11" name="c2_JELD-WEN"/>
           <p:cNvSpPr/>
           <p:nvPr/>
         </p:nvSpPr>
         <p:spPr>
           <a:xfrm>
-            <a:off x="3840480" y="1920240"/>
-            <a:ext cx="3200400" cy="1371600"/>
+            <a:off x="3840480" y="1280160"/>
+            <a:ext cx="3291840" cy="1463040"/>
           </a:xfrm>
           <a:prstGeom prst="roundRect"/>
           <a:solidFill>
-            <a:srgbClr val="9B59B6"/>
+            <a:srgbClr val="5B2D8E"/>
           </a:solidFill>
           <a:ln>
             <a:noFill/>
           </a:ln>
         </p:spPr>
         <p:txBody>
-          <a:bodyPr wrap="square" anchor="ctr"/>
+          <a:bodyPr wrap="square" anchor="ctr" lIns="91440" rIns="91440" tIns="45720" bIns="45720"/>
           <a:lstStyle/>
           <a:p>
-            <a:pPr algn="ctr"/>
+            <a:pPr algn="l"/>
             <a:r>
               <a:rPr lang="en-US" sz="1200" b="1">
                 <a:solidFill>
@@ -5348,7 +5876,7 @@
             </a:r>
           </a:p>
           <a:p>
-            <a:pPr algn="ctr"/>
+            <a:pPr algn="l"/>
             <a:r>
               <a:rPr lang="en-US" sz="850" b="0">
                 <a:solidFill>
@@ -5356,21 +5884,69 @@
                 </a:solidFill>
                 <a:latin typeface="Segoe UI"/>
               </a:rPr>
-              <a:t>National brand power, massive product catalog, strong SEO domain authority, content marketing machine</a:t>
+              <a:t>National brand, massive catalog, high domain authority, content machine</a:t>
             </a:r>
           </a:p>
         </p:txBody>
       </p:sp>
       <p:sp>
         <p:nvSpPr>
-          <p:cNvPr id="11" name="comp2_WindowMart"/>
+          <p:cNvPr id="11" name="c2_WindowMart"/>
           <p:cNvSpPr/>
           <p:nvPr/>
         </p:nvSpPr>
         <p:spPr>
           <a:xfrm>
-            <a:off x="3840480" y="3474720"/>
-            <a:ext cx="3200400" cy="1371600"/>
+            <a:off x="3840480" y="2926080"/>
+            <a:ext cx="3291840" cy="1463040"/>
+          </a:xfrm>
+          <a:prstGeom prst="roundRect"/>
+          <a:solidFill>
+            <a:srgbClr val="2980B9"/>
+          </a:solidFill>
+          <a:ln>
+            <a:noFill/>
+          </a:ln>
+        </p:spPr>
+        <p:txBody>
+          <a:bodyPr wrap="square" anchor="ctr" lIns="91440" rIns="91440" tIns="45720" bIns="45720"/>
+          <a:lstStyle/>
+          <a:p>
+            <a:pPr algn="l"/>
+            <a:r>
+              <a:rPr lang="en-US" sz="1200" b="1">
+                <a:solidFill>
+                  <a:srgbClr val="FFFFFF"/>
+                </a:solidFill>
+                <a:latin typeface="Segoe UI"/>
+              </a:rPr>
+              <a:t>WindowMart</a:t>
+            </a:r>
+          </a:p>
+          <a:p>
+            <a:pPr algn="l"/>
+            <a:r>
+              <a:rPr lang="en-US" sz="850" b="0">
+                <a:solidFill>
+                  <a:srgbClr val="FFFFFF"/>
+                </a:solidFill>
+                <a:latin typeface="Segoe UI"/>
+              </a:rPr>
+              <a:t>Aggressive pricing, strong Google Ads, review generation, multiple locations</a:t>
+            </a:r>
+          </a:p>
+        </p:txBody>
+      </p:sp>
+      <p:sp>
+        <p:nvSpPr>
+          <p:cNvPr id="11" name="c2_Windows Canada"/>
+          <p:cNvSpPr/>
+          <p:nvPr/>
+        </p:nvSpPr>
+        <p:spPr>
+          <a:xfrm>
+            <a:off x="3840480" y="4572000"/>
+            <a:ext cx="3291840" cy="1463040"/>
           </a:xfrm>
           <a:prstGeom prst="roundRect"/>
           <a:solidFill>
@@ -5381,10 +5957,10 @@
           </a:ln>
         </p:spPr>
         <p:txBody>
-          <a:bodyPr wrap="square" anchor="ctr"/>
+          <a:bodyPr wrap="square" anchor="ctr" lIns="91440" rIns="91440" tIns="45720" bIns="45720"/>
           <a:lstStyle/>
           <a:p>
-            <a:pPr algn="ctr"/>
+            <a:pPr algn="l"/>
             <a:r>
               <a:rPr lang="en-US" sz="1200" b="1">
                 <a:solidFill>
@@ -5392,11 +5968,11 @@
                 </a:solidFill>
                 <a:latin typeface="Segoe UI"/>
               </a:rPr>
-              <a:t>WindowMart</a:t>
-            </a:r>
-          </a:p>
-          <a:p>
-            <a:pPr algn="ctr"/>
+              <a:t>Windows Canada</a:t>
+            </a:r>
+          </a:p>
+          <a:p>
+            <a:pPr algn="l"/>
             <a:r>
               <a:rPr lang="en-US" sz="850" b="0">
                 <a:solidFill>
@@ -5404,69 +5980,21 @@
                 </a:solidFill>
                 <a:latin typeface="Segoe UI"/>
               </a:rPr>
-              <a:t>Aggressive pricing, strong Google Ads, multiple locations, quick quotes, review generation</a:t>
+              <a:t>Modern site, project galleries, financing, active blog, local SEO</a:t>
             </a:r>
           </a:p>
         </p:txBody>
       </p:sp>
       <p:sp>
         <p:nvSpPr>
-          <p:cNvPr id="11" name="comp2_Windows Canada"/>
+          <p:cNvPr id="20" name="tk"/>
           <p:cNvSpPr/>
           <p:nvPr/>
         </p:nvSpPr>
         <p:spPr>
           <a:xfrm>
-            <a:off x="3840480" y="5029200"/>
-            <a:ext cx="3200400" cy="1371600"/>
-          </a:xfrm>
-          <a:prstGeom prst="roundRect"/>
-          <a:solidFill>
-            <a:srgbClr val="E67E22"/>
-          </a:solidFill>
-          <a:ln>
-            <a:noFill/>
-          </a:ln>
-        </p:spPr>
-        <p:txBody>
-          <a:bodyPr wrap="square" anchor="ctr"/>
-          <a:lstStyle/>
-          <a:p>
-            <a:pPr algn="ctr"/>
-            <a:r>
-              <a:rPr lang="en-US" sz="1200" b="1">
-                <a:solidFill>
-                  <a:srgbClr val="FFFFFF"/>
-                </a:solidFill>
-                <a:latin typeface="Segoe UI"/>
-              </a:rPr>
-              <a:t>Windows Canada</a:t>
-            </a:r>
-          </a:p>
-          <a:p>
-            <a:pPr algn="ctr"/>
-            <a:r>
-              <a:rPr lang="en-US" sz="850" b="0">
-                <a:solidFill>
-                  <a:srgbClr val="FFFFFF"/>
-                </a:solidFill>
-                <a:latin typeface="Segoe UI"/>
-              </a:rPr>
-              <a:t>Modern website, project galleries, financing options, active blog, good local SEO structure</a:t>
-            </a:r>
-          </a:p>
-        </p:txBody>
-      </p:sp>
-      <p:sp>
-        <p:nvSpPr>
-          <p:cNvPr id="20" name="takeaway"/>
-          <p:cNvSpPr/>
-          <p:nvPr/>
-        </p:nvSpPr>
-        <p:spPr>
-          <a:xfrm>
-            <a:off x="7315200" y="1920240"/>
-            <a:ext cx="3383280" cy="4389120"/>
+            <a:off x="7315200" y="1280160"/>
+            <a:ext cx="3383280" cy="5120640"/>
           </a:xfrm>
           <a:prstGeom prst="roundRect"/>
           <a:solidFill>
@@ -5477,14 +6005,14 @@
           </a:ln>
         </p:spPr>
         <p:txBody>
-          <a:bodyPr wrap="square" anchor="ctr"/>
+          <a:bodyPr wrap="square" anchor="ctr" lIns="91440" rIns="91440" tIns="45720" bIns="45720"/>
           <a:lstStyle/>
           <a:p>
-            <a:pPr algn="ctr"/>
+            <a:pPr algn="l"/>
             <a:r>
               <a:rPr lang="en-US" sz="1100" b="1">
                 <a:solidFill>
-                  <a:srgbClr val="E74C3C"/>
+                  <a:srgbClr val="C41E3A"/>
                 </a:solidFill>
                 <a:latin typeface="Segoe UI"/>
               </a:rPr>
@@ -5492,7 +6020,103 @@
             </a:r>
           </a:p>
           <a:p>
-            <a:pPr algn="ctr"/>
+            <a:pPr algn="l"/>
+            <a:r>
+              <a:rPr lang="en-US" sz="250" b="0">
+                <a:solidFill>
+                  <a:srgbClr val="FFFFFF"/>
+                </a:solidFill>
+                <a:latin typeface="Segoe UI"/>
+              </a:rPr>
+              <a:t/>
+            </a:r>
+          </a:p>
+          <a:p>
+            <a:pPr algn="l"/>
+            <a:r>
+              <a:rPr lang="en-US" sz="1000" b="0">
+                <a:solidFill>
+                  <a:srgbClr val="FFFFFF"/>
+                </a:solidFill>
+                <a:latin typeface="Segoe UI"/>
+              </a:rPr>
+              <a:t>Apollo lacks:</a:t>
+            </a:r>
+          </a:p>
+          <a:p>
+            <a:pPr algn="l"/>
+            <a:r>
+              <a:rPr lang="en-US" sz="900" b="0">
+                <a:solidFill>
+                  <a:srgbClr val="BDC3C7"/>
+                </a:solidFill>
+                <a:latin typeface="Segoe UI"/>
+              </a:rPr>
+              <a:t>Active blog content</a:t>
+            </a:r>
+          </a:p>
+          <a:p>
+            <a:pPr algn="l"/>
+            <a:r>
+              <a:rPr lang="en-US" sz="900" b="0">
+                <a:solidFill>
+                  <a:srgbClr val="BDC3C7"/>
+                </a:solidFill>
+                <a:latin typeface="Segoe UI"/>
+              </a:rPr>
+              <a:t>Video/Reels presence</a:t>
+            </a:r>
+          </a:p>
+          <a:p>
+            <a:pPr algn="l"/>
+            <a:r>
+              <a:rPr lang="en-US" sz="900" b="0">
+                <a:solidFill>
+                  <a:srgbClr val="BDC3C7"/>
+                </a:solidFill>
+                <a:latin typeface="Segoe UI"/>
+              </a:rPr>
+              <a:t>Project galleries</a:t>
+            </a:r>
+          </a:p>
+          <a:p>
+            <a:pPr algn="l"/>
+            <a:r>
+              <a:rPr lang="en-US" sz="900" b="0">
+                <a:solidFill>
+                  <a:srgbClr val="BDC3C7"/>
+                </a:solidFill>
+                <a:latin typeface="Segoe UI"/>
+              </a:rPr>
+              <a:t>Review generation system</a:t>
+            </a:r>
+          </a:p>
+          <a:p>
+            <a:pPr algn="l"/>
+            <a:r>
+              <a:rPr lang="en-US" sz="900" b="0">
+                <a:solidFill>
+                  <a:srgbClr val="BDC3C7"/>
+                </a:solidFill>
+                <a:latin typeface="Segoe UI"/>
+              </a:rPr>
+              <a:t>Social engagement</a:t>
+            </a:r>
+          </a:p>
+          <a:p>
+            <a:pPr algn="l"/>
+            <a:r>
+              <a:rPr lang="en-US" sz="900" b="0">
+                <a:solidFill>
+                  <a:srgbClr val="BDC3C7"/>
+                </a:solidFill>
+                <a:latin typeface="Segoe UI"/>
+              </a:rPr>
+              <a:t>Paid ads strategy</a:t>
+            </a:r>
+          </a:p>
+          <a:p>
+            <a:pPr algn="l"/>
             <a:r>
               <a:rPr lang="en-US" sz="300" b="0">
                 <a:solidFill>
@@ -5504,123 +6128,39 @@
             </a:r>
           </a:p>
           <a:p>
-            <a:pPr algn="ctr"/>
-            <a:r>
-              <a:rPr lang="en-US" sz="1000" b="0">
-                <a:solidFill>
-                  <a:srgbClr val="FFFFFF"/>
-                </a:solidFill>
-                <a:latin typeface="Segoe UI"/>
-              </a:rPr>
-              <a:t>Apollo lacks:</a:t>
-            </a:r>
-          </a:p>
-          <a:p>
-            <a:pPr algn="ctr"/>
+            <a:pPr algn="l"/>
+            <a:r>
+              <a:rPr lang="en-US" sz="1000" b="1">
+                <a:solidFill>
+                  <a:srgbClr val="2ECC71"/>
+                </a:solidFill>
+                <a:latin typeface="Segoe UI"/>
+              </a:rPr>
+              <a:t>OPPORTUNITY:</a:t>
+            </a:r>
+          </a:p>
+          <a:p>
+            <a:pPr algn="l"/>
             <a:r>
               <a:rPr lang="en-US" sz="900" b="0">
                 <a:solidFill>
-                  <a:srgbClr val="BDC3C7"/>
-                </a:solidFill>
-                <a:latin typeface="Segoe UI"/>
-              </a:rPr>
-              <a:t>Active blog content</a:t>
-            </a:r>
-          </a:p>
-          <a:p>
-            <a:pPr algn="ctr"/>
+                  <a:srgbClr val="FFFFFF"/>
+                </a:solidFill>
+                <a:latin typeface="Segoe UI"/>
+              </a:rPr>
+              <a:t>Local trust + family</a:t>
+            </a:r>
+          </a:p>
+          <a:p>
+            <a:pPr algn="l"/>
             <a:r>
               <a:rPr lang="en-US" sz="900" b="0">
                 <a:solidFill>
-                  <a:srgbClr val="BDC3C7"/>
-                </a:solidFill>
-                <a:latin typeface="Segoe UI"/>
-              </a:rPr>
-              <a:t>Video/Reels presence</a:t>
-            </a:r>
-          </a:p>
-          <a:p>
-            <a:pPr algn="ctr"/>
-            <a:r>
-              <a:rPr lang="en-US" sz="900" b="0">
-                <a:solidFill>
-                  <a:srgbClr val="BDC3C7"/>
-                </a:solidFill>
-                <a:latin typeface="Segoe UI"/>
-              </a:rPr>
-              <a:t>Project galleries</a:t>
-            </a:r>
-          </a:p>
-          <a:p>
-            <a:pPr algn="ctr"/>
-            <a:r>
-              <a:rPr lang="en-US" sz="900" b="0">
-                <a:solidFill>
-                  <a:srgbClr val="BDC3C7"/>
-                </a:solidFill>
-                <a:latin typeface="Segoe UI"/>
-              </a:rPr>
-              <a:t>Review generation</a:t>
-            </a:r>
-          </a:p>
-          <a:p>
-            <a:pPr algn="ctr"/>
-            <a:r>
-              <a:rPr lang="en-US" sz="900" b="0">
-                <a:solidFill>
-                  <a:srgbClr val="BDC3C7"/>
-                </a:solidFill>
-                <a:latin typeface="Segoe UI"/>
-              </a:rPr>
-              <a:t>Social engagement</a:t>
-            </a:r>
-          </a:p>
-          <a:p>
-            <a:pPr algn="ctr"/>
-            <a:r>
-              <a:rPr lang="en-US" sz="900" b="0">
-                <a:solidFill>
-                  <a:srgbClr val="BDC3C7"/>
-                </a:solidFill>
-                <a:latin typeface="Segoe UI"/>
-              </a:rPr>
-              <a:t>Paid ads strategy</a:t>
-            </a:r>
-          </a:p>
-          <a:p>
-            <a:pPr algn="ctr"/>
-            <a:r>
-              <a:rPr lang="en-US" sz="300" b="0">
-                <a:solidFill>
-                  <a:srgbClr val="FFFFFF"/>
-                </a:solidFill>
-                <a:latin typeface="Segoe UI"/>
-              </a:rPr>
-              <a:t/>
-            </a:r>
-          </a:p>
-          <a:p>
-            <a:pPr algn="ctr"/>
-            <a:r>
-              <a:rPr lang="en-US" sz="1000" b="1">
-                <a:solidFill>
-                  <a:srgbClr val="2ECC71"/>
-                </a:solidFill>
-                <a:latin typeface="Segoe UI"/>
-              </a:rPr>
-              <a:t>OPPORTUNITY:</a:t>
-            </a:r>
-          </a:p>
-          <a:p>
-            <a:pPr algn="ctr"/>
-            <a:r>
-              <a:rPr lang="en-US" sz="900" b="0">
-                <a:solidFill>
-                  <a:srgbClr val="FFFFFF"/>
-                </a:solidFill>
-                <a:latin typeface="Segoe UI"/>
-              </a:rPr>
-              <a:t>Local trust + family story is a differentiator</a:t>
+                  <a:srgbClr val="FFFFFF"/>
+                </a:solidFill>
+                <a:latin typeface="Segoe UI"/>
+              </a:rPr>
+              <a:t>story = differentiator</a:t>
             </a:r>
           </a:p>
         </p:txBody>
@@ -5650,14 +6190,14 @@
       <p:grpSpPr/>
       <p:sp>
         <p:nvSpPr>
-          <p:cNvPr id="2" name="header_bg"/>
+          <p:cNvPr id="2" name="h"/>
           <p:cNvSpPr/>
           <p:nvPr/>
         </p:nvSpPr>
         <p:spPr>
           <a:xfrm>
             <a:off x="0" y="0"/>
-            <a:ext cx="12192000" cy="1097280"/>
+            <a:ext cx="12192000" cy="1005840"/>
           </a:xfrm>
           <a:prstGeom prst="rect"/>
           <a:solidFill>
@@ -5670,13 +6210,13 @@
       </p:sp>
       <p:sp>
         <p:nvSpPr>
-          <p:cNvPr id="3" name="header"/>
+          <p:cNvPr id="3" name="ht"/>
           <p:cNvSpPr txBox="1"/>
           <p:nvPr/>
         </p:nvSpPr>
         <p:spPr>
           <a:xfrm>
-            <a:off x="457200" y="182880"/>
+            <a:off x="457200" y="137160"/>
             <a:ext cx="9144000" cy="822960"/>
           </a:xfrm>
           <a:prstGeom prst="rect"/>
@@ -5692,7 +6232,7 @@
               </a:spcBef>
             </a:pPr>
             <a:r>
-              <a:rPr lang="en-US" sz="2000" b="1" dirty="0">
+              <a:rPr lang="en-US" sz="1900" b="1" dirty="0">
                 <a:solidFill>
                   <a:srgbClr val="FFFFFF"/>
                 </a:solidFill>
@@ -5705,32 +6245,32 @@
       </p:sp>
       <p:sp>
         <p:nvSpPr>
-          <p:cNvPr id="4" name="ig_box"/>
+          <p:cNvPr id="4" name="ig"/>
           <p:cNvSpPr/>
           <p:nvPr/>
         </p:nvSpPr>
         <p:spPr>
           <a:xfrm>
-            <a:off x="457200" y="1371600"/>
-            <a:ext cx="5029200" cy="5029200"/>
+            <a:off x="365760" y="1280160"/>
+            <a:ext cx="5120640" cy="5212080"/>
           </a:xfrm>
           <a:prstGeom prst="roundRect"/>
           <a:solidFill>
-            <a:srgbClr val="F8F0FC"/>
+            <a:srgbClr val="FDEAED"/>
           </a:solidFill>
           <a:ln>
             <a:noFill/>
           </a:ln>
         </p:spPr>
         <p:txBody>
-          <a:bodyPr wrap="square" anchor="ctr"/>
+          <a:bodyPr wrap="square" anchor="ctr" lIns="91440" rIns="91440" tIns="45720" bIns="45720"/>
           <a:lstStyle/>
           <a:p>
-            <a:pPr algn="ctr"/>
-            <a:r>
-              <a:rPr lang="en-US" sz="1200" b="1">
-                <a:solidFill>
-                  <a:srgbClr val="9B59B6"/>
+            <a:pPr algn="l"/>
+            <a:r>
+              <a:rPr lang="en-US" sz="1150" b="1">
+                <a:solidFill>
+                  <a:srgbClr val="C41E3A"/>
                 </a:solidFill>
                 <a:latin typeface="Segoe UI"/>
               </a:rPr>
@@ -5738,9 +6278,9 @@
             </a:r>
           </a:p>
           <a:p>
-            <a:pPr algn="ctr"/>
-            <a:r>
-              <a:rPr lang="en-US" sz="300" b="0">
+            <a:pPr algn="l"/>
+            <a:r>
+              <a:rPr lang="en-US" sz="250" b="0">
                 <a:solidFill>
                   <a:srgbClr val="333333"/>
                 </a:solidFill>
@@ -5750,9 +6290,9 @@
             </a:r>
           </a:p>
           <a:p>
-            <a:pPr algn="ctr"/>
-            <a:r>
-              <a:rPr lang="en-US" sz="1100" b="1">
+            <a:pPr algn="l"/>
+            <a:r>
+              <a:rPr lang="en-US" sz="1050" b="1">
                 <a:solidFill>
                   <a:srgbClr val="333333"/>
                 </a:solidFill>
@@ -5762,7 +6302,7 @@
             </a:r>
           </a:p>
           <a:p>
-            <a:pPr algn="ctr"/>
+            <a:pPr algn="l"/>
             <a:r>
               <a:rPr lang="en-US" sz="1000" b="0">
                 <a:solidFill>
@@ -5774,7 +6314,7 @@
             </a:r>
           </a:p>
           <a:p>
-            <a:pPr algn="ctr"/>
+            <a:pPr algn="l"/>
             <a:r>
               <a:rPr lang="en-US" sz="1000" b="0">
                 <a:solidFill>
@@ -5786,7 +6326,7 @@
             </a:r>
           </a:p>
           <a:p>
-            <a:pPr algn="ctr"/>
+            <a:pPr algn="l"/>
             <a:r>
               <a:rPr lang="en-US" sz="1000" b="0">
                 <a:solidFill>
@@ -5798,7 +6338,7 @@
             </a:r>
           </a:p>
           <a:p>
-            <a:pPr algn="ctr"/>
+            <a:pPr algn="l"/>
             <a:r>
               <a:rPr lang="en-US" sz="1000" b="0">
                 <a:solidFill>
@@ -5810,7 +6350,7 @@
             </a:r>
           </a:p>
           <a:p>
-            <a:pPr algn="ctr"/>
+            <a:pPr algn="l"/>
             <a:r>
               <a:rPr lang="en-US" sz="1000" b="0">
                 <a:solidFill>
@@ -5822,9 +6362,9 @@
             </a:r>
           </a:p>
           <a:p>
-            <a:pPr algn="ctr"/>
-            <a:r>
-              <a:rPr lang="en-US" sz="300" b="0">
+            <a:pPr algn="l"/>
+            <a:r>
+              <a:rPr lang="en-US" sz="250" b="0">
                 <a:solidFill>
                   <a:srgbClr val="333333"/>
                 </a:solidFill>
@@ -5834,11 +6374,11 @@
             </a:r>
           </a:p>
           <a:p>
-            <a:pPr algn="ctr"/>
-            <a:r>
-              <a:rPr lang="en-US" sz="1100" b="1">
-                <a:solidFill>
-                  <a:srgbClr val="E74C3C"/>
+            <a:pPr algn="l"/>
+            <a:r>
+              <a:rPr lang="en-US" sz="1050" b="1">
+                <a:solidFill>
+                  <a:srgbClr val="C41E3A"/>
                 </a:solidFill>
                 <a:latin typeface="Segoe UI"/>
               </a:rPr>
@@ -5846,7 +6386,7 @@
             </a:r>
           </a:p>
           <a:p>
-            <a:pPr algn="ctr"/>
+            <a:pPr algn="l"/>
             <a:r>
               <a:rPr lang="en-US" sz="1000" b="0">
                 <a:solidFill>
@@ -5858,7 +6398,7 @@
             </a:r>
           </a:p>
           <a:p>
-            <a:pPr algn="ctr"/>
+            <a:pPr algn="l"/>
             <a:r>
               <a:rPr lang="en-US" sz="1000" b="0">
                 <a:solidFill>
@@ -5866,11 +6406,11 @@
                 </a:solidFill>
                 <a:latin typeface="Segoe UI"/>
               </a:rPr>
-              <a:t>No community engagement</a:t>
-            </a:r>
-          </a:p>
-          <a:p>
-            <a:pPr algn="ctr"/>
+              <a:t>No community engagement loop</a:t>
+            </a:r>
+          </a:p>
+          <a:p>
+            <a:pPr algn="l"/>
             <a:r>
               <a:rPr lang="en-US" sz="1000" b="0">
                 <a:solidFill>
@@ -5882,7 +6422,7 @@
             </a:r>
           </a:p>
           <a:p>
-            <a:pPr algn="ctr"/>
+            <a:pPr algn="l"/>
             <a:r>
               <a:rPr lang="en-US" sz="1000" b="0">
                 <a:solidFill>
@@ -5897,32 +6437,32 @@
       </p:sp>
       <p:sp>
         <p:nvSpPr>
-          <p:cNvPr id="5" name="fb_box"/>
+          <p:cNvPr id="5" name="fb"/>
           <p:cNvSpPr/>
           <p:nvPr/>
         </p:nvSpPr>
         <p:spPr>
           <a:xfrm>
-            <a:off x="5760720" y="1371600"/>
-            <a:ext cx="4846320" cy="5029200"/>
+            <a:off x="5669280" y="1280160"/>
+            <a:ext cx="4937760" cy="5212080"/>
           </a:xfrm>
           <a:prstGeom prst="roundRect"/>
           <a:solidFill>
-            <a:srgbClr val="F0F4FF"/>
+            <a:srgbClr val="E8F4FD"/>
           </a:solidFill>
           <a:ln>
             <a:noFill/>
           </a:ln>
         </p:spPr>
         <p:txBody>
-          <a:bodyPr wrap="square" anchor="ctr"/>
+          <a:bodyPr wrap="square" anchor="ctr" lIns="91440" rIns="91440" tIns="45720" bIns="45720"/>
           <a:lstStyle/>
           <a:p>
-            <a:pPr algn="ctr"/>
-            <a:r>
-              <a:rPr lang="en-US" sz="1200" b="1">
-                <a:solidFill>
-                  <a:srgbClr val="3498DB"/>
+            <a:pPr algn="l"/>
+            <a:r>
+              <a:rPr lang="en-US" sz="1150" b="1">
+                <a:solidFill>
+                  <a:srgbClr val="2980B9"/>
                 </a:solidFill>
                 <a:latin typeface="Segoe UI"/>
               </a:rPr>
@@ -5930,9 +6470,9 @@
             </a:r>
           </a:p>
           <a:p>
-            <a:pPr algn="ctr"/>
-            <a:r>
-              <a:rPr lang="en-US" sz="300" b="0">
+            <a:pPr algn="l"/>
+            <a:r>
+              <a:rPr lang="en-US" sz="250" b="0">
                 <a:solidFill>
                   <a:srgbClr val="333333"/>
                 </a:solidFill>
@@ -5942,9 +6482,9 @@
             </a:r>
           </a:p>
           <a:p>
-            <a:pPr algn="ctr"/>
-            <a:r>
-              <a:rPr lang="en-US" sz="1100" b="1">
+            <a:pPr algn="l"/>
+            <a:r>
+              <a:rPr lang="en-US" sz="1050" b="1">
                 <a:solidFill>
                   <a:srgbClr val="333333"/>
                 </a:solidFill>
@@ -5954,7 +6494,7 @@
             </a:r>
           </a:p>
           <a:p>
-            <a:pPr algn="ctr"/>
+            <a:pPr algn="l"/>
             <a:r>
               <a:rPr lang="en-US" sz="1000" b="0">
                 <a:solidFill>
@@ -5966,7 +6506,7 @@
             </a:r>
           </a:p>
           <a:p>
-            <a:pPr algn="ctr"/>
+            <a:pPr algn="l"/>
             <a:r>
               <a:rPr lang="en-US" sz="1000" b="0">
                 <a:solidFill>
@@ -5978,7 +6518,7 @@
             </a:r>
           </a:p>
           <a:p>
-            <a:pPr algn="ctr"/>
+            <a:pPr algn="l"/>
             <a:r>
               <a:rPr lang="en-US" sz="1000" b="0">
                 <a:solidFill>
@@ -5990,7 +6530,7 @@
             </a:r>
           </a:p>
           <a:p>
-            <a:pPr algn="ctr"/>
+            <a:pPr algn="l"/>
             <a:r>
               <a:rPr lang="en-US" sz="1000" b="0">
                 <a:solidFill>
@@ -6002,7 +6542,7 @@
             </a:r>
           </a:p>
           <a:p>
-            <a:pPr algn="ctr"/>
+            <a:pPr algn="l"/>
             <a:r>
               <a:rPr lang="en-US" sz="1000" b="0">
                 <a:solidFill>
@@ -6014,9 +6554,9 @@
             </a:r>
           </a:p>
           <a:p>
-            <a:pPr algn="ctr"/>
-            <a:r>
-              <a:rPr lang="en-US" sz="300" b="0">
+            <a:pPr algn="l"/>
+            <a:r>
+              <a:rPr lang="en-US" sz="250" b="0">
                 <a:solidFill>
                   <a:srgbClr val="333333"/>
                 </a:solidFill>
@@ -6026,11 +6566,11 @@
             </a:r>
           </a:p>
           <a:p>
-            <a:pPr algn="ctr"/>
-            <a:r>
-              <a:rPr lang="en-US" sz="1100" b="1">
-                <a:solidFill>
-                  <a:srgbClr val="E74C3C"/>
+            <a:pPr algn="l"/>
+            <a:r>
+              <a:rPr lang="en-US" sz="1050" b="1">
+                <a:solidFill>
+                  <a:srgbClr val="C41E3A"/>
                 </a:solidFill>
                 <a:latin typeface="Segoe UI"/>
               </a:rPr>
@@ -6038,7 +6578,7 @@
             </a:r>
           </a:p>
           <a:p>
-            <a:pPr algn="ctr"/>
+            <a:pPr algn="l"/>
             <a:r>
               <a:rPr lang="en-US" sz="1000" b="0">
                 <a:solidFill>
@@ -6050,7 +6590,7 @@
             </a:r>
           </a:p>
           <a:p>
-            <a:pPr algn="ctr"/>
+            <a:pPr algn="l"/>
             <a:r>
               <a:rPr lang="en-US" sz="1000" b="0">
                 <a:solidFill>
@@ -6062,7 +6602,7 @@
             </a:r>
           </a:p>
           <a:p>
-            <a:pPr algn="ctr"/>
+            <a:pPr algn="l"/>
             <a:r>
               <a:rPr lang="en-US" sz="1000" b="0">
                 <a:solidFill>
@@ -6074,7 +6614,7 @@
             </a:r>
           </a:p>
           <a:p>
-            <a:pPr algn="ctr"/>
+            <a:pPr algn="l"/>
             <a:r>
               <a:rPr lang="en-US" sz="1000" b="0">
                 <a:solidFill>
@@ -6112,14 +6652,14 @@
       <p:grpSpPr/>
       <p:sp>
         <p:nvSpPr>
-          <p:cNvPr id="2" name="header_bg"/>
+          <p:cNvPr id="2" name="h"/>
           <p:cNvSpPr/>
           <p:nvPr/>
         </p:nvSpPr>
         <p:spPr>
           <a:xfrm>
             <a:off x="0" y="0"/>
-            <a:ext cx="12192000" cy="1097280"/>
+            <a:ext cx="12192000" cy="1005840"/>
           </a:xfrm>
           <a:prstGeom prst="rect"/>
           <a:solidFill>
@@ -6132,13 +6672,13 @@
       </p:sp>
       <p:sp>
         <p:nvSpPr>
-          <p:cNvPr id="3" name="header"/>
+          <p:cNvPr id="3" name="ht"/>
           <p:cNvSpPr txBox="1"/>
           <p:nvPr/>
         </p:nvSpPr>
         <p:spPr>
           <a:xfrm>
-            <a:off x="457200" y="182880"/>
+            <a:off x="457200" y="137160"/>
             <a:ext cx="9144000" cy="822960"/>
           </a:xfrm>
           <a:prstGeom prst="rect"/>
@@ -6154,7 +6694,7 @@
               </a:spcBef>
             </a:pPr>
             <a:r>
-              <a:rPr lang="en-US" sz="2000" b="1" dirty="0">
+              <a:rPr lang="en-US" sz="1900" b="1" dirty="0">
                 <a:solidFill>
                   <a:srgbClr val="FFFFFF"/>
                 </a:solidFill>
@@ -6173,24 +6713,24 @@
         </p:nvSpPr>
         <p:spPr>
           <a:xfrm>
-            <a:off x="457200" y="1371600"/>
-            <a:ext cx="5029200" cy="2743200"/>
+            <a:off x="365760" y="1280160"/>
+            <a:ext cx="5120640" cy="2651760"/>
           </a:xfrm>
           <a:prstGeom prst="roundRect"/>
           <a:solidFill>
-            <a:srgbClr val="2ECC71"/>
+            <a:srgbClr val="1D6B3F"/>
           </a:solidFill>
           <a:ln>
             <a:noFill/>
           </a:ln>
         </p:spPr>
         <p:txBody>
-          <a:bodyPr wrap="square" anchor="ctr"/>
+          <a:bodyPr wrap="square" anchor="ctr" lIns="91440" rIns="91440" tIns="45720" bIns="45720"/>
           <a:lstStyle/>
           <a:p>
-            <a:pPr algn="ctr"/>
-            <a:r>
-              <a:rPr lang="en-US" sz="1300" b="1">
+            <a:pPr algn="l"/>
+            <a:r>
+              <a:rPr lang="en-US" sz="1200" b="1">
                 <a:solidFill>
                   <a:srgbClr val="FFFFFF"/>
                 </a:solidFill>
@@ -6200,19 +6740,19 @@
             </a:r>
           </a:p>
           <a:p>
-            <a:pPr algn="ctr"/>
-            <a:r>
-              <a:rPr lang="en-US" sz="200" b="0">
-                <a:solidFill>
-                  <a:srgbClr val="FFFFFF"/>
-                </a:solidFill>
-                <a:latin typeface="Segoe UI"/>
-              </a:rPr>
-              <a:t/>
-            </a:r>
-          </a:p>
-          <a:p>
-            <a:pPr algn="ctr"/>
+            <a:pPr algn="l"/>
+            <a:r>
+              <a:rPr lang="en-US" sz="150" b="0">
+                <a:solidFill>
+                  <a:srgbClr val="FFFFFF"/>
+                </a:solidFill>
+                <a:latin typeface="Segoe UI"/>
+              </a:rPr>
+              <a:t/>
+            </a:r>
+          </a:p>
+          <a:p>
+            <a:pPr algn="l"/>
             <a:r>
               <a:rPr lang="en-US" sz="1000" b="0">
                 <a:solidFill>
@@ -6224,7 +6764,7 @@
             </a:r>
           </a:p>
           <a:p>
-            <a:pPr algn="ctr"/>
+            <a:pPr algn="l"/>
             <a:r>
               <a:rPr lang="en-US" sz="1000" b="0">
                 <a:solidFill>
@@ -6236,7 +6776,7 @@
             </a:r>
           </a:p>
           <a:p>
-            <a:pPr algn="ctr"/>
+            <a:pPr algn="l"/>
             <a:r>
               <a:rPr lang="en-US" sz="1000" b="0">
                 <a:solidFill>
@@ -6248,7 +6788,7 @@
             </a:r>
           </a:p>
           <a:p>
-            <a:pPr algn="ctr"/>
+            <a:pPr algn="l"/>
             <a:r>
               <a:rPr lang="en-US" sz="1000" b="0">
                 <a:solidFill>
@@ -6260,7 +6800,7 @@
             </a:r>
           </a:p>
           <a:p>
-            <a:pPr algn="ctr"/>
+            <a:pPr algn="l"/>
             <a:r>
               <a:rPr lang="en-US" sz="1000" b="0">
                 <a:solidFill>
@@ -6272,7 +6812,7 @@
             </a:r>
           </a:p>
           <a:p>
-            <a:pPr algn="ctr"/>
+            <a:pPr algn="l"/>
             <a:r>
               <a:rPr lang="en-US" sz="1000" b="0">
                 <a:solidFill>
@@ -6287,28 +6827,28 @@
       </p:sp>
       <p:sp>
         <p:nvSpPr>
-          <p:cNvPr id="5" name="sm_opp"/>
+          <p:cNvPr id="5" name="sm"/>
           <p:cNvSpPr/>
           <p:nvPr/>
         </p:nvSpPr>
         <p:spPr>
           <a:xfrm>
-            <a:off x="457200" y="4297680"/>
-            <a:ext cx="5029200" cy="2286000"/>
+            <a:off x="365760" y="4114800"/>
+            <a:ext cx="5120640" cy="2377440"/>
           </a:xfrm>
           <a:prstGeom prst="roundRect"/>
           <a:solidFill>
-            <a:srgbClr val="3498DB"/>
+            <a:srgbClr val="2980B9"/>
           </a:solidFill>
           <a:ln>
             <a:noFill/>
           </a:ln>
         </p:spPr>
         <p:txBody>
-          <a:bodyPr wrap="square" anchor="ctr"/>
+          <a:bodyPr wrap="square" anchor="ctr" lIns="91440" rIns="91440" tIns="45720" bIns="45720"/>
           <a:lstStyle/>
           <a:p>
-            <a:pPr algn="ctr"/>
+            <a:pPr algn="l"/>
             <a:r>
               <a:rPr lang="en-US" sz="1200" b="1">
                 <a:solidFill>
@@ -6320,19 +6860,19 @@
             </a:r>
           </a:p>
           <a:p>
-            <a:pPr algn="ctr"/>
-            <a:r>
-              <a:rPr lang="en-US" sz="200" b="0">
-                <a:solidFill>
-                  <a:srgbClr val="FFFFFF"/>
-                </a:solidFill>
-                <a:latin typeface="Segoe UI"/>
-              </a:rPr>
-              <a:t/>
-            </a:r>
-          </a:p>
-          <a:p>
-            <a:pPr algn="ctr"/>
+            <a:pPr algn="l"/>
+            <a:r>
+              <a:rPr lang="en-US" sz="150" b="0">
+                <a:solidFill>
+                  <a:srgbClr val="FFFFFF"/>
+                </a:solidFill>
+                <a:latin typeface="Segoe UI"/>
+              </a:rPr>
+              <a:t/>
+            </a:r>
+          </a:p>
+          <a:p>
+            <a:pPr algn="l"/>
             <a:r>
               <a:rPr lang="en-US" sz="1000" b="0">
                 <a:solidFill>
@@ -6344,7 +6884,7 @@
             </a:r>
           </a:p>
           <a:p>
-            <a:pPr algn="ctr"/>
+            <a:pPr algn="l"/>
             <a:r>
               <a:rPr lang="en-US" sz="1000" b="0">
                 <a:solidFill>
@@ -6356,7 +6896,7 @@
             </a:r>
           </a:p>
           <a:p>
-            <a:pPr algn="ctr"/>
+            <a:pPr algn="l"/>
             <a:r>
               <a:rPr lang="en-US" sz="1000" b="0">
                 <a:solidFill>
@@ -6368,7 +6908,7 @@
             </a:r>
           </a:p>
           <a:p>
-            <a:pPr algn="ctr"/>
+            <a:pPr algn="l"/>
             <a:r>
               <a:rPr lang="en-US" sz="1000" b="0">
                 <a:solidFill>
@@ -6380,7 +6920,7 @@
             </a:r>
           </a:p>
           <a:p>
-            <a:pPr algn="ctr"/>
+            <a:pPr algn="l"/>
             <a:r>
               <a:rPr lang="en-US" sz="1000" b="0">
                 <a:solidFill>
@@ -6395,30 +6935,30 @@
       </p:sp>
       <p:sp>
         <p:nvSpPr>
-          <p:cNvPr id="6" name="growth"/>
+          <p:cNvPr id="6" name="gr"/>
           <p:cNvSpPr/>
           <p:nvPr/>
         </p:nvSpPr>
         <p:spPr>
           <a:xfrm>
-            <a:off x="5760720" y="1371600"/>
-            <a:ext cx="4846320" cy="5212080"/>
+            <a:off x="5669280" y="1280160"/>
+            <a:ext cx="4937760" cy="5212080"/>
           </a:xfrm>
           <a:prstGeom prst="roundRect"/>
           <a:solidFill>
-            <a:srgbClr val="F39C12"/>
+            <a:srgbClr val="D4740E"/>
           </a:solidFill>
           <a:ln>
             <a:noFill/>
           </a:ln>
         </p:spPr>
         <p:txBody>
-          <a:bodyPr wrap="square" anchor="ctr"/>
+          <a:bodyPr wrap="square" anchor="ctr" lIns="91440" rIns="91440" tIns="45720" bIns="45720"/>
           <a:lstStyle/>
           <a:p>
-            <a:pPr algn="ctr"/>
-            <a:r>
-              <a:rPr lang="en-US" sz="1300" b="1">
+            <a:pPr algn="l"/>
+            <a:r>
+              <a:rPr lang="en-US" sz="1200" b="1">
                 <a:solidFill>
                   <a:srgbClr val="FFFFFF"/>
                 </a:solidFill>
@@ -6428,21 +6968,21 @@
             </a:r>
           </a:p>
           <a:p>
-            <a:pPr algn="ctr"/>
-            <a:r>
-              <a:rPr lang="en-US" sz="200" b="0">
-                <a:solidFill>
-                  <a:srgbClr val="FFFFFF"/>
-                </a:solidFill>
-                <a:latin typeface="Segoe UI"/>
-              </a:rPr>
-              <a:t/>
-            </a:r>
-          </a:p>
-          <a:p>
-            <a:pPr algn="ctr"/>
-            <a:r>
-              <a:rPr lang="en-US" sz="1100" b="1">
+            <a:pPr algn="l"/>
+            <a:r>
+              <a:rPr lang="en-US" sz="150" b="0">
+                <a:solidFill>
+                  <a:srgbClr val="FFFFFF"/>
+                </a:solidFill>
+                <a:latin typeface="Segoe UI"/>
+              </a:rPr>
+              <a:t/>
+            </a:r>
+          </a:p>
+          <a:p>
+            <a:pPr algn="l"/>
+            <a:r>
+              <a:rPr lang="en-US" sz="1050" b="1">
                 <a:solidFill>
                   <a:srgbClr val="FFFFFF"/>
                 </a:solidFill>
@@ -6452,7 +6992,7 @@
             </a:r>
           </a:p>
           <a:p>
-            <a:pPr algn="ctr"/>
+            <a:pPr algn="l"/>
             <a:r>
               <a:rPr lang="en-US" sz="1000" b="0">
                 <a:solidFill>
@@ -6464,7 +7004,7 @@
             </a:r>
           </a:p>
           <a:p>
-            <a:pPr algn="ctr"/>
+            <a:pPr algn="l"/>
             <a:r>
               <a:rPr lang="en-US" sz="1000" b="0">
                 <a:solidFill>
@@ -6476,7 +7016,7 @@
             </a:r>
           </a:p>
           <a:p>
-            <a:pPr algn="ctr"/>
+            <a:pPr algn="l"/>
             <a:r>
               <a:rPr lang="en-US" sz="1000" b="0">
                 <a:solidFill>
@@ -6488,21 +7028,21 @@
             </a:r>
           </a:p>
           <a:p>
-            <a:pPr algn="ctr"/>
-            <a:r>
-              <a:rPr lang="en-US" sz="200" b="0">
-                <a:solidFill>
-                  <a:srgbClr val="FFFFFF"/>
-                </a:solidFill>
-                <a:latin typeface="Segoe UI"/>
-              </a:rPr>
-              <a:t/>
-            </a:r>
-          </a:p>
-          <a:p>
-            <a:pPr algn="ctr"/>
-            <a:r>
-              <a:rPr lang="en-US" sz="1100" b="1">
+            <a:pPr algn="l"/>
+            <a:r>
+              <a:rPr lang="en-US" sz="150" b="0">
+                <a:solidFill>
+                  <a:srgbClr val="FFFFFF"/>
+                </a:solidFill>
+                <a:latin typeface="Segoe UI"/>
+              </a:rPr>
+              <a:t/>
+            </a:r>
+          </a:p>
+          <a:p>
+            <a:pPr algn="l"/>
+            <a:r>
+              <a:rPr lang="en-US" sz="1050" b="1">
                 <a:solidFill>
                   <a:srgbClr val="FFFFFF"/>
                 </a:solidFill>
@@ -6512,7 +7052,7 @@
             </a:r>
           </a:p>
           <a:p>
-            <a:pPr algn="ctr"/>
+            <a:pPr algn="l"/>
             <a:r>
               <a:rPr lang="en-US" sz="1000" b="0">
                 <a:solidFill>
@@ -6524,7 +7064,7 @@
             </a:r>
           </a:p>
           <a:p>
-            <a:pPr algn="ctr"/>
+            <a:pPr algn="l"/>
             <a:r>
               <a:rPr lang="en-US" sz="1000" b="0">
                 <a:solidFill>
@@ -6536,7 +7076,7 @@
             </a:r>
           </a:p>
           <a:p>
-            <a:pPr algn="ctr"/>
+            <a:pPr algn="l"/>
             <a:r>
               <a:rPr lang="en-US" sz="1000" b="0">
                 <a:solidFill>
@@ -6548,21 +7088,21 @@
             </a:r>
           </a:p>
           <a:p>
-            <a:pPr algn="ctr"/>
-            <a:r>
-              <a:rPr lang="en-US" sz="200" b="0">
-                <a:solidFill>
-                  <a:srgbClr val="FFFFFF"/>
-                </a:solidFill>
-                <a:latin typeface="Segoe UI"/>
-              </a:rPr>
-              <a:t/>
-            </a:r>
-          </a:p>
-          <a:p>
-            <a:pPr algn="ctr"/>
-            <a:r>
-              <a:rPr lang="en-US" sz="1100" b="1">
+            <a:pPr algn="l"/>
+            <a:r>
+              <a:rPr lang="en-US" sz="150" b="0">
+                <a:solidFill>
+                  <a:srgbClr val="FFFFFF"/>
+                </a:solidFill>
+                <a:latin typeface="Segoe UI"/>
+              </a:rPr>
+              <a:t/>
+            </a:r>
+          </a:p>
+          <a:p>
+            <a:pPr algn="l"/>
+            <a:r>
+              <a:rPr lang="en-US" sz="1050" b="1">
                 <a:solidFill>
                   <a:srgbClr val="FFFFFF"/>
                 </a:solidFill>
@@ -6572,7 +7112,7 @@
             </a:r>
           </a:p>
           <a:p>
-            <a:pPr algn="ctr"/>
+            <a:pPr algn="l"/>
             <a:r>
               <a:rPr lang="en-US" sz="1000" b="0">
                 <a:solidFill>
@@ -6584,7 +7124,7 @@
             </a:r>
           </a:p>
           <a:p>
-            <a:pPr algn="ctr"/>
+            <a:pPr algn="l"/>
             <a:r>
               <a:rPr lang="en-US" sz="1000" b="0">
                 <a:solidFill>
@@ -6596,7 +7136,7 @@
             </a:r>
           </a:p>
           <a:p>
-            <a:pPr algn="ctr"/>
+            <a:pPr algn="l"/>
             <a:r>
               <a:rPr lang="en-US" sz="1000" b="0">
                 <a:solidFill>
@@ -6634,14 +7174,14 @@
       <p:grpSpPr/>
       <p:sp>
         <p:nvSpPr>
-          <p:cNvPr id="2" name="header_bg"/>
+          <p:cNvPr id="2" name="h"/>
           <p:cNvSpPr/>
           <p:nvPr/>
         </p:nvSpPr>
         <p:spPr>
           <a:xfrm>
             <a:off x="0" y="0"/>
-            <a:ext cx="12192000" cy="1097280"/>
+            <a:ext cx="12192000" cy="1005840"/>
           </a:xfrm>
           <a:prstGeom prst="rect"/>
           <a:solidFill>
@@ -6654,13 +7194,13 @@
       </p:sp>
       <p:sp>
         <p:nvSpPr>
-          <p:cNvPr id="3" name="header"/>
+          <p:cNvPr id="3" name="ht"/>
           <p:cNvSpPr txBox="1"/>
           <p:nvPr/>
         </p:nvSpPr>
         <p:spPr>
           <a:xfrm>
-            <a:off x="457200" y="182880"/>
+            <a:off x="457200" y="137160"/>
             <a:ext cx="9144000" cy="822960"/>
           </a:xfrm>
           <a:prstGeom prst="rect"/>
@@ -6676,7 +7216,7 @@
               </a:spcBef>
             </a:pPr>
             <a:r>
-              <a:rPr lang="en-US" sz="2000" b="1" dirty="0">
+              <a:rPr lang="en-US" sz="1900" b="1" dirty="0">
                 <a:solidFill>
                   <a:srgbClr val="FFFFFF"/>
                 </a:solidFill>
@@ -6689,14 +7229,14 @@
       </p:sp>
       <p:sp>
         <p:nvSpPr>
-          <p:cNvPr id="4" name="focus"/>
+          <p:cNvPr id="4" name="f"/>
           <p:cNvSpPr txBox="1"/>
           <p:nvPr/>
         </p:nvSpPr>
         <p:spPr>
           <a:xfrm>
-            <a:off x="457200" y="1188720"/>
-            <a:ext cx="10058400" cy="457200"/>
+            <a:off x="457200" y="1051560"/>
+            <a:ext cx="10058400" cy="365760"/>
           </a:xfrm>
           <a:prstGeom prst="rect"/>
           <a:noFill/>
@@ -6711,9 +7251,9 @@
               </a:spcBef>
             </a:pPr>
             <a:r>
-              <a:rPr lang="en-US" sz="1200" b="1" dirty="0">
-                <a:solidFill>
-                  <a:srgbClr val="E74C3C"/>
+              <a:rPr lang="en-US" sz="1150" b="1" dirty="0">
+                <a:solidFill>
+                  <a:srgbClr val="C41E3A"/>
                 </a:solidFill>
                 <a:latin typeface="Segoe UI"/>
               </a:rPr>
@@ -6730,22 +7270,22 @@
         </p:nvSpPr>
         <p:spPr>
           <a:xfrm>
-            <a:off x="457200" y="1737360"/>
-            <a:ext cx="5029200" cy="2286000"/>
+            <a:off x="365760" y="1554480"/>
+            <a:ext cx="5120640" cy="2194560"/>
           </a:xfrm>
           <a:prstGeom prst="roundRect"/>
           <a:solidFill>
-            <a:srgbClr val="F0F4F8"/>
+            <a:srgbClr val="F4F6F8"/>
           </a:solidFill>
           <a:ln>
             <a:noFill/>
           </a:ln>
         </p:spPr>
         <p:txBody>
-          <a:bodyPr wrap="square" anchor="ctr"/>
+          <a:bodyPr wrap="square" anchor="ctr" lIns="91440" rIns="91440" tIns="45720" bIns="45720"/>
           <a:lstStyle/>
           <a:p>
-            <a:pPr algn="ctr"/>
+            <a:pPr algn="l"/>
             <a:r>
               <a:rPr lang="en-US" sz="1100" b="1">
                 <a:solidFill>
@@ -6757,9 +7297,9 @@
             </a:r>
           </a:p>
           <a:p>
-            <a:pPr algn="ctr"/>
-            <a:r>
-              <a:rPr lang="en-US" sz="200" b="0">
+            <a:pPr algn="l"/>
+            <a:r>
+              <a:rPr lang="en-US" sz="150" b="0">
                 <a:solidFill>
                   <a:srgbClr val="333333"/>
                 </a:solidFill>
@@ -6769,7 +7309,7 @@
             </a:r>
           </a:p>
           <a:p>
-            <a:pPr algn="ctr"/>
+            <a:pPr algn="l"/>
             <a:r>
               <a:rPr lang="en-US" sz="950" b="0">
                 <a:solidFill>
@@ -6781,7 +7321,7 @@
             </a:r>
           </a:p>
           <a:p>
-            <a:pPr algn="ctr"/>
+            <a:pPr algn="l"/>
             <a:r>
               <a:rPr lang="en-US" sz="950" b="0">
                 <a:solidFill>
@@ -6793,7 +7333,7 @@
             </a:r>
           </a:p>
           <a:p>
-            <a:pPr algn="ctr"/>
+            <a:pPr algn="l"/>
             <a:r>
               <a:rPr lang="en-US" sz="950" b="0">
                 <a:solidFill>
@@ -6805,7 +7345,7 @@
             </a:r>
           </a:p>
           <a:p>
-            <a:pPr algn="ctr"/>
+            <a:pPr algn="l"/>
             <a:r>
               <a:rPr lang="en-US" sz="950" b="0">
                 <a:solidFill>
@@ -6817,9 +7357,9 @@
             </a:r>
           </a:p>
           <a:p>
-            <a:pPr algn="ctr"/>
-            <a:r>
-              <a:rPr lang="en-US" sz="200" b="0">
+            <a:pPr algn="l"/>
+            <a:r>
+              <a:rPr lang="en-US" sz="150" b="0">
                 <a:solidFill>
                   <a:srgbClr val="333333"/>
                 </a:solidFill>
@@ -6829,15 +7369,15 @@
             </a:r>
           </a:p>
           <a:p>
-            <a:pPr algn="ctr"/>
+            <a:pPr algn="l"/>
             <a:r>
               <a:rPr lang="en-US" sz="950" b="0">
                 <a:solidFill>
-                  <a:srgbClr val="3498DB"/>
-                </a:solidFill>
-                <a:latin typeface="Segoe UI"/>
-              </a:rPr>
-              <a:t>Blog: 'Why Choose Local Windows Manufacturer'</a:t>
+                  <a:srgbClr val="2980B9"/>
+                </a:solidFill>
+                <a:latin typeface="Segoe UI"/>
+              </a:rPr>
+              <a:t>Blog: 'Why Choose a Local Manufacturer'</a:t>
             </a:r>
           </a:p>
         </p:txBody>
@@ -6850,22 +7390,22 @@
         </p:nvSpPr>
         <p:spPr>
           <a:xfrm>
-            <a:off x="457200" y="4206240"/>
-            <a:ext cx="5029200" cy="2286000"/>
+            <a:off x="365760" y="3931920"/>
+            <a:ext cx="5120640" cy="2194560"/>
           </a:xfrm>
           <a:prstGeom prst="roundRect"/>
           <a:solidFill>
-            <a:srgbClr val="F0F4F8"/>
+            <a:srgbClr val="F4F6F8"/>
           </a:solidFill>
           <a:ln>
             <a:noFill/>
           </a:ln>
         </p:spPr>
         <p:txBody>
-          <a:bodyPr wrap="square" anchor="ctr"/>
+          <a:bodyPr wrap="square" anchor="ctr" lIns="91440" rIns="91440" tIns="45720" bIns="45720"/>
           <a:lstStyle/>
           <a:p>
-            <a:pPr algn="ctr"/>
+            <a:pPr algn="l"/>
             <a:r>
               <a:rPr lang="en-US" sz="1100" b="1">
                 <a:solidFill>
@@ -6877,9 +7417,9 @@
             </a:r>
           </a:p>
           <a:p>
-            <a:pPr algn="ctr"/>
-            <a:r>
-              <a:rPr lang="en-US" sz="200" b="0">
+            <a:pPr algn="l"/>
+            <a:r>
+              <a:rPr lang="en-US" sz="150" b="0">
                 <a:solidFill>
                   <a:srgbClr val="333333"/>
                 </a:solidFill>
@@ -6889,7 +7429,7 @@
             </a:r>
           </a:p>
           <a:p>
-            <a:pPr algn="ctr"/>
+            <a:pPr algn="l"/>
             <a:r>
               <a:rPr lang="en-US" sz="950" b="0">
                 <a:solidFill>
@@ -6901,7 +7441,7 @@
             </a:r>
           </a:p>
           <a:p>
-            <a:pPr algn="ctr"/>
+            <a:pPr algn="l"/>
             <a:r>
               <a:rPr lang="en-US" sz="950" b="0">
                 <a:solidFill>
@@ -6913,7 +7453,7 @@
             </a:r>
           </a:p>
           <a:p>
-            <a:pPr algn="ctr"/>
+            <a:pPr algn="l"/>
             <a:r>
               <a:rPr lang="en-US" sz="950" b="0">
                 <a:solidFill>
@@ -6925,7 +7465,7 @@
             </a:r>
           </a:p>
           <a:p>
-            <a:pPr algn="ctr"/>
+            <a:pPr algn="l"/>
             <a:r>
               <a:rPr lang="en-US" sz="950" b="0">
                 <a:solidFill>
@@ -6937,9 +7477,9 @@
             </a:r>
           </a:p>
           <a:p>
-            <a:pPr algn="ctr"/>
-            <a:r>
-              <a:rPr lang="en-US" sz="200" b="0">
+            <a:pPr algn="l"/>
+            <a:r>
+              <a:rPr lang="en-US" sz="150" b="0">
                 <a:solidFill>
                   <a:srgbClr val="333333"/>
                 </a:solidFill>
@@ -6949,11 +7489,11 @@
             </a:r>
           </a:p>
           <a:p>
-            <a:pPr algn="ctr"/>
+            <a:pPr algn="l"/>
             <a:r>
               <a:rPr lang="en-US" sz="950" b="0">
                 <a:solidFill>
-                  <a:srgbClr val="3498DB"/>
+                  <a:srgbClr val="2980B9"/>
                 </a:solidFill>
                 <a:latin typeface="Segoe UI"/>
               </a:rPr>
@@ -6964,14 +7504,14 @@
       </p:sp>
       <p:sp>
         <p:nvSpPr>
-          <p:cNvPr id="7" name="pillars"/>
+          <p:cNvPr id="7" name="pil"/>
           <p:cNvSpPr/>
           <p:nvPr/>
         </p:nvSpPr>
         <p:spPr>
           <a:xfrm>
-            <a:off x="5760720" y="1737360"/>
-            <a:ext cx="4846320" cy="4754880"/>
+            <a:off x="5669280" y="1554480"/>
+            <a:ext cx="4937760" cy="4572000"/>
           </a:xfrm>
           <a:prstGeom prst="roundRect"/>
           <a:solidFill>
@@ -6982,14 +7522,14 @@
           </a:ln>
         </p:spPr>
         <p:txBody>
-          <a:bodyPr wrap="square" anchor="ctr"/>
+          <a:bodyPr wrap="square" anchor="ctr" lIns="91440" rIns="91440" tIns="45720" bIns="45720"/>
           <a:lstStyle/>
           <a:p>
-            <a:pPr algn="ctr"/>
+            <a:pPr algn="l"/>
             <a:r>
               <a:rPr lang="en-US" sz="1200" b="1">
                 <a:solidFill>
-                  <a:srgbClr val="E74C3C"/>
+                  <a:srgbClr val="C41E3A"/>
                 </a:solidFill>
                 <a:latin typeface="Segoe UI"/>
               </a:rPr>
@@ -6997,19 +7537,19 @@
             </a:r>
           </a:p>
           <a:p>
-            <a:pPr algn="ctr"/>
-            <a:r>
-              <a:rPr lang="en-US" sz="300" b="0">
-                <a:solidFill>
-                  <a:srgbClr val="FFFFFF"/>
-                </a:solidFill>
-                <a:latin typeface="Segoe UI"/>
-              </a:rPr>
-              <a:t/>
-            </a:r>
-          </a:p>
-          <a:p>
-            <a:pPr algn="ctr"/>
+            <a:pPr algn="l"/>
+            <a:r>
+              <a:rPr lang="en-US" sz="250" b="0">
+                <a:solidFill>
+                  <a:srgbClr val="FFFFFF"/>
+                </a:solidFill>
+                <a:latin typeface="Segoe UI"/>
+              </a:rPr>
+              <a:t/>
+            </a:r>
+          </a:p>
+          <a:p>
+            <a:pPr algn="l"/>
             <a:r>
               <a:rPr lang="en-US" sz="1050" b="0">
                 <a:solidFill>
@@ -7021,7 +7561,7 @@
             </a:r>
           </a:p>
           <a:p>
-            <a:pPr algn="ctr"/>
+            <a:pPr algn="l"/>
             <a:r>
               <a:rPr lang="en-US" sz="900" b="0">
                 <a:solidFill>
@@ -7033,19 +7573,19 @@
             </a:r>
           </a:p>
           <a:p>
-            <a:pPr algn="ctr"/>
-            <a:r>
-              <a:rPr lang="en-US" sz="200" b="0">
-                <a:solidFill>
-                  <a:srgbClr val="FFFFFF"/>
-                </a:solidFill>
-                <a:latin typeface="Segoe UI"/>
-              </a:rPr>
-              <a:t/>
-            </a:r>
-          </a:p>
-          <a:p>
-            <a:pPr algn="ctr"/>
+            <a:pPr algn="l"/>
+            <a:r>
+              <a:rPr lang="en-US" sz="150" b="0">
+                <a:solidFill>
+                  <a:srgbClr val="FFFFFF"/>
+                </a:solidFill>
+                <a:latin typeface="Segoe UI"/>
+              </a:rPr>
+              <a:t/>
+            </a:r>
+          </a:p>
+          <a:p>
+            <a:pPr algn="l"/>
             <a:r>
               <a:rPr lang="en-US" sz="1050" b="0">
                 <a:solidFill>
@@ -7057,7 +7597,7 @@
             </a:r>
           </a:p>
           <a:p>
-            <a:pPr algn="ctr"/>
+            <a:pPr algn="l"/>
             <a:r>
               <a:rPr lang="en-US" sz="900" b="0">
                 <a:solidFill>
@@ -7069,19 +7609,19 @@
             </a:r>
           </a:p>
           <a:p>
-            <a:pPr algn="ctr"/>
-            <a:r>
-              <a:rPr lang="en-US" sz="200" b="0">
-                <a:solidFill>
-                  <a:srgbClr val="FFFFFF"/>
-                </a:solidFill>
-                <a:latin typeface="Segoe UI"/>
-              </a:rPr>
-              <a:t/>
-            </a:r>
-          </a:p>
-          <a:p>
-            <a:pPr algn="ctr"/>
+            <a:pPr algn="l"/>
+            <a:r>
+              <a:rPr lang="en-US" sz="150" b="0">
+                <a:solidFill>
+                  <a:srgbClr val="FFFFFF"/>
+                </a:solidFill>
+                <a:latin typeface="Segoe UI"/>
+              </a:rPr>
+              <a:t/>
+            </a:r>
+          </a:p>
+          <a:p>
+            <a:pPr algn="l"/>
             <a:r>
               <a:rPr lang="en-US" sz="1050" b="0">
                 <a:solidFill>
@@ -7093,7 +7633,7 @@
             </a:r>
           </a:p>
           <a:p>
-            <a:pPr algn="ctr"/>
+            <a:pPr algn="l"/>
             <a:r>
               <a:rPr lang="en-US" sz="900" b="0">
                 <a:solidFill>
@@ -7105,19 +7645,19 @@
             </a:r>
           </a:p>
           <a:p>
-            <a:pPr algn="ctr"/>
-            <a:r>
-              <a:rPr lang="en-US" sz="200" b="0">
-                <a:solidFill>
-                  <a:srgbClr val="FFFFFF"/>
-                </a:solidFill>
-                <a:latin typeface="Segoe UI"/>
-              </a:rPr>
-              <a:t/>
-            </a:r>
-          </a:p>
-          <a:p>
-            <a:pPr algn="ctr"/>
+            <a:pPr algn="l"/>
+            <a:r>
+              <a:rPr lang="en-US" sz="150" b="0">
+                <a:solidFill>
+                  <a:srgbClr val="FFFFFF"/>
+                </a:solidFill>
+                <a:latin typeface="Segoe UI"/>
+              </a:rPr>
+              <a:t/>
+            </a:r>
+          </a:p>
+          <a:p>
+            <a:pPr algn="l"/>
             <a:r>
               <a:rPr lang="en-US" sz="1050" b="0">
                 <a:solidFill>
@@ -7129,7 +7669,7 @@
             </a:r>
           </a:p>
           <a:p>
-            <a:pPr algn="ctr"/>
+            <a:pPr algn="l"/>
             <a:r>
               <a:rPr lang="en-US" sz="900" b="0">
                 <a:solidFill>
@@ -7141,19 +7681,19 @@
             </a:r>
           </a:p>
           <a:p>
-            <a:pPr algn="ctr"/>
-            <a:r>
-              <a:rPr lang="en-US" sz="200" b="0">
-                <a:solidFill>
-                  <a:srgbClr val="FFFFFF"/>
-                </a:solidFill>
-                <a:latin typeface="Segoe UI"/>
-              </a:rPr>
-              <a:t/>
-            </a:r>
-          </a:p>
-          <a:p>
-            <a:pPr algn="ctr"/>
+            <a:pPr algn="l"/>
+            <a:r>
+              <a:rPr lang="en-US" sz="150" b="0">
+                <a:solidFill>
+                  <a:srgbClr val="FFFFFF"/>
+                </a:solidFill>
+                <a:latin typeface="Segoe UI"/>
+              </a:rPr>
+              <a:t/>
+            </a:r>
+          </a:p>
+          <a:p>
+            <a:pPr algn="l"/>
             <a:r>
               <a:rPr lang="en-US" sz="1050" b="0">
                 <a:solidFill>
@@ -7165,7 +7705,7 @@
             </a:r>
           </a:p>
           <a:p>
-            <a:pPr algn="ctr"/>
+            <a:pPr algn="l"/>
             <a:r>
               <a:rPr lang="en-US" sz="900" b="0">
                 <a:solidFill>
@@ -7203,14 +7743,14 @@
       <p:grpSpPr/>
       <p:sp>
         <p:nvSpPr>
-          <p:cNvPr id="2" name="header_bg"/>
+          <p:cNvPr id="2" name="h"/>
           <p:cNvSpPr/>
           <p:nvPr/>
         </p:nvSpPr>
         <p:spPr>
           <a:xfrm>
             <a:off x="0" y="0"/>
-            <a:ext cx="12192000" cy="1097280"/>
+            <a:ext cx="12192000" cy="1005840"/>
           </a:xfrm>
           <a:prstGeom prst="rect"/>
           <a:solidFill>
@@ -7223,13 +7763,13 @@
       </p:sp>
       <p:sp>
         <p:nvSpPr>
-          <p:cNvPr id="3" name="header"/>
+          <p:cNvPr id="3" name="ht"/>
           <p:cNvSpPr txBox="1"/>
           <p:nvPr/>
         </p:nvSpPr>
         <p:spPr>
           <a:xfrm>
-            <a:off x="457200" y="182880"/>
+            <a:off x="457200" y="137160"/>
             <a:ext cx="9144000" cy="822960"/>
           </a:xfrm>
           <a:prstGeom prst="rect"/>
@@ -7245,7 +7785,7 @@
               </a:spcBef>
             </a:pPr>
             <a:r>
-              <a:rPr lang="en-US" sz="2000" b="1" dirty="0">
+              <a:rPr lang="en-US" sz="1900" b="1" dirty="0">
                 <a:solidFill>
                   <a:srgbClr val="FFFFFF"/>
                 </a:solidFill>
@@ -7258,14 +7798,14 @@
       </p:sp>
       <p:sp>
         <p:nvSpPr>
-          <p:cNvPr id="4" name="focus"/>
+          <p:cNvPr id="4" name="f"/>
           <p:cNvSpPr txBox="1"/>
           <p:nvPr/>
         </p:nvSpPr>
         <p:spPr>
           <a:xfrm>
-            <a:off x="457200" y="1188720"/>
-            <a:ext cx="10058400" cy="457200"/>
+            <a:off x="457200" y="1051560"/>
+            <a:ext cx="10058400" cy="365760"/>
           </a:xfrm>
           <a:prstGeom prst="rect"/>
           <a:noFill/>
@@ -7280,13 +7820,13 @@
               </a:spcBef>
             </a:pPr>
             <a:r>
-              <a:rPr lang="en-US" sz="1200" b="1" dirty="0">
-                <a:solidFill>
-                  <a:srgbClr val="E74C3C"/>
-                </a:solidFill>
-                <a:latin typeface="Segoe UI"/>
-              </a:rPr>
-              <a:t>THEME: Drive Engagement &amp; Community Building | 4-5 posts/week</a:t>
+              <a:rPr lang="en-US" sz="1150" b="1" dirty="0">
+                <a:solidFill>
+                  <a:srgbClr val="C41E3A"/>
+                </a:solidFill>
+                <a:latin typeface="Segoe UI"/>
+              </a:rPr>
+              <a:t>THEME: Drive Engagement &amp; Community | 4-5 posts/week</a:t>
             </a:r>
           </a:p>
         </p:txBody>
@@ -7299,22 +7839,22 @@
         </p:nvSpPr>
         <p:spPr>
           <a:xfrm>
-            <a:off x="457200" y="1737360"/>
-            <a:ext cx="5029200" cy="2286000"/>
+            <a:off x="365760" y="1554480"/>
+            <a:ext cx="5120640" cy="2194560"/>
           </a:xfrm>
           <a:prstGeom prst="roundRect"/>
           <a:solidFill>
-            <a:srgbClr val="F0F4F8"/>
+            <a:srgbClr val="F4F6F8"/>
           </a:solidFill>
           <a:ln>
             <a:noFill/>
           </a:ln>
         </p:spPr>
         <p:txBody>
-          <a:bodyPr wrap="square" anchor="ctr"/>
+          <a:bodyPr wrap="square" anchor="ctr" lIns="91440" rIns="91440" tIns="45720" bIns="45720"/>
           <a:lstStyle/>
           <a:p>
-            <a:pPr algn="ctr"/>
+            <a:pPr algn="l"/>
             <a:r>
               <a:rPr lang="en-US" sz="1100" b="1">
                 <a:solidFill>
@@ -7326,9 +7866,9 @@
             </a:r>
           </a:p>
           <a:p>
-            <a:pPr algn="ctr"/>
-            <a:r>
-              <a:rPr lang="en-US" sz="200" b="0">
+            <a:pPr algn="l"/>
+            <a:r>
+              <a:rPr lang="en-US" sz="150" b="0">
                 <a:solidFill>
                   <a:srgbClr val="333333"/>
                 </a:solidFill>
@@ -7338,7 +7878,7 @@
             </a:r>
           </a:p>
           <a:p>
-            <a:pPr algn="ctr"/>
+            <a:pPr algn="l"/>
             <a:r>
               <a:rPr lang="en-US" sz="950" b="0">
                 <a:solidFill>
@@ -7350,7 +7890,7 @@
             </a:r>
           </a:p>
           <a:p>
-            <a:pPr algn="ctr"/>
+            <a:pPr algn="l"/>
             <a:r>
               <a:rPr lang="en-US" sz="950" b="0">
                 <a:solidFill>
@@ -7362,7 +7902,7 @@
             </a:r>
           </a:p>
           <a:p>
-            <a:pPr algn="ctr"/>
+            <a:pPr algn="l"/>
             <a:r>
               <a:rPr lang="en-US" sz="950" b="0">
                 <a:solidFill>
@@ -7374,7 +7914,7 @@
             </a:r>
           </a:p>
           <a:p>
-            <a:pPr algn="ctr"/>
+            <a:pPr algn="l"/>
             <a:r>
               <a:rPr lang="en-US" sz="950" b="0">
                 <a:solidFill>
@@ -7386,7 +7926,7 @@
             </a:r>
           </a:p>
           <a:p>
-            <a:pPr algn="ctr"/>
+            <a:pPr algn="l"/>
             <a:r>
               <a:rPr lang="en-US" sz="950" b="0">
                 <a:solidFill>
@@ -7398,9 +7938,9 @@
             </a:r>
           </a:p>
           <a:p>
-            <a:pPr algn="ctr"/>
-            <a:r>
-              <a:rPr lang="en-US" sz="200" b="0">
+            <a:pPr algn="l"/>
+            <a:r>
+              <a:rPr lang="en-US" sz="150" b="0">
                 <a:solidFill>
                   <a:srgbClr val="333333"/>
                 </a:solidFill>
@@ -7410,11 +7950,11 @@
             </a:r>
           </a:p>
           <a:p>
-            <a:pPr algn="ctr"/>
+            <a:pPr algn="l"/>
             <a:r>
               <a:rPr lang="en-US" sz="950" b="0">
                 <a:solidFill>
-                  <a:srgbClr val="3498DB"/>
+                  <a:srgbClr val="2980B9"/>
                 </a:solidFill>
                 <a:latin typeface="Segoe UI"/>
               </a:rPr>
@@ -7431,22 +7971,22 @@
         </p:nvSpPr>
         <p:spPr>
           <a:xfrm>
-            <a:off x="457200" y="4206240"/>
-            <a:ext cx="5029200" cy="2286000"/>
+            <a:off x="365760" y="3931920"/>
+            <a:ext cx="5120640" cy="2194560"/>
           </a:xfrm>
           <a:prstGeom prst="roundRect"/>
           <a:solidFill>
-            <a:srgbClr val="F0F4F8"/>
+            <a:srgbClr val="F4F6F8"/>
           </a:solidFill>
           <a:ln>
             <a:noFill/>
           </a:ln>
         </p:spPr>
         <p:txBody>
-          <a:bodyPr wrap="square" anchor="ctr"/>
+          <a:bodyPr wrap="square" anchor="ctr" lIns="91440" rIns="91440" tIns="45720" bIns="45720"/>
           <a:lstStyle/>
           <a:p>
-            <a:pPr algn="ctr"/>
+            <a:pPr algn="l"/>
             <a:r>
               <a:rPr lang="en-US" sz="1100" b="1">
                 <a:solidFill>
@@ -7458,9 +7998,9 @@
             </a:r>
           </a:p>
           <a:p>
-            <a:pPr algn="ctr"/>
-            <a:r>
-              <a:rPr lang="en-US" sz="200" b="0">
+            <a:pPr algn="l"/>
+            <a:r>
+              <a:rPr lang="en-US" sz="150" b="0">
                 <a:solidFill>
                   <a:srgbClr val="333333"/>
                 </a:solidFill>
@@ -7470,7 +8010,7 @@
             </a:r>
           </a:p>
           <a:p>
-            <a:pPr algn="ctr"/>
+            <a:pPr algn="l"/>
             <a:r>
               <a:rPr lang="en-US" sz="950" b="0">
                 <a:solidFill>
@@ -7478,11 +8018,11 @@
                 </a:solidFill>
                 <a:latin typeface="Segoe UI"/>
               </a:rPr>
-              <a:t>Mon: 'Calgary Weather vs. Our Windows' (Reel)</a:t>
-            </a:r>
-          </a:p>
-          <a:p>
-            <a:pPr algn="ctr"/>
+              <a:t>Mon: 'Calgary Weather vs Our Windows' (Reel)</a:t>
+            </a:r>
+          </a:p>
+          <a:p>
+            <a:pPr algn="l"/>
             <a:r>
               <a:rPr lang="en-US" sz="950" b="0">
                 <a:solidFill>
@@ -7494,7 +8034,7 @@
             </a:r>
           </a:p>
           <a:p>
-            <a:pPr algn="ctr"/>
+            <a:pPr algn="l"/>
             <a:r>
               <a:rPr lang="en-US" sz="950" b="0">
                 <a:solidFill>
@@ -7506,7 +8046,7 @@
             </a:r>
           </a:p>
           <a:p>
-            <a:pPr algn="ctr"/>
+            <a:pPr algn="l"/>
             <a:r>
               <a:rPr lang="en-US" sz="950" b="0">
                 <a:solidFill>
@@ -7518,7 +8058,7 @@
             </a:r>
           </a:p>
           <a:p>
-            <a:pPr algn="ctr"/>
+            <a:pPr algn="l"/>
             <a:r>
               <a:rPr lang="en-US" sz="950" b="0">
                 <a:solidFill>
@@ -7530,9 +8070,9 @@
             </a:r>
           </a:p>
           <a:p>
-            <a:pPr algn="ctr"/>
-            <a:r>
-              <a:rPr lang="en-US" sz="200" b="0">
+            <a:pPr algn="l"/>
+            <a:r>
+              <a:rPr lang="en-US" sz="150" b="0">
                 <a:solidFill>
                   <a:srgbClr val="333333"/>
                 </a:solidFill>
@@ -7542,11 +8082,11 @@
             </a:r>
           </a:p>
           <a:p>
-            <a:pPr algn="ctr"/>
+            <a:pPr algn="l"/>
             <a:r>
               <a:rPr lang="en-US" sz="950" b="0">
                 <a:solidFill>
-                  <a:srgbClr val="3498DB"/>
+                  <a:srgbClr val="2980B9"/>
                 </a:solidFill>
                 <a:latin typeface="Segoe UI"/>
               </a:rPr>
@@ -7557,28 +8097,28 @@
       </p:sp>
       <p:sp>
         <p:nvSpPr>
-          <p:cNvPr id="7" name="creative"/>
+          <p:cNvPr id="7" name="cr"/>
           <p:cNvSpPr/>
           <p:nvPr/>
         </p:nvSpPr>
         <p:spPr>
           <a:xfrm>
-            <a:off x="5760720" y="1737360"/>
-            <a:ext cx="4846320" cy="4754880"/>
+            <a:off x="5669280" y="1554480"/>
+            <a:ext cx="4937760" cy="4572000"/>
           </a:xfrm>
           <a:prstGeom prst="roundRect"/>
           <a:solidFill>
-            <a:srgbClr val="9B59B6"/>
+            <a:srgbClr val="5B2D8E"/>
           </a:solidFill>
           <a:ln>
             <a:noFill/>
           </a:ln>
         </p:spPr>
         <p:txBody>
-          <a:bodyPr wrap="square" anchor="ctr"/>
+          <a:bodyPr wrap="square" anchor="ctr" lIns="91440" rIns="91440" tIns="45720" bIns="45720"/>
           <a:lstStyle/>
           <a:p>
-            <a:pPr algn="ctr"/>
+            <a:pPr algn="l"/>
             <a:r>
               <a:rPr lang="en-US" sz="1200" b="1">
                 <a:solidFill>
@@ -7590,19 +8130,19 @@
             </a:r>
           </a:p>
           <a:p>
-            <a:pPr algn="ctr"/>
-            <a:r>
-              <a:rPr lang="en-US" sz="300" b="0">
-                <a:solidFill>
-                  <a:srgbClr val="FFFFFF"/>
-                </a:solidFill>
-                <a:latin typeface="Segoe UI"/>
-              </a:rPr>
-              <a:t/>
-            </a:r>
-          </a:p>
-          <a:p>
-            <a:pPr algn="ctr"/>
+            <a:pPr algn="l"/>
+            <a:r>
+              <a:rPr lang="en-US" sz="250" b="0">
+                <a:solidFill>
+                  <a:srgbClr val="FFFFFF"/>
+                </a:solidFill>
+                <a:latin typeface="Segoe UI"/>
+              </a:rPr>
+              <a:t/>
+            </a:r>
+          </a:p>
+          <a:p>
+            <a:pPr algn="l"/>
             <a:r>
               <a:rPr lang="en-US" sz="1050" b="0">
                 <a:solidFill>
@@ -7614,7 +8154,7 @@
             </a:r>
           </a:p>
           <a:p>
-            <a:pPr algn="ctr"/>
+            <a:pPr algn="l"/>
             <a:r>
               <a:rPr lang="en-US" sz="900" b="0">
                 <a:solidFill>
@@ -7622,23 +8162,23 @@
                 </a:solidFill>
                 <a:latin typeface="Segoe UI"/>
               </a:rPr>
-              <a:t>   Weekly series showing project reveals</a:t>
-            </a:r>
-          </a:p>
-          <a:p>
-            <a:pPr algn="ctr"/>
-            <a:r>
-              <a:rPr lang="en-US" sz="200" b="0">
-                <a:solidFill>
-                  <a:srgbClr val="FFFFFF"/>
-                </a:solidFill>
-                <a:latin typeface="Segoe UI"/>
-              </a:rPr>
-              <a:t/>
-            </a:r>
-          </a:p>
-          <a:p>
-            <a:pPr algn="ctr"/>
+              <a:t>   Weekly series - project reveals</a:t>
+            </a:r>
+          </a:p>
+          <a:p>
+            <a:pPr algn="l"/>
+            <a:r>
+              <a:rPr lang="en-US" sz="150" b="0">
+                <a:solidFill>
+                  <a:srgbClr val="FFFFFF"/>
+                </a:solidFill>
+                <a:latin typeface="Segoe UI"/>
+              </a:rPr>
+              <a:t/>
+            </a:r>
+          </a:p>
+          <a:p>
+            <a:pPr algn="l"/>
             <a:r>
               <a:rPr lang="en-US" sz="1050" b="0">
                 <a:solidFill>
@@ -7650,7 +8190,7 @@
             </a:r>
           </a:p>
           <a:p>
-            <a:pPr algn="ctr"/>
+            <a:pPr algn="l"/>
             <a:r>
               <a:rPr lang="en-US" sz="900" b="0">
                 <a:solidFill>
@@ -7658,23 +8198,23 @@
                 </a:solidFill>
                 <a:latin typeface="Segoe UI"/>
               </a:rPr>
-              <a:t>   Answer common homeowner questions</a:t>
-            </a:r>
-          </a:p>
-          <a:p>
-            <a:pPr algn="ctr"/>
-            <a:r>
-              <a:rPr lang="en-US" sz="200" b="0">
-                <a:solidFill>
-                  <a:srgbClr val="FFFFFF"/>
-                </a:solidFill>
-                <a:latin typeface="Segoe UI"/>
-              </a:rPr>
-              <a:t/>
-            </a:r>
-          </a:p>
-          <a:p>
-            <a:pPr algn="ctr"/>
+              <a:t>   Answer homeowner questions</a:t>
+            </a:r>
+          </a:p>
+          <a:p>
+            <a:pPr algn="l"/>
+            <a:r>
+              <a:rPr lang="en-US" sz="150" b="0">
+                <a:solidFill>
+                  <a:srgbClr val="FFFFFF"/>
+                </a:solidFill>
+                <a:latin typeface="Segoe UI"/>
+              </a:rPr>
+              <a:t/>
+            </a:r>
+          </a:p>
+          <a:p>
+            <a:pPr algn="l"/>
             <a:r>
               <a:rPr lang="en-US" sz="1050" b="0">
                 <a:solidFill>
@@ -7686,7 +8226,7 @@
             </a:r>
           </a:p>
           <a:p>
-            <a:pPr algn="ctr"/>
+            <a:pPr algn="l"/>
             <a:r>
               <a:rPr lang="en-US" sz="900" b="0">
                 <a:solidFill>
@@ -7698,19 +8238,19 @@
             </a:r>
           </a:p>
           <a:p>
-            <a:pPr algn="ctr"/>
-            <a:r>
-              <a:rPr lang="en-US" sz="200" b="0">
-                <a:solidFill>
-                  <a:srgbClr val="FFFFFF"/>
-                </a:solidFill>
-                <a:latin typeface="Segoe UI"/>
-              </a:rPr>
-              <a:t/>
-            </a:r>
-          </a:p>
-          <a:p>
-            <a:pPr algn="ctr"/>
+            <a:pPr algn="l"/>
+            <a:r>
+              <a:rPr lang="en-US" sz="150" b="0">
+                <a:solidFill>
+                  <a:srgbClr val="FFFFFF"/>
+                </a:solidFill>
+                <a:latin typeface="Segoe UI"/>
+              </a:rPr>
+              <a:t/>
+            </a:r>
+          </a:p>
+          <a:p>
+            <a:pPr algn="l"/>
             <a:r>
               <a:rPr lang="en-US" sz="1050" b="0">
                 <a:solidFill>
@@ -7722,7 +8262,7 @@
             </a:r>
           </a:p>
           <a:p>
-            <a:pPr algn="ctr"/>
+            <a:pPr algn="l"/>
             <a:r>
               <a:rPr lang="en-US" sz="900" b="0">
                 <a:solidFill>
@@ -7734,19 +8274,19 @@
             </a:r>
           </a:p>
           <a:p>
-            <a:pPr algn="ctr"/>
-            <a:r>
-              <a:rPr lang="en-US" sz="200" b="0">
-                <a:solidFill>
-                  <a:srgbClr val="FFFFFF"/>
-                </a:solidFill>
-                <a:latin typeface="Segoe UI"/>
-              </a:rPr>
-              <a:t/>
-            </a:r>
-          </a:p>
-          <a:p>
-            <a:pPr algn="ctr"/>
+            <a:pPr algn="l"/>
+            <a:r>
+              <a:rPr lang="en-US" sz="150" b="0">
+                <a:solidFill>
+                  <a:srgbClr val="FFFFFF"/>
+                </a:solidFill>
+                <a:latin typeface="Segoe UI"/>
+              </a:rPr>
+              <a:t/>
+            </a:r>
+          </a:p>
+          <a:p>
+            <a:pPr algn="l"/>
             <a:r>
               <a:rPr lang="en-US" sz="1050" b="0">
                 <a:solidFill>
@@ -7758,7 +8298,7 @@
             </a:r>
           </a:p>
           <a:p>
-            <a:pPr algn="ctr"/>
+            <a:pPr algn="l"/>
             <a:r>
               <a:rPr lang="en-US" sz="900" b="0">
                 <a:solidFill>
@@ -7793,10 +8333,10 @@
         <a:srgbClr val="F8F9FA"/>
       </a:lt2>
       <a:accent1>
-        <a:srgbClr val="E74C3C"/>
+        <a:srgbClr val="C41E3A"/>
       </a:accent1>
       <a:accent2>
-        <a:srgbClr val="3498DB"/>
+        <a:srgbClr val="1B2A4A"/>
       </a:accent2>
       <a:accent3>
         <a:srgbClr val="2ECC71"/>
@@ -7805,13 +8345,13 @@
         <a:srgbClr val="F39C12"/>
       </a:accent4>
       <a:accent5>
-        <a:srgbClr val="9B59B6"/>
+        <a:srgbClr val="3498DB"/>
       </a:accent5>
       <a:accent6>
         <a:srgbClr val="1ABC9C"/>
       </a:accent6>
       <a:hlink>
-        <a:srgbClr val="3498DB"/>
+        <a:srgbClr val="C41E3A"/>
       </a:hlink>
       <a:folHlink>
         <a:srgbClr val="9B59B6"/>
